--- a/Lectures/15-ml-in-practice-and-model-selection-part-3.pptx
+++ b/Lectures/15-ml-in-practice-and-model-selection-part-3.pptx
@@ -13,35 +13,35 @@
     <p:sldId id="505" r:id="rId4"/>
     <p:sldId id="323" r:id="rId5"/>
     <p:sldId id="526" r:id="rId6"/>
-    <p:sldId id="512" r:id="rId7"/>
-    <p:sldId id="520" r:id="rId8"/>
-    <p:sldId id="511" r:id="rId9"/>
-    <p:sldId id="287" r:id="rId10"/>
-    <p:sldId id="521" r:id="rId11"/>
-    <p:sldId id="463" r:id="rId12"/>
-    <p:sldId id="464" r:id="rId13"/>
-    <p:sldId id="518" r:id="rId14"/>
-    <p:sldId id="519" r:id="rId15"/>
-    <p:sldId id="284" r:id="rId16"/>
-    <p:sldId id="474" r:id="rId17"/>
-    <p:sldId id="475" r:id="rId18"/>
-    <p:sldId id="476" r:id="rId19"/>
-    <p:sldId id="477" r:id="rId20"/>
-    <p:sldId id="478" r:id="rId21"/>
-    <p:sldId id="486" r:id="rId22"/>
-    <p:sldId id="484" r:id="rId23"/>
-    <p:sldId id="488" r:id="rId24"/>
-    <p:sldId id="489" r:id="rId25"/>
-    <p:sldId id="490" r:id="rId26"/>
-    <p:sldId id="491" r:id="rId27"/>
-    <p:sldId id="492" r:id="rId28"/>
-    <p:sldId id="493" r:id="rId29"/>
-    <p:sldId id="494" r:id="rId30"/>
-    <p:sldId id="495" r:id="rId31"/>
-    <p:sldId id="522" r:id="rId32"/>
-    <p:sldId id="524" r:id="rId33"/>
-    <p:sldId id="523" r:id="rId34"/>
-    <p:sldId id="487" r:id="rId35"/>
+    <p:sldId id="527" r:id="rId7"/>
+    <p:sldId id="512" r:id="rId8"/>
+    <p:sldId id="520" r:id="rId9"/>
+    <p:sldId id="463" r:id="rId10"/>
+    <p:sldId id="464" r:id="rId11"/>
+    <p:sldId id="518" r:id="rId12"/>
+    <p:sldId id="519" r:id="rId13"/>
+    <p:sldId id="284" r:id="rId14"/>
+    <p:sldId id="474" r:id="rId15"/>
+    <p:sldId id="475" r:id="rId16"/>
+    <p:sldId id="476" r:id="rId17"/>
+    <p:sldId id="477" r:id="rId18"/>
+    <p:sldId id="478" r:id="rId19"/>
+    <p:sldId id="486" r:id="rId20"/>
+    <p:sldId id="484" r:id="rId21"/>
+    <p:sldId id="488" r:id="rId22"/>
+    <p:sldId id="489" r:id="rId23"/>
+    <p:sldId id="490" r:id="rId24"/>
+    <p:sldId id="491" r:id="rId25"/>
+    <p:sldId id="492" r:id="rId26"/>
+    <p:sldId id="493" r:id="rId27"/>
+    <p:sldId id="494" r:id="rId28"/>
+    <p:sldId id="495" r:id="rId29"/>
+    <p:sldId id="522" r:id="rId30"/>
+    <p:sldId id="524" r:id="rId31"/>
+    <p:sldId id="523" r:id="rId32"/>
+    <p:sldId id="487" r:id="rId33"/>
+    <p:sldId id="528" r:id="rId34"/>
+    <p:sldId id="529" r:id="rId35"/>
     <p:sldId id="496" r:id="rId36"/>
     <p:sldId id="514" r:id="rId37"/>
     <p:sldId id="517" r:id="rId38"/>
@@ -12387,187 +12387,6 @@
       </p:grpSpPr>
       <p:sp>
         <p:nvSpPr>
-          <p:cNvPr id="2" name="Content Placeholder 1"/>
-          <p:cNvSpPr>
-            <a:spLocks noGrp="1"/>
-          </p:cNvSpPr>
-          <p:nvPr>
-            <p:ph type="body" idx="1"/>
-          </p:nvPr>
-        </p:nvSpPr>
-        <p:spPr/>
-        <p:txBody>
-          <a:bodyPr/>
-          <a:lstStyle/>
-          <a:p>
-            <a:pPr marL="76200" indent="0">
-              <a:buNone/>
-            </a:pPr>
-            <a:r>
-              <a:rPr lang="en-US" sz="4400" dirty="0"/>
-              <a:t>Questions about model selection metrics and validation strategies?</a:t>
-            </a:r>
-          </a:p>
-        </p:txBody>
-      </p:sp>
-    </p:spTree>
-    <p:extLst>
-      <p:ext uri="{BB962C8B-B14F-4D97-AF65-F5344CB8AC3E}">
-        <p14:creationId xmlns:p14="http://schemas.microsoft.com/office/powerpoint/2010/main" val="2937345547"/>
-      </p:ext>
-    </p:extLst>
-  </p:cSld>
-  <p:clrMapOvr>
-    <a:masterClrMapping/>
-  </p:clrMapOvr>
-</p:sld>
-</file>
-
-<file path=ppt/slides/slide11.xml><?xml version="1.0" encoding="utf-8"?>
-<p:sld xmlns:a="http://schemas.openxmlformats.org/drawingml/2006/main" xmlns:r="http://schemas.openxmlformats.org/officeDocument/2006/relationships" xmlns:p="http://schemas.openxmlformats.org/presentationml/2006/main">
-  <p:cSld>
-    <p:spTree>
-      <p:nvGrpSpPr>
-        <p:cNvPr id="1" name=""/>
-        <p:cNvGrpSpPr/>
-        <p:nvPr/>
-      </p:nvGrpSpPr>
-      <p:grpSpPr>
-        <a:xfrm>
-          <a:off x="0" y="0"/>
-          <a:ext cx="0" cy="0"/>
-          <a:chOff x="0" y="0"/>
-          <a:chExt cx="0" cy="0"/>
-        </a:xfrm>
-      </p:grpSpPr>
-      <p:sp>
-        <p:nvSpPr>
-          <p:cNvPr id="3" name="Title 2"/>
-          <p:cNvSpPr>
-            <a:spLocks noGrp="1"/>
-          </p:cNvSpPr>
-          <p:nvPr>
-            <p:ph type="title"/>
-          </p:nvPr>
-        </p:nvSpPr>
-        <p:spPr/>
-        <p:txBody>
-          <a:bodyPr/>
-          <a:lstStyle/>
-          <a:p>
-            <a:r>
-              <a:rPr lang="en-US" dirty="0"/>
-              <a:t>The wonderful for loop</a:t>
-            </a:r>
-          </a:p>
-        </p:txBody>
-      </p:sp>
-      <p:sp>
-        <p:nvSpPr>
-          <p:cNvPr id="2" name="Content Placeholder 1"/>
-          <p:cNvSpPr>
-            <a:spLocks noGrp="1"/>
-          </p:cNvSpPr>
-          <p:nvPr>
-            <p:ph type="body" idx="1"/>
-          </p:nvPr>
-        </p:nvSpPr>
-        <p:spPr/>
-        <p:txBody>
-          <a:bodyPr>
-            <a:normAutofit fontScale="92500" lnSpcReduction="20000"/>
-          </a:bodyPr>
-          <a:lstStyle/>
-          <a:p>
-            <a:r>
-              <a:rPr lang="en-US" sz="2800" dirty="0"/>
-              <a:t>For train-test splits (CV or temporal)</a:t>
-            </a:r>
-          </a:p>
-          <a:p>
-            <a:pPr lvl="1"/>
-            <a:r>
-              <a:rPr lang="en-US" dirty="0"/>
-              <a:t>For subsets of Feature Sets (Demographic only, Behavior only, Temporal only, etc.)</a:t>
-            </a:r>
-          </a:p>
-          <a:p>
-            <a:pPr lvl="2"/>
-            <a:r>
-              <a:rPr lang="en-US" sz="2800" dirty="0"/>
-              <a:t>For Classifiers (RFC, SVM, DT, NN, </a:t>
-            </a:r>
-            <a:r>
-              <a:rPr lang="en-US" sz="2800" dirty="0" err="1"/>
-              <a:t>Logit</a:t>
-            </a:r>
-            <a:r>
-              <a:rPr lang="en-US" sz="2800" dirty="0"/>
-              <a:t>, GB, Boosting)</a:t>
-            </a:r>
-          </a:p>
-          <a:p>
-            <a:pPr lvl="3"/>
-            <a:r>
-              <a:rPr lang="en-US" sz="2800" dirty="0"/>
-              <a:t>For parameters (cross products of different parameters)</a:t>
-            </a:r>
-          </a:p>
-          <a:p>
-            <a:pPr lvl="4"/>
-            <a:r>
-              <a:rPr lang="en-US" sz="2800" dirty="0"/>
-              <a:t>Fit</a:t>
-            </a:r>
-          </a:p>
-          <a:p>
-            <a:pPr lvl="4"/>
-            <a:r>
-              <a:rPr lang="en-US" sz="2800" dirty="0"/>
-              <a:t>Predict</a:t>
-            </a:r>
-          </a:p>
-          <a:p>
-            <a:pPr lvl="4"/>
-            <a:r>
-              <a:rPr lang="en-US" sz="2800" dirty="0"/>
-              <a:t>Evaluate</a:t>
-            </a:r>
-          </a:p>
-        </p:txBody>
-      </p:sp>
-    </p:spTree>
-    <p:extLst>
-      <p:ext uri="{BB962C8B-B14F-4D97-AF65-F5344CB8AC3E}">
-        <p14:creationId xmlns:p14="http://schemas.microsoft.com/office/powerpoint/2010/main" val="531683564"/>
-      </p:ext>
-    </p:extLst>
-  </p:cSld>
-  <p:clrMapOvr>
-    <a:masterClrMapping/>
-  </p:clrMapOvr>
-</p:sld>
-</file>
-
-<file path=ppt/slides/slide12.xml><?xml version="1.0" encoding="utf-8"?>
-<p:sld xmlns:a="http://schemas.openxmlformats.org/drawingml/2006/main" xmlns:r="http://schemas.openxmlformats.org/officeDocument/2006/relationships" xmlns:p="http://schemas.openxmlformats.org/presentationml/2006/main">
-  <p:cSld>
-    <p:spTree>
-      <p:nvGrpSpPr>
-        <p:cNvPr id="1" name=""/>
-        <p:cNvGrpSpPr/>
-        <p:nvPr/>
-      </p:nvGrpSpPr>
-      <p:grpSpPr>
-        <a:xfrm>
-          <a:off x="0" y="0"/>
-          <a:ext cx="0" cy="0"/>
-          <a:chOff x="0" y="0"/>
-          <a:chExt cx="0" cy="0"/>
-        </a:xfrm>
-      </p:grpSpPr>
-      <p:sp>
-        <p:nvSpPr>
           <p:cNvPr id="3" name="Title 2"/>
           <p:cNvSpPr>
             <a:spLocks noGrp="1"/>
@@ -13678,7 +13497,7 @@
 </p:sld>
 </file>
 
-<file path=ppt/slides/slide13.xml><?xml version="1.0" encoding="utf-8"?>
+<file path=ppt/slides/slide11.xml><?xml version="1.0" encoding="utf-8"?>
 <p:sld xmlns:a="http://schemas.openxmlformats.org/drawingml/2006/main" xmlns:r="http://schemas.openxmlformats.org/officeDocument/2006/relationships" xmlns:p="http://schemas.openxmlformats.org/presentationml/2006/main">
   <p:cSld>
     <p:spTree>
@@ -14144,7 +13963,7 @@
 </p:sld>
 </file>
 
-<file path=ppt/slides/slide14.xml><?xml version="1.0" encoding="utf-8"?>
+<file path=ppt/slides/slide12.xml><?xml version="1.0" encoding="utf-8"?>
 <p:sld xmlns:a="http://schemas.openxmlformats.org/drawingml/2006/main" xmlns:r="http://schemas.openxmlformats.org/officeDocument/2006/relationships" xmlns:p="http://schemas.openxmlformats.org/presentationml/2006/main">
   <p:cSld>
     <p:spTree>
@@ -14647,7 +14466,7 @@
 </p:sld>
 </file>
 
-<file path=ppt/slides/slide15.xml><?xml version="1.0" encoding="utf-8"?>
+<file path=ppt/slides/slide13.xml><?xml version="1.0" encoding="utf-8"?>
 <p:sld xmlns:a="http://schemas.openxmlformats.org/drawingml/2006/main" xmlns:r="http://schemas.openxmlformats.org/officeDocument/2006/relationships" xmlns:p="http://schemas.openxmlformats.org/presentationml/2006/main">
   <p:cSld>
     <p:spTree>
@@ -14778,7 +14597,7 @@
 </p:sld>
 </file>
 
-<file path=ppt/slides/slide16.xml><?xml version="1.0" encoding="utf-8"?>
+<file path=ppt/slides/slide14.xml><?xml version="1.0" encoding="utf-8"?>
 <p:sld xmlns:a="http://schemas.openxmlformats.org/drawingml/2006/main" xmlns:r="http://schemas.openxmlformats.org/officeDocument/2006/relationships" xmlns:p="http://schemas.openxmlformats.org/presentationml/2006/main">
   <p:cSld>
     <p:spTree>
@@ -14870,7 +14689,7 @@
 </p:sld>
 </file>
 
-<file path=ppt/slides/slide17.xml><?xml version="1.0" encoding="utf-8"?>
+<file path=ppt/slides/slide15.xml><?xml version="1.0" encoding="utf-8"?>
 <p:sld xmlns:a="http://schemas.openxmlformats.org/drawingml/2006/main" xmlns:r="http://schemas.openxmlformats.org/officeDocument/2006/relationships" xmlns:p="http://schemas.openxmlformats.org/presentationml/2006/main">
   <p:cSld>
     <p:spTree>
@@ -14962,7 +14781,7 @@
 </p:sld>
 </file>
 
-<file path=ppt/slides/slide18.xml><?xml version="1.0" encoding="utf-8"?>
+<file path=ppt/slides/slide16.xml><?xml version="1.0" encoding="utf-8"?>
 <p:sld xmlns:a="http://schemas.openxmlformats.org/drawingml/2006/main" xmlns:r="http://schemas.openxmlformats.org/officeDocument/2006/relationships" xmlns:p="http://schemas.openxmlformats.org/presentationml/2006/main">
   <p:cSld>
     <p:spTree>
@@ -15054,7 +14873,7 @@
 </p:sld>
 </file>
 
-<file path=ppt/slides/slide19.xml><?xml version="1.0" encoding="utf-8"?>
+<file path=ppt/slides/slide17.xml><?xml version="1.0" encoding="utf-8"?>
 <p:sld xmlns:a="http://schemas.openxmlformats.org/drawingml/2006/main" xmlns:r="http://schemas.openxmlformats.org/officeDocument/2006/relationships" xmlns:p="http://schemas.openxmlformats.org/presentationml/2006/main">
   <p:cSld>
     <p:spTree>
@@ -15137,6 +14956,333 @@
     <p:extLst>
       <p:ext uri="{BB962C8B-B14F-4D97-AF65-F5344CB8AC3E}">
         <p14:creationId xmlns:p14="http://schemas.microsoft.com/office/powerpoint/2010/main" val="2714202845"/>
+      </p:ext>
+    </p:extLst>
+  </p:cSld>
+  <p:clrMapOvr>
+    <a:masterClrMapping/>
+  </p:clrMapOvr>
+</p:sld>
+</file>
+
+<file path=ppt/slides/slide18.xml><?xml version="1.0" encoding="utf-8"?>
+<p:sld xmlns:a="http://schemas.openxmlformats.org/drawingml/2006/main" xmlns:r="http://schemas.openxmlformats.org/officeDocument/2006/relationships" xmlns:p="http://schemas.openxmlformats.org/presentationml/2006/main">
+  <p:cSld>
+    <p:spTree>
+      <p:nvGrpSpPr>
+        <p:cNvPr id="1" name="Shape 454"/>
+        <p:cNvGrpSpPr/>
+        <p:nvPr/>
+      </p:nvGrpSpPr>
+      <p:grpSpPr>
+        <a:xfrm>
+          <a:off x="0" y="0"/>
+          <a:ext cx="0" cy="0"/>
+          <a:chOff x="0" y="0"/>
+          <a:chExt cx="0" cy="0"/>
+        </a:xfrm>
+      </p:grpSpPr>
+      <p:sp>
+        <p:nvSpPr>
+          <p:cNvPr id="455" name="Google Shape;455;p43"/>
+          <p:cNvSpPr txBox="1">
+            <a:spLocks noGrp="1"/>
+          </p:cNvSpPr>
+          <p:nvPr>
+            <p:ph type="title"/>
+          </p:nvPr>
+        </p:nvSpPr>
+        <p:spPr>
+          <a:prstGeom prst="rect">
+            <a:avLst/>
+          </a:prstGeom>
+        </p:spPr>
+        <p:txBody>
+          <a:bodyPr spcFirstLastPara="1" wrap="square" lIns="121900" tIns="60933" rIns="121900" bIns="60933" anchor="ctr" anchorCtr="0">
+            <a:noAutofit/>
+          </a:bodyPr>
+          <a:lstStyle/>
+          <a:p>
+            <a:r>
+              <a:rPr lang="en" dirty="0"/>
+              <a:t>Model Selection</a:t>
+            </a:r>
+            <a:endParaRPr sz="4000" b="1" dirty="0">
+              <a:latin typeface="Roboto"/>
+              <a:ea typeface="Roboto"/>
+              <a:cs typeface="Roboto"/>
+              <a:sym typeface="Roboto"/>
+            </a:endParaRPr>
+          </a:p>
+        </p:txBody>
+      </p:sp>
+      <p:sp>
+        <p:nvSpPr>
+          <p:cNvPr id="456" name="Google Shape;456;p43"/>
+          <p:cNvSpPr txBox="1">
+            <a:spLocks noGrp="1"/>
+          </p:cNvSpPr>
+          <p:nvPr>
+            <p:ph type="body" idx="1"/>
+          </p:nvPr>
+        </p:nvSpPr>
+        <p:spPr>
+          <a:xfrm>
+            <a:off x="415600" y="1536632"/>
+            <a:ext cx="11360700" cy="4787967"/>
+          </a:xfrm>
+          <a:prstGeom prst="rect">
+            <a:avLst/>
+          </a:prstGeom>
+        </p:spPr>
+        <p:txBody>
+          <a:bodyPr spcFirstLastPara="1" wrap="square" lIns="121900" tIns="60933" rIns="121900" bIns="60933" anchor="t" anchorCtr="0">
+            <a:noAutofit/>
+          </a:bodyPr>
+          <a:lstStyle/>
+          <a:p>
+            <a:pPr indent="-474121">
+              <a:buSzPts val="2000"/>
+            </a:pPr>
+            <a:r>
+              <a:rPr lang="en" sz="2667" dirty="0"/>
+              <a:t>How can you narrow hundreds or thousands of model specifications down to a handful of the best-performing ones?</a:t>
+            </a:r>
+            <a:br>
+              <a:rPr lang="en" sz="2667" dirty="0"/>
+            </a:br>
+            <a:endParaRPr sz="2667" dirty="0"/>
+          </a:p>
+          <a:p>
+            <a:pPr indent="-474121">
+              <a:spcBef>
+                <a:spcPts val="0"/>
+              </a:spcBef>
+              <a:buSzPts val="2000"/>
+            </a:pPr>
+            <a:r>
+              <a:rPr lang="en" sz="2667" dirty="0"/>
+              <a:t>How do you balance performance and stability?</a:t>
+            </a:r>
+            <a:endParaRPr sz="2667" dirty="0"/>
+          </a:p>
+          <a:p>
+            <a:pPr lvl="1" indent="-474121">
+              <a:spcBef>
+                <a:spcPts val="0"/>
+              </a:spcBef>
+              <a:buSzPts val="2000"/>
+            </a:pPr>
+            <a:r>
+              <a:rPr lang="en" sz="2667" dirty="0"/>
+              <a:t>mean performance?</a:t>
+            </a:r>
+            <a:endParaRPr sz="2667" dirty="0"/>
+          </a:p>
+          <a:p>
+            <a:pPr lvl="1" indent="-474121">
+              <a:spcBef>
+                <a:spcPts val="0"/>
+              </a:spcBef>
+              <a:buSzPts val="2000"/>
+            </a:pPr>
+            <a:r>
+              <a:rPr lang="en" sz="2667" dirty="0"/>
+              <a:t>balancing mean and variance?</a:t>
+            </a:r>
+            <a:endParaRPr sz="2667" dirty="0"/>
+          </a:p>
+          <a:p>
+            <a:pPr lvl="1" indent="-474121">
+              <a:spcBef>
+                <a:spcPts val="0"/>
+              </a:spcBef>
+              <a:buSzPts val="2000"/>
+            </a:pPr>
+            <a:r>
+              <a:rPr lang="en" sz="2667" dirty="0"/>
+              <a:t>recency-weighted mean?</a:t>
+            </a:r>
+            <a:br>
+              <a:rPr lang="en" sz="2667" dirty="0"/>
+            </a:br>
+            <a:endParaRPr sz="2667" dirty="0"/>
+          </a:p>
+          <a:p>
+            <a:pPr indent="-474121">
+              <a:spcBef>
+                <a:spcPts val="0"/>
+              </a:spcBef>
+              <a:buSzPts val="2000"/>
+            </a:pPr>
+            <a:r>
+              <a:rPr lang="en" sz="2667" dirty="0"/>
+              <a:t>W</a:t>
+            </a:r>
+            <a:r>
+              <a:rPr lang="en-US" sz="2667" dirty="0"/>
+              <a:t>h</a:t>
+            </a:r>
+            <a:r>
+              <a:rPr lang="en" sz="2667" dirty="0"/>
+              <a:t>at is the “regret” in subsequent time periods from using different strategies for choosing a model to deploy?</a:t>
+            </a:r>
+            <a:endParaRPr sz="2667" dirty="0"/>
+          </a:p>
+        </p:txBody>
+      </p:sp>
+    </p:spTree>
+    <p:extLst>
+      <p:ext uri="{BB962C8B-B14F-4D97-AF65-F5344CB8AC3E}">
+        <p14:creationId xmlns:p14="http://schemas.microsoft.com/office/powerpoint/2010/main" val="1094637480"/>
+      </p:ext>
+    </p:extLst>
+  </p:cSld>
+  <p:clrMapOvr>
+    <a:masterClrMapping/>
+  </p:clrMapOvr>
+</p:sld>
+</file>
+
+<file path=ppt/slides/slide19.xml><?xml version="1.0" encoding="utf-8"?>
+<p:sld xmlns:a="http://schemas.openxmlformats.org/drawingml/2006/main" xmlns:r="http://schemas.openxmlformats.org/officeDocument/2006/relationships" xmlns:p="http://schemas.openxmlformats.org/presentationml/2006/main">
+  <p:cSld>
+    <p:spTree>
+      <p:nvGrpSpPr>
+        <p:cNvPr id="1" name="Shape 454"/>
+        <p:cNvGrpSpPr/>
+        <p:nvPr/>
+      </p:nvGrpSpPr>
+      <p:grpSpPr>
+        <a:xfrm>
+          <a:off x="0" y="0"/>
+          <a:ext cx="0" cy="0"/>
+          <a:chOff x="0" y="0"/>
+          <a:chExt cx="0" cy="0"/>
+        </a:xfrm>
+      </p:grpSpPr>
+      <p:sp>
+        <p:nvSpPr>
+          <p:cNvPr id="455" name="Google Shape;455;p43"/>
+          <p:cNvSpPr txBox="1">
+            <a:spLocks noGrp="1"/>
+          </p:cNvSpPr>
+          <p:nvPr>
+            <p:ph type="title"/>
+          </p:nvPr>
+        </p:nvSpPr>
+        <p:spPr>
+          <a:prstGeom prst="rect">
+            <a:avLst/>
+          </a:prstGeom>
+        </p:spPr>
+        <p:txBody>
+          <a:bodyPr spcFirstLastPara="1" wrap="square" lIns="121900" tIns="60933" rIns="121900" bIns="60933" anchor="ctr" anchorCtr="0">
+            <a:noAutofit/>
+          </a:bodyPr>
+          <a:lstStyle/>
+          <a:p>
+            <a:r>
+              <a:rPr lang="en" dirty="0"/>
+              <a:t>Model Selection</a:t>
+            </a:r>
+            <a:endParaRPr sz="4000" b="1" dirty="0">
+              <a:latin typeface="Roboto"/>
+              <a:ea typeface="Roboto"/>
+              <a:cs typeface="Roboto"/>
+              <a:sym typeface="Roboto"/>
+            </a:endParaRPr>
+          </a:p>
+        </p:txBody>
+      </p:sp>
+      <p:sp>
+        <p:nvSpPr>
+          <p:cNvPr id="456" name="Google Shape;456;p43"/>
+          <p:cNvSpPr txBox="1">
+            <a:spLocks noGrp="1"/>
+          </p:cNvSpPr>
+          <p:nvPr>
+            <p:ph type="body" idx="1"/>
+          </p:nvPr>
+        </p:nvSpPr>
+        <p:spPr>
+          <a:xfrm>
+            <a:off x="415600" y="1536632"/>
+            <a:ext cx="11360700" cy="4787967"/>
+          </a:xfrm>
+          <a:prstGeom prst="rect">
+            <a:avLst/>
+          </a:prstGeom>
+        </p:spPr>
+        <p:txBody>
+          <a:bodyPr spcFirstLastPara="1" wrap="square" lIns="121900" tIns="60933" rIns="121900" bIns="60933" anchor="t" anchorCtr="0">
+            <a:noAutofit/>
+          </a:bodyPr>
+          <a:lstStyle/>
+          <a:p>
+            <a:pPr marL="0" indent="0">
+              <a:buSzPts val="2000"/>
+              <a:buNone/>
+            </a:pPr>
+            <a:r>
+              <a:rPr lang="en-US" sz="2667" dirty="0"/>
+              <a:t>Comparing Model Selection Strategies:</a:t>
+            </a:r>
+            <a:br>
+              <a:rPr lang="en-US" sz="2667" dirty="0"/>
+            </a:br>
+            <a:endParaRPr lang="en-US" sz="2667" dirty="0"/>
+          </a:p>
+          <a:p>
+            <a:pPr indent="-474121">
+              <a:spcBef>
+                <a:spcPts val="0"/>
+              </a:spcBef>
+              <a:buSzPts val="2000"/>
+            </a:pPr>
+            <a:r>
+              <a:rPr lang="en-US" sz="2667" dirty="0"/>
+              <a:t>Use validation set performances up to a given point in time to do model selection using each strategy</a:t>
+            </a:r>
+            <a:br>
+              <a:rPr lang="en-US" sz="2667" dirty="0"/>
+            </a:br>
+            <a:endParaRPr lang="en-US" sz="2667" dirty="0"/>
+          </a:p>
+          <a:p>
+            <a:pPr indent="-474121">
+              <a:spcBef>
+                <a:spcPts val="0"/>
+              </a:spcBef>
+              <a:buSzPts val="2000"/>
+            </a:pPr>
+            <a:r>
+              <a:rPr lang="en-US" sz="2667" dirty="0"/>
+              <a:t>On the </a:t>
+            </a:r>
+            <a:r>
+              <a:rPr lang="en-US" sz="2667" u="sng" dirty="0"/>
+              <a:t>subsequent</a:t>
+            </a:r>
+            <a:r>
+              <a:rPr lang="en-US" sz="2667" dirty="0"/>
+              <a:t> validation set, calculate a </a:t>
+            </a:r>
+            <a:r>
+              <a:rPr lang="en-US" sz="2667" b="1" dirty="0"/>
+              <a:t>regret</a:t>
+            </a:r>
+            <a:r>
+              <a:rPr lang="en-US" sz="2667" dirty="0"/>
+              <a:t> for the model selection strategy as the difference between the performance of the model specification that strategy chooses and the best-performing model specification on this new validation set</a:t>
+            </a:r>
+          </a:p>
+        </p:txBody>
+      </p:sp>
+    </p:spTree>
+    <p:extLst>
+      <p:ext uri="{BB962C8B-B14F-4D97-AF65-F5344CB8AC3E}">
+        <p14:creationId xmlns:p14="http://schemas.microsoft.com/office/powerpoint/2010/main" val="663844554"/>
       </p:ext>
     </p:extLst>
   </p:cSld>
@@ -15248,333 +15394,6 @@
 </file>
 
 <file path=ppt/slides/slide20.xml><?xml version="1.0" encoding="utf-8"?>
-<p:sld xmlns:a="http://schemas.openxmlformats.org/drawingml/2006/main" xmlns:r="http://schemas.openxmlformats.org/officeDocument/2006/relationships" xmlns:p="http://schemas.openxmlformats.org/presentationml/2006/main">
-  <p:cSld>
-    <p:spTree>
-      <p:nvGrpSpPr>
-        <p:cNvPr id="1" name="Shape 454"/>
-        <p:cNvGrpSpPr/>
-        <p:nvPr/>
-      </p:nvGrpSpPr>
-      <p:grpSpPr>
-        <a:xfrm>
-          <a:off x="0" y="0"/>
-          <a:ext cx="0" cy="0"/>
-          <a:chOff x="0" y="0"/>
-          <a:chExt cx="0" cy="0"/>
-        </a:xfrm>
-      </p:grpSpPr>
-      <p:sp>
-        <p:nvSpPr>
-          <p:cNvPr id="455" name="Google Shape;455;p43"/>
-          <p:cNvSpPr txBox="1">
-            <a:spLocks noGrp="1"/>
-          </p:cNvSpPr>
-          <p:nvPr>
-            <p:ph type="title"/>
-          </p:nvPr>
-        </p:nvSpPr>
-        <p:spPr>
-          <a:prstGeom prst="rect">
-            <a:avLst/>
-          </a:prstGeom>
-        </p:spPr>
-        <p:txBody>
-          <a:bodyPr spcFirstLastPara="1" wrap="square" lIns="121900" tIns="60933" rIns="121900" bIns="60933" anchor="ctr" anchorCtr="0">
-            <a:noAutofit/>
-          </a:bodyPr>
-          <a:lstStyle/>
-          <a:p>
-            <a:r>
-              <a:rPr lang="en" dirty="0"/>
-              <a:t>Model Selection</a:t>
-            </a:r>
-            <a:endParaRPr sz="4000" b="1" dirty="0">
-              <a:latin typeface="Roboto"/>
-              <a:ea typeface="Roboto"/>
-              <a:cs typeface="Roboto"/>
-              <a:sym typeface="Roboto"/>
-            </a:endParaRPr>
-          </a:p>
-        </p:txBody>
-      </p:sp>
-      <p:sp>
-        <p:nvSpPr>
-          <p:cNvPr id="456" name="Google Shape;456;p43"/>
-          <p:cNvSpPr txBox="1">
-            <a:spLocks noGrp="1"/>
-          </p:cNvSpPr>
-          <p:nvPr>
-            <p:ph type="body" idx="1"/>
-          </p:nvPr>
-        </p:nvSpPr>
-        <p:spPr>
-          <a:xfrm>
-            <a:off x="415600" y="1536632"/>
-            <a:ext cx="11360700" cy="4787967"/>
-          </a:xfrm>
-          <a:prstGeom prst="rect">
-            <a:avLst/>
-          </a:prstGeom>
-        </p:spPr>
-        <p:txBody>
-          <a:bodyPr spcFirstLastPara="1" wrap="square" lIns="121900" tIns="60933" rIns="121900" bIns="60933" anchor="t" anchorCtr="0">
-            <a:noAutofit/>
-          </a:bodyPr>
-          <a:lstStyle/>
-          <a:p>
-            <a:pPr indent="-474121">
-              <a:buSzPts val="2000"/>
-            </a:pPr>
-            <a:r>
-              <a:rPr lang="en" sz="2667" dirty="0"/>
-              <a:t>How can you narrow hundreds or thousands of model specifications down to a handful of the best-performing ones?</a:t>
-            </a:r>
-            <a:br>
-              <a:rPr lang="en" sz="2667" dirty="0"/>
-            </a:br>
-            <a:endParaRPr sz="2667" dirty="0"/>
-          </a:p>
-          <a:p>
-            <a:pPr indent="-474121">
-              <a:spcBef>
-                <a:spcPts val="0"/>
-              </a:spcBef>
-              <a:buSzPts val="2000"/>
-            </a:pPr>
-            <a:r>
-              <a:rPr lang="en" sz="2667" dirty="0"/>
-              <a:t>How do you balance performance and stability?</a:t>
-            </a:r>
-            <a:endParaRPr sz="2667" dirty="0"/>
-          </a:p>
-          <a:p>
-            <a:pPr lvl="1" indent="-474121">
-              <a:spcBef>
-                <a:spcPts val="0"/>
-              </a:spcBef>
-              <a:buSzPts val="2000"/>
-            </a:pPr>
-            <a:r>
-              <a:rPr lang="en" sz="2667" dirty="0"/>
-              <a:t>mean performance?</a:t>
-            </a:r>
-            <a:endParaRPr sz="2667" dirty="0"/>
-          </a:p>
-          <a:p>
-            <a:pPr lvl="1" indent="-474121">
-              <a:spcBef>
-                <a:spcPts val="0"/>
-              </a:spcBef>
-              <a:buSzPts val="2000"/>
-            </a:pPr>
-            <a:r>
-              <a:rPr lang="en" sz="2667" dirty="0"/>
-              <a:t>balancing mean and variance?</a:t>
-            </a:r>
-            <a:endParaRPr sz="2667" dirty="0"/>
-          </a:p>
-          <a:p>
-            <a:pPr lvl="1" indent="-474121">
-              <a:spcBef>
-                <a:spcPts val="0"/>
-              </a:spcBef>
-              <a:buSzPts val="2000"/>
-            </a:pPr>
-            <a:r>
-              <a:rPr lang="en" sz="2667" dirty="0"/>
-              <a:t>recency-weighted mean?</a:t>
-            </a:r>
-            <a:br>
-              <a:rPr lang="en" sz="2667" dirty="0"/>
-            </a:br>
-            <a:endParaRPr sz="2667" dirty="0"/>
-          </a:p>
-          <a:p>
-            <a:pPr indent="-474121">
-              <a:spcBef>
-                <a:spcPts val="0"/>
-              </a:spcBef>
-              <a:buSzPts val="2000"/>
-            </a:pPr>
-            <a:r>
-              <a:rPr lang="en" sz="2667" dirty="0"/>
-              <a:t>W</a:t>
-            </a:r>
-            <a:r>
-              <a:rPr lang="en-US" sz="2667" dirty="0"/>
-              <a:t>h</a:t>
-            </a:r>
-            <a:r>
-              <a:rPr lang="en" sz="2667" dirty="0"/>
-              <a:t>at is the “regret” in subsequent time periods from using different strategies for choosing a model to deploy?</a:t>
-            </a:r>
-            <a:endParaRPr sz="2667" dirty="0"/>
-          </a:p>
-        </p:txBody>
-      </p:sp>
-    </p:spTree>
-    <p:extLst>
-      <p:ext uri="{BB962C8B-B14F-4D97-AF65-F5344CB8AC3E}">
-        <p14:creationId xmlns:p14="http://schemas.microsoft.com/office/powerpoint/2010/main" val="1094637480"/>
-      </p:ext>
-    </p:extLst>
-  </p:cSld>
-  <p:clrMapOvr>
-    <a:masterClrMapping/>
-  </p:clrMapOvr>
-</p:sld>
-</file>
-
-<file path=ppt/slides/slide21.xml><?xml version="1.0" encoding="utf-8"?>
-<p:sld xmlns:a="http://schemas.openxmlformats.org/drawingml/2006/main" xmlns:r="http://schemas.openxmlformats.org/officeDocument/2006/relationships" xmlns:p="http://schemas.openxmlformats.org/presentationml/2006/main">
-  <p:cSld>
-    <p:spTree>
-      <p:nvGrpSpPr>
-        <p:cNvPr id="1" name="Shape 454"/>
-        <p:cNvGrpSpPr/>
-        <p:nvPr/>
-      </p:nvGrpSpPr>
-      <p:grpSpPr>
-        <a:xfrm>
-          <a:off x="0" y="0"/>
-          <a:ext cx="0" cy="0"/>
-          <a:chOff x="0" y="0"/>
-          <a:chExt cx="0" cy="0"/>
-        </a:xfrm>
-      </p:grpSpPr>
-      <p:sp>
-        <p:nvSpPr>
-          <p:cNvPr id="455" name="Google Shape;455;p43"/>
-          <p:cNvSpPr txBox="1">
-            <a:spLocks noGrp="1"/>
-          </p:cNvSpPr>
-          <p:nvPr>
-            <p:ph type="title"/>
-          </p:nvPr>
-        </p:nvSpPr>
-        <p:spPr>
-          <a:prstGeom prst="rect">
-            <a:avLst/>
-          </a:prstGeom>
-        </p:spPr>
-        <p:txBody>
-          <a:bodyPr spcFirstLastPara="1" wrap="square" lIns="121900" tIns="60933" rIns="121900" bIns="60933" anchor="ctr" anchorCtr="0">
-            <a:noAutofit/>
-          </a:bodyPr>
-          <a:lstStyle/>
-          <a:p>
-            <a:r>
-              <a:rPr lang="en" dirty="0"/>
-              <a:t>Model Selection</a:t>
-            </a:r>
-            <a:endParaRPr sz="4000" b="1" dirty="0">
-              <a:latin typeface="Roboto"/>
-              <a:ea typeface="Roboto"/>
-              <a:cs typeface="Roboto"/>
-              <a:sym typeface="Roboto"/>
-            </a:endParaRPr>
-          </a:p>
-        </p:txBody>
-      </p:sp>
-      <p:sp>
-        <p:nvSpPr>
-          <p:cNvPr id="456" name="Google Shape;456;p43"/>
-          <p:cNvSpPr txBox="1">
-            <a:spLocks noGrp="1"/>
-          </p:cNvSpPr>
-          <p:nvPr>
-            <p:ph type="body" idx="1"/>
-          </p:nvPr>
-        </p:nvSpPr>
-        <p:spPr>
-          <a:xfrm>
-            <a:off x="415600" y="1536632"/>
-            <a:ext cx="11360700" cy="4787967"/>
-          </a:xfrm>
-          <a:prstGeom prst="rect">
-            <a:avLst/>
-          </a:prstGeom>
-        </p:spPr>
-        <p:txBody>
-          <a:bodyPr spcFirstLastPara="1" wrap="square" lIns="121900" tIns="60933" rIns="121900" bIns="60933" anchor="t" anchorCtr="0">
-            <a:noAutofit/>
-          </a:bodyPr>
-          <a:lstStyle/>
-          <a:p>
-            <a:pPr marL="0" indent="0">
-              <a:buSzPts val="2000"/>
-              <a:buNone/>
-            </a:pPr>
-            <a:r>
-              <a:rPr lang="en-US" sz="2667" dirty="0"/>
-              <a:t>Comparing Model Selection Strategies:</a:t>
-            </a:r>
-            <a:br>
-              <a:rPr lang="en-US" sz="2667" dirty="0"/>
-            </a:br>
-            <a:endParaRPr lang="en-US" sz="2667" dirty="0"/>
-          </a:p>
-          <a:p>
-            <a:pPr indent="-474121">
-              <a:spcBef>
-                <a:spcPts val="0"/>
-              </a:spcBef>
-              <a:buSzPts val="2000"/>
-            </a:pPr>
-            <a:r>
-              <a:rPr lang="en-US" sz="2667" dirty="0"/>
-              <a:t>Use validation set performances up to a given point in time to do model selection using each strategy</a:t>
-            </a:r>
-            <a:br>
-              <a:rPr lang="en-US" sz="2667" dirty="0"/>
-            </a:br>
-            <a:endParaRPr lang="en-US" sz="2667" dirty="0"/>
-          </a:p>
-          <a:p>
-            <a:pPr indent="-474121">
-              <a:spcBef>
-                <a:spcPts val="0"/>
-              </a:spcBef>
-              <a:buSzPts val="2000"/>
-            </a:pPr>
-            <a:r>
-              <a:rPr lang="en-US" sz="2667" dirty="0"/>
-              <a:t>On the </a:t>
-            </a:r>
-            <a:r>
-              <a:rPr lang="en-US" sz="2667" u="sng" dirty="0"/>
-              <a:t>subsequent</a:t>
-            </a:r>
-            <a:r>
-              <a:rPr lang="en-US" sz="2667" dirty="0"/>
-              <a:t> validation set, calculate a </a:t>
-            </a:r>
-            <a:r>
-              <a:rPr lang="en-US" sz="2667" b="1" dirty="0"/>
-              <a:t>regret</a:t>
-            </a:r>
-            <a:r>
-              <a:rPr lang="en-US" sz="2667" dirty="0"/>
-              <a:t> for the model selection strategy as the difference between the performance of the model specification that strategy chooses and the best-performing model specification on this new validation set</a:t>
-            </a:r>
-          </a:p>
-        </p:txBody>
-      </p:sp>
-    </p:spTree>
-    <p:extLst>
-      <p:ext uri="{BB962C8B-B14F-4D97-AF65-F5344CB8AC3E}">
-        <p14:creationId xmlns:p14="http://schemas.microsoft.com/office/powerpoint/2010/main" val="663844554"/>
-      </p:ext>
-    </p:extLst>
-  </p:cSld>
-  <p:clrMapOvr>
-    <a:masterClrMapping/>
-  </p:clrMapOvr>
-</p:sld>
-</file>
-
-<file path=ppt/slides/slide22.xml><?xml version="1.0" encoding="utf-8"?>
 <p:sld xmlns:a="http://schemas.openxmlformats.org/drawingml/2006/main" xmlns:r="http://schemas.openxmlformats.org/officeDocument/2006/relationships" xmlns:p="http://schemas.openxmlformats.org/presentationml/2006/main">
   <p:cSld>
     <p:spTree>
@@ -15776,7 +15595,7 @@
 </p:sld>
 </file>
 
-<file path=ppt/slides/slide23.xml><?xml version="1.0" encoding="utf-8"?>
+<file path=ppt/slides/slide21.xml><?xml version="1.0" encoding="utf-8"?>
 <p:sld xmlns:a="http://schemas.openxmlformats.org/drawingml/2006/main" xmlns:r="http://schemas.openxmlformats.org/officeDocument/2006/relationships" xmlns:p="http://schemas.openxmlformats.org/presentationml/2006/main">
   <p:cSld>
     <p:spTree>
@@ -15995,7 +15814,7 @@
 </p:sld>
 </file>
 
-<file path=ppt/slides/slide24.xml><?xml version="1.0" encoding="utf-8"?>
+<file path=ppt/slides/slide22.xml><?xml version="1.0" encoding="utf-8"?>
 <p:sld xmlns:a="http://schemas.openxmlformats.org/drawingml/2006/main" xmlns:r="http://schemas.openxmlformats.org/officeDocument/2006/relationships" xmlns:p="http://schemas.openxmlformats.org/presentationml/2006/main">
   <p:cSld>
     <p:spTree>
@@ -16455,7 +16274,7 @@
 </p:sld>
 </file>
 
-<file path=ppt/slides/slide25.xml><?xml version="1.0" encoding="utf-8"?>
+<file path=ppt/slides/slide23.xml><?xml version="1.0" encoding="utf-8"?>
 <p:sld xmlns:a="http://schemas.openxmlformats.org/drawingml/2006/main" xmlns:r="http://schemas.openxmlformats.org/officeDocument/2006/relationships" xmlns:p="http://schemas.openxmlformats.org/presentationml/2006/main">
   <p:cSld>
     <p:spTree>
@@ -16721,7 +16540,7 @@
 </p:sld>
 </file>
 
-<file path=ppt/slides/slide26.xml><?xml version="1.0" encoding="utf-8"?>
+<file path=ppt/slides/slide24.xml><?xml version="1.0" encoding="utf-8"?>
 <p:sld xmlns:a="http://schemas.openxmlformats.org/drawingml/2006/main" xmlns:r="http://schemas.openxmlformats.org/officeDocument/2006/relationships" xmlns:p="http://schemas.openxmlformats.org/presentationml/2006/main">
   <p:cSld>
     <p:spTree>
@@ -17032,7 +16851,7 @@
 </p:sld>
 </file>
 
-<file path=ppt/slides/slide27.xml><?xml version="1.0" encoding="utf-8"?>
+<file path=ppt/slides/slide25.xml><?xml version="1.0" encoding="utf-8"?>
 <p:sld xmlns:a="http://schemas.openxmlformats.org/drawingml/2006/main" xmlns:r="http://schemas.openxmlformats.org/officeDocument/2006/relationships" xmlns:p="http://schemas.openxmlformats.org/presentationml/2006/main">
   <p:cSld>
     <p:spTree>
@@ -17360,7 +17179,7 @@
 </p:sld>
 </file>
 
-<file path=ppt/slides/slide28.xml><?xml version="1.0" encoding="utf-8"?>
+<file path=ppt/slides/slide26.xml><?xml version="1.0" encoding="utf-8"?>
 <p:sld xmlns:a="http://schemas.openxmlformats.org/drawingml/2006/main" xmlns:r="http://schemas.openxmlformats.org/officeDocument/2006/relationships" xmlns:p="http://schemas.openxmlformats.org/presentationml/2006/main">
   <p:cSld>
     <p:spTree>
@@ -17685,7 +17504,7 @@
 </p:sld>
 </file>
 
-<file path=ppt/slides/slide29.xml><?xml version="1.0" encoding="utf-8"?>
+<file path=ppt/slides/slide27.xml><?xml version="1.0" encoding="utf-8"?>
 <p:sld xmlns:a="http://schemas.openxmlformats.org/drawingml/2006/main" xmlns:r="http://schemas.openxmlformats.org/officeDocument/2006/relationships" xmlns:p="http://schemas.openxmlformats.org/presentationml/2006/main">
   <p:cSld>
     <p:spTree>
@@ -18171,6 +17990,593 @@
 </p:sld>
 </file>
 
+<file path=ppt/slides/slide28.xml><?xml version="1.0" encoding="utf-8"?>
+<p:sld xmlns:a="http://schemas.openxmlformats.org/drawingml/2006/main" xmlns:r="http://schemas.openxmlformats.org/officeDocument/2006/relationships" xmlns:p="http://schemas.openxmlformats.org/presentationml/2006/main">
+  <p:cSld>
+    <p:spTree>
+      <p:nvGrpSpPr>
+        <p:cNvPr id="1" name="Shape 448"/>
+        <p:cNvGrpSpPr/>
+        <p:nvPr/>
+      </p:nvGrpSpPr>
+      <p:grpSpPr>
+        <a:xfrm>
+          <a:off x="0" y="0"/>
+          <a:ext cx="0" cy="0"/>
+          <a:chOff x="0" y="0"/>
+          <a:chExt cx="0" cy="0"/>
+        </a:xfrm>
+      </p:grpSpPr>
+      <p:sp>
+        <p:nvSpPr>
+          <p:cNvPr id="449" name="Google Shape;449;p42"/>
+          <p:cNvSpPr txBox="1">
+            <a:spLocks noGrp="1"/>
+          </p:cNvSpPr>
+          <p:nvPr>
+            <p:ph type="title"/>
+          </p:nvPr>
+        </p:nvSpPr>
+        <p:spPr>
+          <a:prstGeom prst="rect">
+            <a:avLst/>
+          </a:prstGeom>
+        </p:spPr>
+        <p:txBody>
+          <a:bodyPr spcFirstLastPara="1" wrap="square" lIns="121900" tIns="60933" rIns="121900" bIns="60933" anchor="ctr" anchorCtr="0">
+            <a:noAutofit/>
+          </a:bodyPr>
+          <a:lstStyle/>
+          <a:p>
+            <a:r>
+              <a:rPr lang="en" dirty="0"/>
+              <a:t>Model Selection</a:t>
+            </a:r>
+            <a:endParaRPr sz="4000" b="1" dirty="0">
+              <a:latin typeface="Roboto"/>
+              <a:ea typeface="Roboto"/>
+              <a:cs typeface="Roboto"/>
+              <a:sym typeface="Roboto"/>
+            </a:endParaRPr>
+          </a:p>
+        </p:txBody>
+      </p:sp>
+      <p:graphicFrame>
+        <p:nvGraphicFramePr>
+          <p:cNvPr id="3" name="Table 2">
+            <a:extLst>
+              <a:ext uri="{FF2B5EF4-FFF2-40B4-BE49-F238E27FC236}">
+                <a16:creationId xmlns:a16="http://schemas.microsoft.com/office/drawing/2014/main" id="{2B1BE125-A119-1A42-BFF2-698DC63BC3E2}"/>
+              </a:ext>
+            </a:extLst>
+          </p:cNvPr>
+          <p:cNvGraphicFramePr>
+            <a:graphicFrameLocks noGrp="1"/>
+          </p:cNvGraphicFramePr>
+          <p:nvPr/>
+        </p:nvGraphicFramePr>
+        <p:xfrm>
+          <a:off x="1600150" y="2331720"/>
+          <a:ext cx="8991600" cy="2194560"/>
+        </p:xfrm>
+        <a:graphic>
+          <a:graphicData uri="http://schemas.openxmlformats.org/drawingml/2006/table">
+            <a:tbl>
+              <a:tblPr firstRow="1" bandRow="1">
+                <a:tableStyleId>{073A0DAA-6AF3-43AB-8588-CEC1D06C72B9}</a:tableStyleId>
+              </a:tblPr>
+              <a:tblGrid>
+                <a:gridCol w="3019476">
+                  <a:extLst>
+                    <a:ext uri="{9D8B030D-6E8A-4147-A177-3AD203B41FA5}">
+                      <a16:colId xmlns:a16="http://schemas.microsoft.com/office/drawing/2014/main" val="2010259226"/>
+                    </a:ext>
+                  </a:extLst>
+                </a:gridCol>
+                <a:gridCol w="2974924">
+                  <a:extLst>
+                    <a:ext uri="{9D8B030D-6E8A-4147-A177-3AD203B41FA5}">
+                      <a16:colId xmlns:a16="http://schemas.microsoft.com/office/drawing/2014/main" val="2648150637"/>
+                    </a:ext>
+                  </a:extLst>
+                </a:gridCol>
+                <a:gridCol w="2997200">
+                  <a:extLst>
+                    <a:ext uri="{9D8B030D-6E8A-4147-A177-3AD203B41FA5}">
+                      <a16:colId xmlns:a16="http://schemas.microsoft.com/office/drawing/2014/main" val="3203189572"/>
+                    </a:ext>
+                  </a:extLst>
+                </a:gridCol>
+              </a:tblGrid>
+              <a:tr h="370840">
+                <a:tc>
+                  <a:txBody>
+                    <a:bodyPr/>
+                    <a:lstStyle/>
+                    <a:p>
+                      <a:endParaRPr lang="en-US" sz="2400" dirty="0">
+                        <a:solidFill>
+                          <a:schemeClr val="tx1"/>
+                        </a:solidFill>
+                      </a:endParaRPr>
+                    </a:p>
+                    <a:p>
+                      <a:r>
+                        <a:rPr lang="en-US" sz="2400" dirty="0">
+                          <a:solidFill>
+                            <a:schemeClr val="tx1"/>
+                          </a:solidFill>
+                        </a:rPr>
+                        <a:t>Strategy</a:t>
+                      </a:r>
+                    </a:p>
+                  </a:txBody>
+                  <a:tcPr>
+                    <a:lnB w="12700" cap="flat" cmpd="sng" algn="ctr">
+                      <a:solidFill>
+                        <a:schemeClr val="tx1"/>
+                      </a:solidFill>
+                      <a:prstDash val="solid"/>
+                      <a:round/>
+                      <a:headEnd type="none" w="med" len="med"/>
+                      <a:tailEnd type="none" w="med" len="med"/>
+                    </a:lnB>
+                    <a:solidFill>
+                      <a:schemeClr val="bg1"/>
+                    </a:solidFill>
+                  </a:tcPr>
+                </a:tc>
+                <a:tc>
+                  <a:txBody>
+                    <a:bodyPr/>
+                    <a:lstStyle/>
+                    <a:p>
+                      <a:pPr algn="ctr"/>
+                      <a:r>
+                        <a:rPr lang="en-US" sz="2400" dirty="0">
+                          <a:solidFill>
+                            <a:schemeClr val="tx1"/>
+                          </a:solidFill>
+                        </a:rPr>
+                        <a:t>Best Model</a:t>
+                      </a:r>
+                    </a:p>
+                    <a:p>
+                      <a:pPr algn="ctr"/>
+                      <a:r>
+                        <a:rPr lang="en-US" sz="2400" dirty="0">
+                          <a:solidFill>
+                            <a:schemeClr val="tx1"/>
+                          </a:solidFill>
+                        </a:rPr>
+                        <a:t>Through 2016</a:t>
+                      </a:r>
+                    </a:p>
+                  </a:txBody>
+                  <a:tcPr>
+                    <a:lnB w="12700" cap="flat" cmpd="sng" algn="ctr">
+                      <a:solidFill>
+                        <a:schemeClr val="tx1"/>
+                      </a:solidFill>
+                      <a:prstDash val="solid"/>
+                      <a:round/>
+                      <a:headEnd type="none" w="med" len="med"/>
+                      <a:tailEnd type="none" w="med" len="med"/>
+                    </a:lnB>
+                    <a:solidFill>
+                      <a:schemeClr val="bg1"/>
+                    </a:solidFill>
+                  </a:tcPr>
+                </a:tc>
+                <a:tc>
+                  <a:txBody>
+                    <a:bodyPr/>
+                    <a:lstStyle/>
+                    <a:p>
+                      <a:pPr algn="ctr"/>
+                      <a:r>
+                        <a:rPr lang="en-US" sz="2400" dirty="0">
+                          <a:solidFill>
+                            <a:schemeClr val="tx1"/>
+                          </a:solidFill>
+                        </a:rPr>
+                        <a:t>Regret</a:t>
+                      </a:r>
+                    </a:p>
+                    <a:p>
+                      <a:pPr algn="ctr"/>
+                      <a:r>
+                        <a:rPr lang="en-US" sz="2400" dirty="0">
+                          <a:solidFill>
+                            <a:schemeClr val="tx1"/>
+                          </a:solidFill>
+                        </a:rPr>
+                        <a:t>in 2017</a:t>
+                      </a:r>
+                    </a:p>
+                  </a:txBody>
+                  <a:tcPr>
+                    <a:lnB w="12700" cap="flat" cmpd="sng" algn="ctr">
+                      <a:solidFill>
+                        <a:schemeClr val="tx1"/>
+                      </a:solidFill>
+                      <a:prstDash val="solid"/>
+                      <a:round/>
+                      <a:headEnd type="none" w="med" len="med"/>
+                      <a:tailEnd type="none" w="med" len="med"/>
+                    </a:lnB>
+                    <a:solidFill>
+                      <a:schemeClr val="bg1"/>
+                    </a:solidFill>
+                  </a:tcPr>
+                </a:tc>
+                <a:extLst>
+                  <a:ext uri="{0D108BD9-81ED-4DB2-BD59-A6C34878D82A}">
+                    <a16:rowId xmlns:a16="http://schemas.microsoft.com/office/drawing/2014/main" val="1030743768"/>
+                  </a:ext>
+                </a:extLst>
+              </a:tr>
+              <a:tr h="370840">
+                <a:tc>
+                  <a:txBody>
+                    <a:bodyPr/>
+                    <a:lstStyle/>
+                    <a:p>
+                      <a:r>
+                        <a:rPr lang="en-US" sz="2400" dirty="0"/>
+                        <a:t>Best Recent Perf.</a:t>
+                      </a:r>
+                    </a:p>
+                  </a:txBody>
+                  <a:tcPr>
+                    <a:lnT w="12700" cap="flat" cmpd="sng" algn="ctr">
+                      <a:solidFill>
+                        <a:schemeClr val="tx1"/>
+                      </a:solidFill>
+                      <a:prstDash val="solid"/>
+                      <a:round/>
+                      <a:headEnd type="none" w="med" len="med"/>
+                      <a:tailEnd type="none" w="med" len="med"/>
+                    </a:lnT>
+                    <a:solidFill>
+                      <a:schemeClr val="bg1"/>
+                    </a:solidFill>
+                  </a:tcPr>
+                </a:tc>
+                <a:tc>
+                  <a:txBody>
+                    <a:bodyPr/>
+                    <a:lstStyle/>
+                    <a:p>
+                      <a:pPr algn="ctr"/>
+                      <a:r>
+                        <a:rPr lang="en-US" sz="2400" dirty="0">
+                          <a:solidFill>
+                            <a:srgbClr val="6D9EEB"/>
+                          </a:solidFill>
+                        </a:rPr>
+                        <a:t>Model 2</a:t>
+                      </a:r>
+                    </a:p>
+                  </a:txBody>
+                  <a:tcPr>
+                    <a:lnT w="12700" cap="flat" cmpd="sng" algn="ctr">
+                      <a:solidFill>
+                        <a:schemeClr val="tx1"/>
+                      </a:solidFill>
+                      <a:prstDash val="solid"/>
+                      <a:round/>
+                      <a:headEnd type="none" w="med" len="med"/>
+                      <a:tailEnd type="none" w="med" len="med"/>
+                    </a:lnT>
+                    <a:solidFill>
+                      <a:schemeClr val="bg1"/>
+                    </a:solidFill>
+                  </a:tcPr>
+                </a:tc>
+                <a:tc>
+                  <a:txBody>
+                    <a:bodyPr/>
+                    <a:lstStyle/>
+                    <a:p>
+                      <a:pPr algn="ctr"/>
+                      <a:r>
+                        <a:rPr lang="en-US" sz="2400" dirty="0"/>
+                        <a:t>0.12</a:t>
+                      </a:r>
+                    </a:p>
+                  </a:txBody>
+                  <a:tcPr>
+                    <a:lnT w="12700" cap="flat" cmpd="sng" algn="ctr">
+                      <a:solidFill>
+                        <a:schemeClr val="tx1"/>
+                      </a:solidFill>
+                      <a:prstDash val="solid"/>
+                      <a:round/>
+                      <a:headEnd type="none" w="med" len="med"/>
+                      <a:tailEnd type="none" w="med" len="med"/>
+                    </a:lnT>
+                    <a:solidFill>
+                      <a:schemeClr val="bg1"/>
+                    </a:solidFill>
+                  </a:tcPr>
+                </a:tc>
+                <a:extLst>
+                  <a:ext uri="{0D108BD9-81ED-4DB2-BD59-A6C34878D82A}">
+                    <a16:rowId xmlns:a16="http://schemas.microsoft.com/office/drawing/2014/main" val="690516962"/>
+                  </a:ext>
+                </a:extLst>
+              </a:tr>
+              <a:tr h="370840">
+                <a:tc>
+                  <a:txBody>
+                    <a:bodyPr/>
+                    <a:lstStyle/>
+                    <a:p>
+                      <a:r>
+                        <a:rPr lang="en-US" sz="2400" dirty="0"/>
+                        <a:t>Best Average Perf.</a:t>
+                      </a:r>
+                    </a:p>
+                  </a:txBody>
+                  <a:tcPr>
+                    <a:solidFill>
+                      <a:schemeClr val="bg1"/>
+                    </a:solidFill>
+                  </a:tcPr>
+                </a:tc>
+                <a:tc>
+                  <a:txBody>
+                    <a:bodyPr/>
+                    <a:lstStyle/>
+                    <a:p>
+                      <a:pPr marL="0" marR="0" lvl="0" indent="0" algn="ctr" defTabSz="914400" rtl="0" eaLnBrk="1" fontAlgn="auto" latinLnBrk="0" hangingPunct="1">
+                        <a:lnSpc>
+                          <a:spcPct val="100000"/>
+                        </a:lnSpc>
+                        <a:spcBef>
+                          <a:spcPts val="0"/>
+                        </a:spcBef>
+                        <a:spcAft>
+                          <a:spcPts val="0"/>
+                        </a:spcAft>
+                        <a:buClr>
+                          <a:srgbClr val="000000"/>
+                        </a:buClr>
+                        <a:buSzTx/>
+                        <a:buFont typeface="Arial"/>
+                        <a:buNone/>
+                        <a:tabLst/>
+                        <a:defRPr/>
+                      </a:pPr>
+                      <a:r>
+                        <a:rPr lang="en-US" sz="2400" dirty="0">
+                          <a:solidFill>
+                            <a:srgbClr val="0B5394"/>
+                          </a:solidFill>
+                        </a:rPr>
+                        <a:t>Model 1</a:t>
+                      </a:r>
+                    </a:p>
+                  </a:txBody>
+                  <a:tcPr>
+                    <a:solidFill>
+                      <a:schemeClr val="bg1"/>
+                    </a:solidFill>
+                  </a:tcPr>
+                </a:tc>
+                <a:tc>
+                  <a:txBody>
+                    <a:bodyPr/>
+                    <a:lstStyle/>
+                    <a:p>
+                      <a:pPr algn="ctr"/>
+                      <a:r>
+                        <a:rPr lang="en-US" sz="2400" dirty="0"/>
+                        <a:t>0.00</a:t>
+                      </a:r>
+                    </a:p>
+                  </a:txBody>
+                  <a:tcPr>
+                    <a:solidFill>
+                      <a:schemeClr val="bg1"/>
+                    </a:solidFill>
+                  </a:tcPr>
+                </a:tc>
+                <a:extLst>
+                  <a:ext uri="{0D108BD9-81ED-4DB2-BD59-A6C34878D82A}">
+                    <a16:rowId xmlns:a16="http://schemas.microsoft.com/office/drawing/2014/main" val="3284802000"/>
+                  </a:ext>
+                </a:extLst>
+              </a:tr>
+              <a:tr h="370840">
+                <a:tc>
+                  <a:txBody>
+                    <a:bodyPr/>
+                    <a:lstStyle/>
+                    <a:p>
+                      <a:r>
+                        <a:rPr lang="en-US" sz="2400" dirty="0"/>
+                        <a:t>Lowest Variance</a:t>
+                      </a:r>
+                    </a:p>
+                  </a:txBody>
+                  <a:tcPr>
+                    <a:solidFill>
+                      <a:schemeClr val="bg1"/>
+                    </a:solidFill>
+                  </a:tcPr>
+                </a:tc>
+                <a:tc>
+                  <a:txBody>
+                    <a:bodyPr/>
+                    <a:lstStyle/>
+                    <a:p>
+                      <a:pPr algn="ctr"/>
+                      <a:r>
+                        <a:rPr lang="en-US" sz="2400" dirty="0">
+                          <a:solidFill>
+                            <a:srgbClr val="FFC000"/>
+                          </a:solidFill>
+                        </a:rPr>
+                        <a:t>Model 3</a:t>
+                      </a:r>
+                    </a:p>
+                  </a:txBody>
+                  <a:tcPr>
+                    <a:solidFill>
+                      <a:schemeClr val="bg1"/>
+                    </a:solidFill>
+                  </a:tcPr>
+                </a:tc>
+                <a:tc>
+                  <a:txBody>
+                    <a:bodyPr/>
+                    <a:lstStyle/>
+                    <a:p>
+                      <a:pPr algn="ctr"/>
+                      <a:r>
+                        <a:rPr lang="en-US" sz="2400" dirty="0"/>
+                        <a:t>0.32</a:t>
+                      </a:r>
+                    </a:p>
+                  </a:txBody>
+                  <a:tcPr>
+                    <a:solidFill>
+                      <a:schemeClr val="bg1"/>
+                    </a:solidFill>
+                  </a:tcPr>
+                </a:tc>
+                <a:extLst>
+                  <a:ext uri="{0D108BD9-81ED-4DB2-BD59-A6C34878D82A}">
+                    <a16:rowId xmlns:a16="http://schemas.microsoft.com/office/drawing/2014/main" val="1043181873"/>
+                  </a:ext>
+                </a:extLst>
+              </a:tr>
+            </a:tbl>
+          </a:graphicData>
+        </a:graphic>
+      </p:graphicFrame>
+      <p:sp>
+        <p:nvSpPr>
+          <p:cNvPr id="4" name="Rectangle 3">
+            <a:extLst>
+              <a:ext uri="{FF2B5EF4-FFF2-40B4-BE49-F238E27FC236}">
+                <a16:creationId xmlns:a16="http://schemas.microsoft.com/office/drawing/2014/main" id="{8168EF40-2DAE-8E43-ADA7-4AEF8BC68293}"/>
+              </a:ext>
+            </a:extLst>
+          </p:cNvPr>
+          <p:cNvSpPr/>
+          <p:nvPr/>
+        </p:nvSpPr>
+        <p:spPr>
+          <a:xfrm>
+            <a:off x="1498600" y="3594100"/>
+            <a:ext cx="8547100" cy="469900"/>
+          </a:xfrm>
+          <a:prstGeom prst="rect">
+            <a:avLst/>
+          </a:prstGeom>
+          <a:noFill/>
+          <a:ln w="57150">
+            <a:solidFill>
+              <a:srgbClr val="00B050"/>
+            </a:solidFill>
+          </a:ln>
+        </p:spPr>
+        <p:style>
+          <a:lnRef idx="2">
+            <a:schemeClr val="accent1">
+              <a:shade val="50000"/>
+            </a:schemeClr>
+          </a:lnRef>
+          <a:fillRef idx="1">
+            <a:schemeClr val="accent1"/>
+          </a:fillRef>
+          <a:effectRef idx="0">
+            <a:schemeClr val="accent1"/>
+          </a:effectRef>
+          <a:fontRef idx="minor">
+            <a:schemeClr val="lt1"/>
+          </a:fontRef>
+        </p:style>
+        <p:txBody>
+          <a:bodyPr rtlCol="0" anchor="ctr"/>
+          <a:lstStyle/>
+          <a:p>
+            <a:pPr algn="ctr"/>
+            <a:endParaRPr lang="en-US"/>
+          </a:p>
+        </p:txBody>
+      </p:sp>
+    </p:spTree>
+    <p:extLst>
+      <p:ext uri="{BB962C8B-B14F-4D97-AF65-F5344CB8AC3E}">
+        <p14:creationId xmlns:p14="http://schemas.microsoft.com/office/powerpoint/2010/main" val="597739129"/>
+      </p:ext>
+    </p:extLst>
+  </p:cSld>
+  <p:clrMapOvr>
+    <a:masterClrMapping/>
+  </p:clrMapOvr>
+</p:sld>
+</file>
+
+<file path=ppt/slides/slide29.xml><?xml version="1.0" encoding="utf-8"?>
+<p:sld xmlns:a="http://schemas.openxmlformats.org/drawingml/2006/main" xmlns:r="http://schemas.openxmlformats.org/officeDocument/2006/relationships" xmlns:p="http://schemas.openxmlformats.org/presentationml/2006/main">
+  <p:cSld>
+    <p:spTree>
+      <p:nvGrpSpPr>
+        <p:cNvPr id="1" name=""/>
+        <p:cNvGrpSpPr/>
+        <p:nvPr/>
+      </p:nvGrpSpPr>
+      <p:grpSpPr>
+        <a:xfrm>
+          <a:off x="0" y="0"/>
+          <a:ext cx="0" cy="0"/>
+          <a:chOff x="0" y="0"/>
+          <a:chExt cx="0" cy="0"/>
+        </a:xfrm>
+      </p:grpSpPr>
+      <p:sp>
+        <p:nvSpPr>
+          <p:cNvPr id="2" name="Content Placeholder 1"/>
+          <p:cNvSpPr>
+            <a:spLocks noGrp="1"/>
+          </p:cNvSpPr>
+          <p:nvPr>
+            <p:ph type="body" idx="1"/>
+          </p:nvPr>
+        </p:nvSpPr>
+        <p:spPr/>
+        <p:txBody>
+          <a:bodyPr/>
+          <a:lstStyle/>
+          <a:p>
+            <a:pPr marL="76200" indent="0">
+              <a:buNone/>
+            </a:pPr>
+            <a:r>
+              <a:rPr lang="en-US" sz="4400" dirty="0"/>
+              <a:t>Questions about model selection strategies?</a:t>
+            </a:r>
+          </a:p>
+        </p:txBody>
+      </p:sp>
+    </p:spTree>
+    <p:extLst>
+      <p:ext uri="{BB962C8B-B14F-4D97-AF65-F5344CB8AC3E}">
+        <p14:creationId xmlns:p14="http://schemas.microsoft.com/office/powerpoint/2010/main" val="1360668193"/>
+      </p:ext>
+    </p:extLst>
+  </p:cSld>
+  <p:clrMapOvr>
+    <a:masterClrMapping/>
+  </p:clrMapOvr>
+</p:sld>
+</file>
+
 <file path=ppt/slides/slide3.xml><?xml version="1.0" encoding="utf-8"?>
 <p:sld xmlns:a="http://schemas.openxmlformats.org/drawingml/2006/main" xmlns:r="http://schemas.openxmlformats.org/officeDocument/2006/relationships" xmlns:p="http://schemas.openxmlformats.org/presentationml/2006/main">
   <p:cSld>
@@ -18278,6 +18684,13 @@
             <a:r>
               <a:rPr lang="en-US" dirty="0"/>
               <a:t>Larger model run with a more extensive model + hyperparameter grid</a:t>
+            </a:r>
+          </a:p>
+          <a:p>
+            <a:pPr lvl="1"/>
+            <a:r>
+              <a:rPr lang="en-US" dirty="0"/>
+              <a:t>Code to generate results and graphs</a:t>
             </a:r>
           </a:p>
         </p:txBody>
@@ -18817,7 +19230,7 @@
     </p:spTree>
     <p:extLst>
       <p:ext uri="{BB962C8B-B14F-4D97-AF65-F5344CB8AC3E}">
-        <p14:creationId xmlns:p14="http://schemas.microsoft.com/office/powerpoint/2010/main" val="597739129"/>
+        <p14:creationId xmlns:p14="http://schemas.microsoft.com/office/powerpoint/2010/main" val="441843033"/>
       </p:ext>
     </p:extLst>
   </p:cSld>
@@ -18828,593 +19241,6 @@
 </file>
 
 <file path=ppt/slides/slide31.xml><?xml version="1.0" encoding="utf-8"?>
-<p:sld xmlns:a="http://schemas.openxmlformats.org/drawingml/2006/main" xmlns:r="http://schemas.openxmlformats.org/officeDocument/2006/relationships" xmlns:p="http://schemas.openxmlformats.org/presentationml/2006/main">
-  <p:cSld>
-    <p:spTree>
-      <p:nvGrpSpPr>
-        <p:cNvPr id="1" name=""/>
-        <p:cNvGrpSpPr/>
-        <p:nvPr/>
-      </p:nvGrpSpPr>
-      <p:grpSpPr>
-        <a:xfrm>
-          <a:off x="0" y="0"/>
-          <a:ext cx="0" cy="0"/>
-          <a:chOff x="0" y="0"/>
-          <a:chExt cx="0" cy="0"/>
-        </a:xfrm>
-      </p:grpSpPr>
-      <p:sp>
-        <p:nvSpPr>
-          <p:cNvPr id="2" name="Content Placeholder 1"/>
-          <p:cNvSpPr>
-            <a:spLocks noGrp="1"/>
-          </p:cNvSpPr>
-          <p:nvPr>
-            <p:ph type="body" idx="1"/>
-          </p:nvPr>
-        </p:nvSpPr>
-        <p:spPr/>
-        <p:txBody>
-          <a:bodyPr/>
-          <a:lstStyle/>
-          <a:p>
-            <a:pPr marL="76200" indent="0">
-              <a:buNone/>
-            </a:pPr>
-            <a:r>
-              <a:rPr lang="en-US" sz="4400" dirty="0"/>
-              <a:t>Questions about model selection strategies?</a:t>
-            </a:r>
-          </a:p>
-        </p:txBody>
-      </p:sp>
-    </p:spTree>
-    <p:extLst>
-      <p:ext uri="{BB962C8B-B14F-4D97-AF65-F5344CB8AC3E}">
-        <p14:creationId xmlns:p14="http://schemas.microsoft.com/office/powerpoint/2010/main" val="1360668193"/>
-      </p:ext>
-    </p:extLst>
-  </p:cSld>
-  <p:clrMapOvr>
-    <a:masterClrMapping/>
-  </p:clrMapOvr>
-</p:sld>
-</file>
-
-<file path=ppt/slides/slide32.xml><?xml version="1.0" encoding="utf-8"?>
-<p:sld xmlns:a="http://schemas.openxmlformats.org/drawingml/2006/main" xmlns:r="http://schemas.openxmlformats.org/officeDocument/2006/relationships" xmlns:p="http://schemas.openxmlformats.org/presentationml/2006/main">
-  <p:cSld>
-    <p:spTree>
-      <p:nvGrpSpPr>
-        <p:cNvPr id="1" name="Shape 448"/>
-        <p:cNvGrpSpPr/>
-        <p:nvPr/>
-      </p:nvGrpSpPr>
-      <p:grpSpPr>
-        <a:xfrm>
-          <a:off x="0" y="0"/>
-          <a:ext cx="0" cy="0"/>
-          <a:chOff x="0" y="0"/>
-          <a:chExt cx="0" cy="0"/>
-        </a:xfrm>
-      </p:grpSpPr>
-      <p:sp>
-        <p:nvSpPr>
-          <p:cNvPr id="449" name="Google Shape;449;p42"/>
-          <p:cNvSpPr txBox="1">
-            <a:spLocks noGrp="1"/>
-          </p:cNvSpPr>
-          <p:nvPr>
-            <p:ph type="title"/>
-          </p:nvPr>
-        </p:nvSpPr>
-        <p:spPr>
-          <a:prstGeom prst="rect">
-            <a:avLst/>
-          </a:prstGeom>
-        </p:spPr>
-        <p:txBody>
-          <a:bodyPr spcFirstLastPara="1" wrap="square" lIns="121900" tIns="60933" rIns="121900" bIns="60933" anchor="ctr" anchorCtr="0">
-            <a:noAutofit/>
-          </a:bodyPr>
-          <a:lstStyle/>
-          <a:p>
-            <a:r>
-              <a:rPr lang="en" dirty="0"/>
-              <a:t>Model Selection</a:t>
-            </a:r>
-            <a:endParaRPr sz="4000" b="1" dirty="0">
-              <a:latin typeface="Roboto"/>
-              <a:ea typeface="Roboto"/>
-              <a:cs typeface="Roboto"/>
-              <a:sym typeface="Roboto"/>
-            </a:endParaRPr>
-          </a:p>
-        </p:txBody>
-      </p:sp>
-      <p:graphicFrame>
-        <p:nvGraphicFramePr>
-          <p:cNvPr id="3" name="Table 2">
-            <a:extLst>
-              <a:ext uri="{FF2B5EF4-FFF2-40B4-BE49-F238E27FC236}">
-                <a16:creationId xmlns:a16="http://schemas.microsoft.com/office/drawing/2014/main" id="{2B1BE125-A119-1A42-BFF2-698DC63BC3E2}"/>
-              </a:ext>
-            </a:extLst>
-          </p:cNvPr>
-          <p:cNvGraphicFramePr>
-            <a:graphicFrameLocks noGrp="1"/>
-          </p:cNvGraphicFramePr>
-          <p:nvPr/>
-        </p:nvGraphicFramePr>
-        <p:xfrm>
-          <a:off x="1600150" y="2331720"/>
-          <a:ext cx="8991600" cy="2194560"/>
-        </p:xfrm>
-        <a:graphic>
-          <a:graphicData uri="http://schemas.openxmlformats.org/drawingml/2006/table">
-            <a:tbl>
-              <a:tblPr firstRow="1" bandRow="1">
-                <a:tableStyleId>{073A0DAA-6AF3-43AB-8588-CEC1D06C72B9}</a:tableStyleId>
-              </a:tblPr>
-              <a:tblGrid>
-                <a:gridCol w="3019476">
-                  <a:extLst>
-                    <a:ext uri="{9D8B030D-6E8A-4147-A177-3AD203B41FA5}">
-                      <a16:colId xmlns:a16="http://schemas.microsoft.com/office/drawing/2014/main" val="2010259226"/>
-                    </a:ext>
-                  </a:extLst>
-                </a:gridCol>
-                <a:gridCol w="2974924">
-                  <a:extLst>
-                    <a:ext uri="{9D8B030D-6E8A-4147-A177-3AD203B41FA5}">
-                      <a16:colId xmlns:a16="http://schemas.microsoft.com/office/drawing/2014/main" val="2648150637"/>
-                    </a:ext>
-                  </a:extLst>
-                </a:gridCol>
-                <a:gridCol w="2997200">
-                  <a:extLst>
-                    <a:ext uri="{9D8B030D-6E8A-4147-A177-3AD203B41FA5}">
-                      <a16:colId xmlns:a16="http://schemas.microsoft.com/office/drawing/2014/main" val="3203189572"/>
-                    </a:ext>
-                  </a:extLst>
-                </a:gridCol>
-              </a:tblGrid>
-              <a:tr h="370840">
-                <a:tc>
-                  <a:txBody>
-                    <a:bodyPr/>
-                    <a:lstStyle/>
-                    <a:p>
-                      <a:endParaRPr lang="en-US" sz="2400" dirty="0">
-                        <a:solidFill>
-                          <a:schemeClr val="tx1"/>
-                        </a:solidFill>
-                      </a:endParaRPr>
-                    </a:p>
-                    <a:p>
-                      <a:r>
-                        <a:rPr lang="en-US" sz="2400" dirty="0">
-                          <a:solidFill>
-                            <a:schemeClr val="tx1"/>
-                          </a:solidFill>
-                        </a:rPr>
-                        <a:t>Strategy</a:t>
-                      </a:r>
-                    </a:p>
-                  </a:txBody>
-                  <a:tcPr>
-                    <a:lnB w="12700" cap="flat" cmpd="sng" algn="ctr">
-                      <a:solidFill>
-                        <a:schemeClr val="tx1"/>
-                      </a:solidFill>
-                      <a:prstDash val="solid"/>
-                      <a:round/>
-                      <a:headEnd type="none" w="med" len="med"/>
-                      <a:tailEnd type="none" w="med" len="med"/>
-                    </a:lnB>
-                    <a:solidFill>
-                      <a:schemeClr val="bg1"/>
-                    </a:solidFill>
-                  </a:tcPr>
-                </a:tc>
-                <a:tc>
-                  <a:txBody>
-                    <a:bodyPr/>
-                    <a:lstStyle/>
-                    <a:p>
-                      <a:pPr algn="ctr"/>
-                      <a:r>
-                        <a:rPr lang="en-US" sz="2400" dirty="0">
-                          <a:solidFill>
-                            <a:schemeClr val="tx1"/>
-                          </a:solidFill>
-                        </a:rPr>
-                        <a:t>Best Model</a:t>
-                      </a:r>
-                    </a:p>
-                    <a:p>
-                      <a:pPr algn="ctr"/>
-                      <a:r>
-                        <a:rPr lang="en-US" sz="2400" dirty="0">
-                          <a:solidFill>
-                            <a:schemeClr val="tx1"/>
-                          </a:solidFill>
-                        </a:rPr>
-                        <a:t>Through 2016</a:t>
-                      </a:r>
-                    </a:p>
-                  </a:txBody>
-                  <a:tcPr>
-                    <a:lnB w="12700" cap="flat" cmpd="sng" algn="ctr">
-                      <a:solidFill>
-                        <a:schemeClr val="tx1"/>
-                      </a:solidFill>
-                      <a:prstDash val="solid"/>
-                      <a:round/>
-                      <a:headEnd type="none" w="med" len="med"/>
-                      <a:tailEnd type="none" w="med" len="med"/>
-                    </a:lnB>
-                    <a:solidFill>
-                      <a:schemeClr val="bg1"/>
-                    </a:solidFill>
-                  </a:tcPr>
-                </a:tc>
-                <a:tc>
-                  <a:txBody>
-                    <a:bodyPr/>
-                    <a:lstStyle/>
-                    <a:p>
-                      <a:pPr algn="ctr"/>
-                      <a:r>
-                        <a:rPr lang="en-US" sz="2400" dirty="0">
-                          <a:solidFill>
-                            <a:schemeClr val="tx1"/>
-                          </a:solidFill>
-                        </a:rPr>
-                        <a:t>Regret</a:t>
-                      </a:r>
-                    </a:p>
-                    <a:p>
-                      <a:pPr algn="ctr"/>
-                      <a:r>
-                        <a:rPr lang="en-US" sz="2400" dirty="0">
-                          <a:solidFill>
-                            <a:schemeClr val="tx1"/>
-                          </a:solidFill>
-                        </a:rPr>
-                        <a:t>in 2017</a:t>
-                      </a:r>
-                    </a:p>
-                  </a:txBody>
-                  <a:tcPr>
-                    <a:lnB w="12700" cap="flat" cmpd="sng" algn="ctr">
-                      <a:solidFill>
-                        <a:schemeClr val="tx1"/>
-                      </a:solidFill>
-                      <a:prstDash val="solid"/>
-                      <a:round/>
-                      <a:headEnd type="none" w="med" len="med"/>
-                      <a:tailEnd type="none" w="med" len="med"/>
-                    </a:lnB>
-                    <a:solidFill>
-                      <a:schemeClr val="bg1"/>
-                    </a:solidFill>
-                  </a:tcPr>
-                </a:tc>
-                <a:extLst>
-                  <a:ext uri="{0D108BD9-81ED-4DB2-BD59-A6C34878D82A}">
-                    <a16:rowId xmlns:a16="http://schemas.microsoft.com/office/drawing/2014/main" val="1030743768"/>
-                  </a:ext>
-                </a:extLst>
-              </a:tr>
-              <a:tr h="370840">
-                <a:tc>
-                  <a:txBody>
-                    <a:bodyPr/>
-                    <a:lstStyle/>
-                    <a:p>
-                      <a:r>
-                        <a:rPr lang="en-US" sz="2400" dirty="0"/>
-                        <a:t>Best Recent Perf.</a:t>
-                      </a:r>
-                    </a:p>
-                  </a:txBody>
-                  <a:tcPr>
-                    <a:lnT w="12700" cap="flat" cmpd="sng" algn="ctr">
-                      <a:solidFill>
-                        <a:schemeClr val="tx1"/>
-                      </a:solidFill>
-                      <a:prstDash val="solid"/>
-                      <a:round/>
-                      <a:headEnd type="none" w="med" len="med"/>
-                      <a:tailEnd type="none" w="med" len="med"/>
-                    </a:lnT>
-                    <a:solidFill>
-                      <a:schemeClr val="bg1"/>
-                    </a:solidFill>
-                  </a:tcPr>
-                </a:tc>
-                <a:tc>
-                  <a:txBody>
-                    <a:bodyPr/>
-                    <a:lstStyle/>
-                    <a:p>
-                      <a:pPr algn="ctr"/>
-                      <a:r>
-                        <a:rPr lang="en-US" sz="2400" dirty="0">
-                          <a:solidFill>
-                            <a:srgbClr val="6D9EEB"/>
-                          </a:solidFill>
-                        </a:rPr>
-                        <a:t>Model 2</a:t>
-                      </a:r>
-                    </a:p>
-                  </a:txBody>
-                  <a:tcPr>
-                    <a:lnT w="12700" cap="flat" cmpd="sng" algn="ctr">
-                      <a:solidFill>
-                        <a:schemeClr val="tx1"/>
-                      </a:solidFill>
-                      <a:prstDash val="solid"/>
-                      <a:round/>
-                      <a:headEnd type="none" w="med" len="med"/>
-                      <a:tailEnd type="none" w="med" len="med"/>
-                    </a:lnT>
-                    <a:solidFill>
-                      <a:schemeClr val="bg1"/>
-                    </a:solidFill>
-                  </a:tcPr>
-                </a:tc>
-                <a:tc>
-                  <a:txBody>
-                    <a:bodyPr/>
-                    <a:lstStyle/>
-                    <a:p>
-                      <a:pPr algn="ctr"/>
-                      <a:r>
-                        <a:rPr lang="en-US" sz="2400" dirty="0"/>
-                        <a:t>0.12</a:t>
-                      </a:r>
-                    </a:p>
-                  </a:txBody>
-                  <a:tcPr>
-                    <a:lnT w="12700" cap="flat" cmpd="sng" algn="ctr">
-                      <a:solidFill>
-                        <a:schemeClr val="tx1"/>
-                      </a:solidFill>
-                      <a:prstDash val="solid"/>
-                      <a:round/>
-                      <a:headEnd type="none" w="med" len="med"/>
-                      <a:tailEnd type="none" w="med" len="med"/>
-                    </a:lnT>
-                    <a:solidFill>
-                      <a:schemeClr val="bg1"/>
-                    </a:solidFill>
-                  </a:tcPr>
-                </a:tc>
-                <a:extLst>
-                  <a:ext uri="{0D108BD9-81ED-4DB2-BD59-A6C34878D82A}">
-                    <a16:rowId xmlns:a16="http://schemas.microsoft.com/office/drawing/2014/main" val="690516962"/>
-                  </a:ext>
-                </a:extLst>
-              </a:tr>
-              <a:tr h="370840">
-                <a:tc>
-                  <a:txBody>
-                    <a:bodyPr/>
-                    <a:lstStyle/>
-                    <a:p>
-                      <a:r>
-                        <a:rPr lang="en-US" sz="2400" dirty="0"/>
-                        <a:t>Best Average Perf.</a:t>
-                      </a:r>
-                    </a:p>
-                  </a:txBody>
-                  <a:tcPr>
-                    <a:solidFill>
-                      <a:schemeClr val="bg1"/>
-                    </a:solidFill>
-                  </a:tcPr>
-                </a:tc>
-                <a:tc>
-                  <a:txBody>
-                    <a:bodyPr/>
-                    <a:lstStyle/>
-                    <a:p>
-                      <a:pPr marL="0" marR="0" lvl="0" indent="0" algn="ctr" defTabSz="914400" rtl="0" eaLnBrk="1" fontAlgn="auto" latinLnBrk="0" hangingPunct="1">
-                        <a:lnSpc>
-                          <a:spcPct val="100000"/>
-                        </a:lnSpc>
-                        <a:spcBef>
-                          <a:spcPts val="0"/>
-                        </a:spcBef>
-                        <a:spcAft>
-                          <a:spcPts val="0"/>
-                        </a:spcAft>
-                        <a:buClr>
-                          <a:srgbClr val="000000"/>
-                        </a:buClr>
-                        <a:buSzTx/>
-                        <a:buFont typeface="Arial"/>
-                        <a:buNone/>
-                        <a:tabLst/>
-                        <a:defRPr/>
-                      </a:pPr>
-                      <a:r>
-                        <a:rPr lang="en-US" sz="2400" dirty="0">
-                          <a:solidFill>
-                            <a:srgbClr val="0B5394"/>
-                          </a:solidFill>
-                        </a:rPr>
-                        <a:t>Model 1</a:t>
-                      </a:r>
-                    </a:p>
-                  </a:txBody>
-                  <a:tcPr>
-                    <a:solidFill>
-                      <a:schemeClr val="bg1"/>
-                    </a:solidFill>
-                  </a:tcPr>
-                </a:tc>
-                <a:tc>
-                  <a:txBody>
-                    <a:bodyPr/>
-                    <a:lstStyle/>
-                    <a:p>
-                      <a:pPr algn="ctr"/>
-                      <a:r>
-                        <a:rPr lang="en-US" sz="2400" dirty="0"/>
-                        <a:t>0.00</a:t>
-                      </a:r>
-                    </a:p>
-                  </a:txBody>
-                  <a:tcPr>
-                    <a:solidFill>
-                      <a:schemeClr val="bg1"/>
-                    </a:solidFill>
-                  </a:tcPr>
-                </a:tc>
-                <a:extLst>
-                  <a:ext uri="{0D108BD9-81ED-4DB2-BD59-A6C34878D82A}">
-                    <a16:rowId xmlns:a16="http://schemas.microsoft.com/office/drawing/2014/main" val="3284802000"/>
-                  </a:ext>
-                </a:extLst>
-              </a:tr>
-              <a:tr h="370840">
-                <a:tc>
-                  <a:txBody>
-                    <a:bodyPr/>
-                    <a:lstStyle/>
-                    <a:p>
-                      <a:r>
-                        <a:rPr lang="en-US" sz="2400" dirty="0"/>
-                        <a:t>Lowest Variance</a:t>
-                      </a:r>
-                    </a:p>
-                  </a:txBody>
-                  <a:tcPr>
-                    <a:solidFill>
-                      <a:schemeClr val="bg1"/>
-                    </a:solidFill>
-                  </a:tcPr>
-                </a:tc>
-                <a:tc>
-                  <a:txBody>
-                    <a:bodyPr/>
-                    <a:lstStyle/>
-                    <a:p>
-                      <a:pPr algn="ctr"/>
-                      <a:r>
-                        <a:rPr lang="en-US" sz="2400" dirty="0">
-                          <a:solidFill>
-                            <a:srgbClr val="FFC000"/>
-                          </a:solidFill>
-                        </a:rPr>
-                        <a:t>Model 3</a:t>
-                      </a:r>
-                    </a:p>
-                  </a:txBody>
-                  <a:tcPr>
-                    <a:solidFill>
-                      <a:schemeClr val="bg1"/>
-                    </a:solidFill>
-                  </a:tcPr>
-                </a:tc>
-                <a:tc>
-                  <a:txBody>
-                    <a:bodyPr/>
-                    <a:lstStyle/>
-                    <a:p>
-                      <a:pPr algn="ctr"/>
-                      <a:r>
-                        <a:rPr lang="en-US" sz="2400" dirty="0"/>
-                        <a:t>0.32</a:t>
-                      </a:r>
-                    </a:p>
-                  </a:txBody>
-                  <a:tcPr>
-                    <a:solidFill>
-                      <a:schemeClr val="bg1"/>
-                    </a:solidFill>
-                  </a:tcPr>
-                </a:tc>
-                <a:extLst>
-                  <a:ext uri="{0D108BD9-81ED-4DB2-BD59-A6C34878D82A}">
-                    <a16:rowId xmlns:a16="http://schemas.microsoft.com/office/drawing/2014/main" val="1043181873"/>
-                  </a:ext>
-                </a:extLst>
-              </a:tr>
-            </a:tbl>
-          </a:graphicData>
-        </a:graphic>
-      </p:graphicFrame>
-      <p:sp>
-        <p:nvSpPr>
-          <p:cNvPr id="4" name="Rectangle 3">
-            <a:extLst>
-              <a:ext uri="{FF2B5EF4-FFF2-40B4-BE49-F238E27FC236}">
-                <a16:creationId xmlns:a16="http://schemas.microsoft.com/office/drawing/2014/main" id="{8168EF40-2DAE-8E43-ADA7-4AEF8BC68293}"/>
-              </a:ext>
-            </a:extLst>
-          </p:cNvPr>
-          <p:cNvSpPr/>
-          <p:nvPr/>
-        </p:nvSpPr>
-        <p:spPr>
-          <a:xfrm>
-            <a:off x="1498600" y="3594100"/>
-            <a:ext cx="8547100" cy="469900"/>
-          </a:xfrm>
-          <a:prstGeom prst="rect">
-            <a:avLst/>
-          </a:prstGeom>
-          <a:noFill/>
-          <a:ln w="57150">
-            <a:solidFill>
-              <a:srgbClr val="00B050"/>
-            </a:solidFill>
-          </a:ln>
-        </p:spPr>
-        <p:style>
-          <a:lnRef idx="2">
-            <a:schemeClr val="accent1">
-              <a:shade val="50000"/>
-            </a:schemeClr>
-          </a:lnRef>
-          <a:fillRef idx="1">
-            <a:schemeClr val="accent1"/>
-          </a:fillRef>
-          <a:effectRef idx="0">
-            <a:schemeClr val="accent1"/>
-          </a:effectRef>
-          <a:fontRef idx="minor">
-            <a:schemeClr val="lt1"/>
-          </a:fontRef>
-        </p:style>
-        <p:txBody>
-          <a:bodyPr rtlCol="0" anchor="ctr"/>
-          <a:lstStyle/>
-          <a:p>
-            <a:pPr algn="ctr"/>
-            <a:endParaRPr lang="en-US"/>
-          </a:p>
-        </p:txBody>
-      </p:sp>
-    </p:spTree>
-    <p:extLst>
-      <p:ext uri="{BB962C8B-B14F-4D97-AF65-F5344CB8AC3E}">
-        <p14:creationId xmlns:p14="http://schemas.microsoft.com/office/powerpoint/2010/main" val="441843033"/>
-      </p:ext>
-    </p:extLst>
-  </p:cSld>
-  <p:clrMapOvr>
-    <a:masterClrMapping/>
-  </p:clrMapOvr>
-</p:sld>
-</file>
-
-<file path=ppt/slides/slide33.xml><?xml version="1.0" encoding="utf-8"?>
 <p:sld xmlns:a="http://schemas.openxmlformats.org/drawingml/2006/main" xmlns:r="http://schemas.openxmlformats.org/officeDocument/2006/relationships" xmlns:p="http://schemas.openxmlformats.org/presentationml/2006/main">
   <p:cSld>
     <p:spTree>
@@ -20037,7 +19863,7 @@
 </p:sld>
 </file>
 
-<file path=ppt/slides/slide34.xml><?xml version="1.0" encoding="utf-8"?>
+<file path=ppt/slides/slide32.xml><?xml version="1.0" encoding="utf-8"?>
 <p:sld xmlns:a="http://schemas.openxmlformats.org/drawingml/2006/main" xmlns:r="http://schemas.openxmlformats.org/officeDocument/2006/relationships" xmlns:p="http://schemas.openxmlformats.org/presentationml/2006/main">
   <p:cSld>
     <p:spTree>
@@ -20122,6 +19948,272 @@
     <p:extLst>
       <p:ext uri="{BB962C8B-B14F-4D97-AF65-F5344CB8AC3E}">
         <p14:creationId xmlns:p14="http://schemas.microsoft.com/office/powerpoint/2010/main" val="639890484"/>
+      </p:ext>
+    </p:extLst>
+  </p:cSld>
+  <p:clrMapOvr>
+    <a:masterClrMapping/>
+  </p:clrMapOvr>
+</p:sld>
+</file>
+
+<file path=ppt/slides/slide33.xml><?xml version="1.0" encoding="utf-8"?>
+<p:sld xmlns:a="http://schemas.openxmlformats.org/drawingml/2006/main" xmlns:r="http://schemas.openxmlformats.org/officeDocument/2006/relationships" xmlns:p="http://schemas.openxmlformats.org/presentationml/2006/main">
+  <p:cSld>
+    <p:spTree>
+      <p:nvGrpSpPr>
+        <p:cNvPr id="1" name=""/>
+        <p:cNvGrpSpPr/>
+        <p:nvPr/>
+      </p:nvGrpSpPr>
+      <p:grpSpPr>
+        <a:xfrm>
+          <a:off x="0" y="0"/>
+          <a:ext cx="0" cy="0"/>
+          <a:chOff x="0" y="0"/>
+          <a:chExt cx="0" cy="0"/>
+        </a:xfrm>
+      </p:grpSpPr>
+      <p:sp>
+        <p:nvSpPr>
+          <p:cNvPr id="2" name="Title 1">
+            <a:extLst>
+              <a:ext uri="{FF2B5EF4-FFF2-40B4-BE49-F238E27FC236}">
+                <a16:creationId xmlns:a16="http://schemas.microsoft.com/office/drawing/2014/main" id="{5AD7079F-DDC2-509F-BF4C-E1BB85A87524}"/>
+              </a:ext>
+            </a:extLst>
+          </p:cNvPr>
+          <p:cNvSpPr>
+            <a:spLocks noGrp="1"/>
+          </p:cNvSpPr>
+          <p:nvPr>
+            <p:ph type="title"/>
+          </p:nvPr>
+        </p:nvSpPr>
+        <p:spPr/>
+        <p:txBody>
+          <a:bodyPr/>
+          <a:lstStyle/>
+          <a:p>
+            <a:r>
+              <a:rPr lang="en-US" dirty="0"/>
+              <a:t>Examples</a:t>
+            </a:r>
+          </a:p>
+        </p:txBody>
+      </p:sp>
+      <p:sp>
+        <p:nvSpPr>
+          <p:cNvPr id="3" name="Text Placeholder 2">
+            <a:extLst>
+              <a:ext uri="{FF2B5EF4-FFF2-40B4-BE49-F238E27FC236}">
+                <a16:creationId xmlns:a16="http://schemas.microsoft.com/office/drawing/2014/main" id="{8389BED5-D9F0-9F9E-D9AF-2C0E8E3CBD22}"/>
+              </a:ext>
+            </a:extLst>
+          </p:cNvPr>
+          <p:cNvSpPr>
+            <a:spLocks noGrp="1"/>
+          </p:cNvSpPr>
+          <p:nvPr>
+            <p:ph type="body" idx="1"/>
+          </p:nvPr>
+        </p:nvSpPr>
+        <p:spPr/>
+        <p:txBody>
+          <a:bodyPr/>
+          <a:lstStyle/>
+          <a:p>
+            <a:endParaRPr lang="en-US"/>
+          </a:p>
+        </p:txBody>
+      </p:sp>
+      <p:pic>
+        <p:nvPicPr>
+          <p:cNvPr id="1026" name="Picture 2">
+            <a:extLst>
+              <a:ext uri="{FF2B5EF4-FFF2-40B4-BE49-F238E27FC236}">
+                <a16:creationId xmlns:a16="http://schemas.microsoft.com/office/drawing/2014/main" id="{1CE814EB-8B37-3328-E8CE-739CFF58B90B}"/>
+              </a:ext>
+            </a:extLst>
+          </p:cNvPr>
+          <p:cNvPicPr>
+            <a:picLocks noChangeAspect="1" noChangeArrowheads="1"/>
+          </p:cNvPicPr>
+          <p:nvPr/>
+        </p:nvPicPr>
+        <p:blipFill>
+          <a:blip r:embed="rId2">
+            <a:extLst>
+              <a:ext uri="{28A0092B-C50C-407E-A947-70E740481C1C}">
+                <a14:useLocalDpi xmlns:a14="http://schemas.microsoft.com/office/drawing/2010/main" val="0"/>
+              </a:ext>
+            </a:extLst>
+          </a:blip>
+          <a:srcRect/>
+          <a:stretch>
+            <a:fillRect/>
+          </a:stretch>
+        </p:blipFill>
+        <p:spPr bwMode="auto">
+          <a:xfrm>
+            <a:off x="1299570" y="1368568"/>
+            <a:ext cx="9347200" cy="5130800"/>
+          </a:xfrm>
+          <a:prstGeom prst="rect">
+            <a:avLst/>
+          </a:prstGeom>
+          <a:noFill/>
+          <a:extLst>
+            <a:ext uri="{909E8E84-426E-40DD-AFC4-6F175D3DCCD1}">
+              <a14:hiddenFill xmlns:a14="http://schemas.microsoft.com/office/drawing/2010/main">
+                <a:solidFill>
+                  <a:srgbClr val="FFFFFF"/>
+                </a:solidFill>
+              </a14:hiddenFill>
+            </a:ext>
+          </a:extLst>
+        </p:spPr>
+      </p:pic>
+    </p:spTree>
+    <p:extLst>
+      <p:ext uri="{BB962C8B-B14F-4D97-AF65-F5344CB8AC3E}">
+        <p14:creationId xmlns:p14="http://schemas.microsoft.com/office/powerpoint/2010/main" val="5009378"/>
+      </p:ext>
+    </p:extLst>
+  </p:cSld>
+  <p:clrMapOvr>
+    <a:masterClrMapping/>
+  </p:clrMapOvr>
+</p:sld>
+</file>
+
+<file path=ppt/slides/slide34.xml><?xml version="1.0" encoding="utf-8"?>
+<p:sld xmlns:a="http://schemas.openxmlformats.org/drawingml/2006/main" xmlns:r="http://schemas.openxmlformats.org/officeDocument/2006/relationships" xmlns:p="http://schemas.openxmlformats.org/presentationml/2006/main">
+  <p:cSld>
+    <p:spTree>
+      <p:nvGrpSpPr>
+        <p:cNvPr id="1" name="">
+          <a:extLst>
+            <a:ext uri="{FF2B5EF4-FFF2-40B4-BE49-F238E27FC236}">
+              <a16:creationId xmlns:a16="http://schemas.microsoft.com/office/drawing/2014/main" id="{503B20F2-0774-3003-1FA5-E04D50DABD58}"/>
+            </a:ext>
+          </a:extLst>
+        </p:cNvPr>
+        <p:cNvGrpSpPr/>
+        <p:nvPr/>
+      </p:nvGrpSpPr>
+      <p:grpSpPr>
+        <a:xfrm>
+          <a:off x="0" y="0"/>
+          <a:ext cx="0" cy="0"/>
+          <a:chOff x="0" y="0"/>
+          <a:chExt cx="0" cy="0"/>
+        </a:xfrm>
+      </p:grpSpPr>
+      <p:sp>
+        <p:nvSpPr>
+          <p:cNvPr id="2" name="Title 1">
+            <a:extLst>
+              <a:ext uri="{FF2B5EF4-FFF2-40B4-BE49-F238E27FC236}">
+                <a16:creationId xmlns:a16="http://schemas.microsoft.com/office/drawing/2014/main" id="{C8200BD4-CB88-242A-5ECD-8CE3FF972802}"/>
+              </a:ext>
+            </a:extLst>
+          </p:cNvPr>
+          <p:cNvSpPr>
+            <a:spLocks noGrp="1"/>
+          </p:cNvSpPr>
+          <p:nvPr>
+            <p:ph type="title"/>
+          </p:nvPr>
+        </p:nvSpPr>
+        <p:spPr/>
+        <p:txBody>
+          <a:bodyPr/>
+          <a:lstStyle/>
+          <a:p>
+            <a:r>
+              <a:rPr lang="en-US" dirty="0"/>
+              <a:t>Examples</a:t>
+            </a:r>
+          </a:p>
+        </p:txBody>
+      </p:sp>
+      <p:sp>
+        <p:nvSpPr>
+          <p:cNvPr id="3" name="Text Placeholder 2">
+            <a:extLst>
+              <a:ext uri="{FF2B5EF4-FFF2-40B4-BE49-F238E27FC236}">
+                <a16:creationId xmlns:a16="http://schemas.microsoft.com/office/drawing/2014/main" id="{A19BACA7-465C-00B3-ED07-CA4574BFD6C0}"/>
+              </a:ext>
+            </a:extLst>
+          </p:cNvPr>
+          <p:cNvSpPr>
+            <a:spLocks noGrp="1"/>
+          </p:cNvSpPr>
+          <p:nvPr>
+            <p:ph type="body" idx="1"/>
+          </p:nvPr>
+        </p:nvSpPr>
+        <p:spPr/>
+        <p:txBody>
+          <a:bodyPr/>
+          <a:lstStyle/>
+          <a:p>
+            <a:endParaRPr lang="en-US"/>
+          </a:p>
+        </p:txBody>
+      </p:sp>
+      <p:pic>
+        <p:nvPicPr>
+          <p:cNvPr id="2050" name="Picture 2">
+            <a:extLst>
+              <a:ext uri="{FF2B5EF4-FFF2-40B4-BE49-F238E27FC236}">
+                <a16:creationId xmlns:a16="http://schemas.microsoft.com/office/drawing/2014/main" id="{C61FFA71-62C2-3936-BAD6-7562E0BE8EDF}"/>
+              </a:ext>
+            </a:extLst>
+          </p:cNvPr>
+          <p:cNvPicPr>
+            <a:picLocks noChangeAspect="1" noChangeArrowheads="1"/>
+          </p:cNvPicPr>
+          <p:nvPr/>
+        </p:nvPicPr>
+        <p:blipFill>
+          <a:blip r:embed="rId2">
+            <a:extLst>
+              <a:ext uri="{28A0092B-C50C-407E-A947-70E740481C1C}">
+                <a14:useLocalDpi xmlns:a14="http://schemas.microsoft.com/office/drawing/2010/main" val="0"/>
+              </a:ext>
+            </a:extLst>
+          </a:blip>
+          <a:srcRect/>
+          <a:stretch>
+            <a:fillRect/>
+          </a:stretch>
+        </p:blipFill>
+        <p:spPr bwMode="auto">
+          <a:xfrm>
+            <a:off x="1422350" y="1248833"/>
+            <a:ext cx="9347200" cy="5130800"/>
+          </a:xfrm>
+          <a:prstGeom prst="rect">
+            <a:avLst/>
+          </a:prstGeom>
+          <a:noFill/>
+          <a:extLst>
+            <a:ext uri="{909E8E84-426E-40DD-AFC4-6F175D3DCCD1}">
+              <a14:hiddenFill xmlns:a14="http://schemas.microsoft.com/office/drawing/2010/main">
+                <a:solidFill>
+                  <a:srgbClr val="FFFFFF"/>
+                </a:solidFill>
+              </a14:hiddenFill>
+            </a:ext>
+          </a:extLst>
+        </p:spPr>
+      </p:pic>
+    </p:spTree>
+    <p:extLst>
+      <p:ext uri="{BB962C8B-B14F-4D97-AF65-F5344CB8AC3E}">
+        <p14:creationId xmlns:p14="http://schemas.microsoft.com/office/powerpoint/2010/main" val="2193479768"/>
       </p:ext>
     </p:extLst>
   </p:cSld>
@@ -20919,13 +21011,28 @@
             <a:spLocks noGrp="1"/>
           </p:cNvSpPr>
           <p:nvPr>
-            <p:ph type="body" idx="1"/>
+            <p:ph type="body" idx="4294967295"/>
           </p:nvPr>
         </p:nvSpPr>
-        <p:spPr/>
+        <p:spPr>
+          <a:xfrm>
+            <a:off x="331108" y="759215"/>
+            <a:ext cx="11664950" cy="4954587"/>
+          </a:xfrm>
+        </p:spPr>
         <p:txBody>
           <a:bodyPr/>
           <a:lstStyle/>
+          <a:p>
+            <a:pPr>
+              <a:buFontTx/>
+              <a:buChar char="-"/>
+            </a:pPr>
+            <a:r>
+              <a:rPr lang="en-US" dirty="0"/>
+              <a:t>Temporal splits</a:t>
+            </a:r>
+          </a:p>
           <a:p>
             <a:pPr>
               <a:buFontTx/>
@@ -20951,619 +21058,7 @@
               <a:buFontTx/>
               <a:buChar char="-"/>
             </a:pPr>
-            <a:r>
-              <a:rPr lang="en-US" dirty="0"/>
-              <a:t>Temporal splits</a:t>
-            </a:r>
-          </a:p>
-          <a:p>
-            <a:pPr>
-              <a:buFontTx/>
-              <a:buChar char="-"/>
-            </a:pPr>
-            <a:r>
-              <a:rPr lang="en-US" dirty="0"/>
-              <a:t>Models</a:t>
-            </a:r>
-          </a:p>
-          <a:p>
-            <a:pPr>
-              <a:buFontTx/>
-              <a:buChar char="-"/>
-            </a:pPr>
             <a:endParaRPr lang="en-US" dirty="0"/>
-          </a:p>
-          <a:p>
-            <a:pPr>
-              <a:buFontTx/>
-              <a:buChar char="-"/>
-            </a:pPr>
-            <a:endParaRPr lang="en-US" dirty="0"/>
-          </a:p>
-        </p:txBody>
-      </p:sp>
-      <p:sp>
-        <p:nvSpPr>
-          <p:cNvPr id="3" name="Title 2">
-            <a:extLst>
-              <a:ext uri="{FF2B5EF4-FFF2-40B4-BE49-F238E27FC236}">
-                <a16:creationId xmlns:a16="http://schemas.microsoft.com/office/drawing/2014/main" id="{FA74DCC6-BB6C-325D-3B3D-F28E01B3ADFA}"/>
-              </a:ext>
-            </a:extLst>
-          </p:cNvPr>
-          <p:cNvSpPr>
-            <a:spLocks noGrp="1"/>
-          </p:cNvSpPr>
-          <p:nvPr>
-            <p:ph type="title"/>
-          </p:nvPr>
-        </p:nvSpPr>
-        <p:spPr/>
-        <p:txBody>
-          <a:bodyPr/>
-          <a:lstStyle/>
-          <a:p>
-            <a:endParaRPr lang="en-US"/>
-          </a:p>
-        </p:txBody>
-      </p:sp>
-      <p:sp>
-        <p:nvSpPr>
-          <p:cNvPr id="5" name="Rectangle 4">
-            <a:extLst>
-              <a:ext uri="{FF2B5EF4-FFF2-40B4-BE49-F238E27FC236}">
-                <a16:creationId xmlns:a16="http://schemas.microsoft.com/office/drawing/2014/main" id="{AFF2F74B-CF60-E84F-635F-BD5DE0A54B0C}"/>
-              </a:ext>
-            </a:extLst>
-          </p:cNvPr>
-          <p:cNvSpPr/>
-          <p:nvPr/>
-        </p:nvSpPr>
-        <p:spPr>
-          <a:xfrm>
-            <a:off x="7609115" y="1353807"/>
-            <a:ext cx="2111828" cy="805543"/>
-          </a:xfrm>
-          <a:prstGeom prst="rect">
-            <a:avLst/>
-          </a:prstGeom>
-        </p:spPr>
-        <p:style>
-          <a:lnRef idx="2">
-            <a:schemeClr val="accent1">
-              <a:shade val="15000"/>
-            </a:schemeClr>
-          </a:lnRef>
-          <a:fillRef idx="1">
-            <a:schemeClr val="accent1"/>
-          </a:fillRef>
-          <a:effectRef idx="0">
-            <a:schemeClr val="accent1"/>
-          </a:effectRef>
-          <a:fontRef idx="minor">
-            <a:schemeClr val="lt1"/>
-          </a:fontRef>
-        </p:style>
-        <p:txBody>
-          <a:bodyPr rtlCol="0" anchor="ctr"/>
-          <a:lstStyle/>
-          <a:p>
-            <a:pPr algn="ctr"/>
-            <a:r>
-              <a:rPr lang="en-US" sz="1800" dirty="0">
-                <a:solidFill>
-                  <a:schemeClr val="tx1"/>
-                </a:solidFill>
-              </a:rPr>
-              <a:t>Training Set</a:t>
-            </a:r>
-          </a:p>
-        </p:txBody>
-      </p:sp>
-      <p:sp>
-        <p:nvSpPr>
-          <p:cNvPr id="6" name="Rectangle 5">
-            <a:extLst>
-              <a:ext uri="{FF2B5EF4-FFF2-40B4-BE49-F238E27FC236}">
-                <a16:creationId xmlns:a16="http://schemas.microsoft.com/office/drawing/2014/main" id="{2A19A1EE-1186-0079-DB2D-C4B15FCFD26A}"/>
-              </a:ext>
-            </a:extLst>
-          </p:cNvPr>
-          <p:cNvSpPr/>
-          <p:nvPr/>
-        </p:nvSpPr>
-        <p:spPr>
-          <a:xfrm>
-            <a:off x="9982201" y="1353807"/>
-            <a:ext cx="1676400" cy="805543"/>
-          </a:xfrm>
-          <a:prstGeom prst="rect">
-            <a:avLst/>
-          </a:prstGeom>
-          <a:solidFill>
-            <a:schemeClr val="accent5">
-              <a:lumMod val="40000"/>
-              <a:lumOff val="60000"/>
-            </a:schemeClr>
-          </a:solidFill>
-        </p:spPr>
-        <p:style>
-          <a:lnRef idx="2">
-            <a:schemeClr val="accent1">
-              <a:shade val="15000"/>
-            </a:schemeClr>
-          </a:lnRef>
-          <a:fillRef idx="1">
-            <a:schemeClr val="accent1"/>
-          </a:fillRef>
-          <a:effectRef idx="0">
-            <a:schemeClr val="accent1"/>
-          </a:effectRef>
-          <a:fontRef idx="minor">
-            <a:schemeClr val="lt1"/>
-          </a:fontRef>
-        </p:style>
-        <p:txBody>
-          <a:bodyPr rtlCol="0" anchor="ctr"/>
-          <a:lstStyle/>
-          <a:p>
-            <a:pPr algn="ctr"/>
-            <a:r>
-              <a:rPr lang="en-US" sz="1800" dirty="0">
-                <a:solidFill>
-                  <a:schemeClr val="tx1"/>
-                </a:solidFill>
-              </a:rPr>
-              <a:t>Validation Set</a:t>
-            </a:r>
-          </a:p>
-        </p:txBody>
-      </p:sp>
-      <p:sp>
-        <p:nvSpPr>
-          <p:cNvPr id="21" name="Rectangle 20">
-            <a:extLst>
-              <a:ext uri="{FF2B5EF4-FFF2-40B4-BE49-F238E27FC236}">
-                <a16:creationId xmlns:a16="http://schemas.microsoft.com/office/drawing/2014/main" id="{9AAB26FD-A475-E8AA-10B0-0DBBA3101EDF}"/>
-              </a:ext>
-            </a:extLst>
-          </p:cNvPr>
-          <p:cNvSpPr/>
-          <p:nvPr/>
-        </p:nvSpPr>
-        <p:spPr>
-          <a:xfrm>
-            <a:off x="7609115" y="2315729"/>
-            <a:ext cx="2111828" cy="805543"/>
-          </a:xfrm>
-          <a:prstGeom prst="rect">
-            <a:avLst/>
-          </a:prstGeom>
-        </p:spPr>
-        <p:style>
-          <a:lnRef idx="2">
-            <a:schemeClr val="accent1">
-              <a:shade val="15000"/>
-            </a:schemeClr>
-          </a:lnRef>
-          <a:fillRef idx="1">
-            <a:schemeClr val="accent1"/>
-          </a:fillRef>
-          <a:effectRef idx="0">
-            <a:schemeClr val="accent1"/>
-          </a:effectRef>
-          <a:fontRef idx="minor">
-            <a:schemeClr val="lt1"/>
-          </a:fontRef>
-        </p:style>
-        <p:txBody>
-          <a:bodyPr rtlCol="0" anchor="ctr"/>
-          <a:lstStyle/>
-          <a:p>
-            <a:pPr algn="ctr"/>
-            <a:r>
-              <a:rPr lang="en-US" sz="1800" dirty="0">
-                <a:solidFill>
-                  <a:schemeClr val="tx1"/>
-                </a:solidFill>
-              </a:rPr>
-              <a:t>Training Set</a:t>
-            </a:r>
-          </a:p>
-        </p:txBody>
-      </p:sp>
-      <p:sp>
-        <p:nvSpPr>
-          <p:cNvPr id="22" name="Rectangle 21">
-            <a:extLst>
-              <a:ext uri="{FF2B5EF4-FFF2-40B4-BE49-F238E27FC236}">
-                <a16:creationId xmlns:a16="http://schemas.microsoft.com/office/drawing/2014/main" id="{124B6BBC-4BA6-15DD-DD60-0CE5B9612663}"/>
-              </a:ext>
-            </a:extLst>
-          </p:cNvPr>
-          <p:cNvSpPr/>
-          <p:nvPr/>
-        </p:nvSpPr>
-        <p:spPr>
-          <a:xfrm>
-            <a:off x="9982201" y="2315729"/>
-            <a:ext cx="1676400" cy="805543"/>
-          </a:xfrm>
-          <a:prstGeom prst="rect">
-            <a:avLst/>
-          </a:prstGeom>
-          <a:solidFill>
-            <a:schemeClr val="accent5">
-              <a:lumMod val="40000"/>
-              <a:lumOff val="60000"/>
-            </a:schemeClr>
-          </a:solidFill>
-        </p:spPr>
-        <p:style>
-          <a:lnRef idx="2">
-            <a:schemeClr val="accent1">
-              <a:shade val="15000"/>
-            </a:schemeClr>
-          </a:lnRef>
-          <a:fillRef idx="1">
-            <a:schemeClr val="accent1"/>
-          </a:fillRef>
-          <a:effectRef idx="0">
-            <a:schemeClr val="accent1"/>
-          </a:effectRef>
-          <a:fontRef idx="minor">
-            <a:schemeClr val="lt1"/>
-          </a:fontRef>
-        </p:style>
-        <p:txBody>
-          <a:bodyPr rtlCol="0" anchor="ctr"/>
-          <a:lstStyle/>
-          <a:p>
-            <a:pPr algn="ctr"/>
-            <a:r>
-              <a:rPr lang="en-US" sz="1800" dirty="0">
-                <a:solidFill>
-                  <a:schemeClr val="tx1"/>
-                </a:solidFill>
-              </a:rPr>
-              <a:t>Validation Set</a:t>
-            </a:r>
-          </a:p>
-        </p:txBody>
-      </p:sp>
-      <p:sp>
-        <p:nvSpPr>
-          <p:cNvPr id="23" name="Rectangle 22">
-            <a:extLst>
-              <a:ext uri="{FF2B5EF4-FFF2-40B4-BE49-F238E27FC236}">
-                <a16:creationId xmlns:a16="http://schemas.microsoft.com/office/drawing/2014/main" id="{CC34EE71-6AC0-874F-6325-272A983488CB}"/>
-              </a:ext>
-            </a:extLst>
-          </p:cNvPr>
-          <p:cNvSpPr/>
-          <p:nvPr/>
-        </p:nvSpPr>
-        <p:spPr>
-          <a:xfrm>
-            <a:off x="7609115" y="3394593"/>
-            <a:ext cx="2111828" cy="805543"/>
-          </a:xfrm>
-          <a:prstGeom prst="rect">
-            <a:avLst/>
-          </a:prstGeom>
-        </p:spPr>
-        <p:style>
-          <a:lnRef idx="2">
-            <a:schemeClr val="accent1">
-              <a:shade val="15000"/>
-            </a:schemeClr>
-          </a:lnRef>
-          <a:fillRef idx="1">
-            <a:schemeClr val="accent1"/>
-          </a:fillRef>
-          <a:effectRef idx="0">
-            <a:schemeClr val="accent1"/>
-          </a:effectRef>
-          <a:fontRef idx="minor">
-            <a:schemeClr val="lt1"/>
-          </a:fontRef>
-        </p:style>
-        <p:txBody>
-          <a:bodyPr rtlCol="0" anchor="ctr"/>
-          <a:lstStyle/>
-          <a:p>
-            <a:pPr algn="ctr"/>
-            <a:r>
-              <a:rPr lang="en-US" sz="1800" dirty="0">
-                <a:solidFill>
-                  <a:schemeClr val="tx1"/>
-                </a:solidFill>
-              </a:rPr>
-              <a:t>Training Set</a:t>
-            </a:r>
-          </a:p>
-        </p:txBody>
-      </p:sp>
-      <p:sp>
-        <p:nvSpPr>
-          <p:cNvPr id="24" name="Rectangle 23">
-            <a:extLst>
-              <a:ext uri="{FF2B5EF4-FFF2-40B4-BE49-F238E27FC236}">
-                <a16:creationId xmlns:a16="http://schemas.microsoft.com/office/drawing/2014/main" id="{E123C0AB-44AD-1054-BCE7-255405B42537}"/>
-              </a:ext>
-            </a:extLst>
-          </p:cNvPr>
-          <p:cNvSpPr/>
-          <p:nvPr/>
-        </p:nvSpPr>
-        <p:spPr>
-          <a:xfrm>
-            <a:off x="9982201" y="3394593"/>
-            <a:ext cx="1676400" cy="805543"/>
-          </a:xfrm>
-          <a:prstGeom prst="rect">
-            <a:avLst/>
-          </a:prstGeom>
-          <a:solidFill>
-            <a:schemeClr val="accent5">
-              <a:lumMod val="40000"/>
-              <a:lumOff val="60000"/>
-            </a:schemeClr>
-          </a:solidFill>
-        </p:spPr>
-        <p:style>
-          <a:lnRef idx="2">
-            <a:schemeClr val="accent1">
-              <a:shade val="15000"/>
-            </a:schemeClr>
-          </a:lnRef>
-          <a:fillRef idx="1">
-            <a:schemeClr val="accent1"/>
-          </a:fillRef>
-          <a:effectRef idx="0">
-            <a:schemeClr val="accent1"/>
-          </a:effectRef>
-          <a:fontRef idx="minor">
-            <a:schemeClr val="lt1"/>
-          </a:fontRef>
-        </p:style>
-        <p:txBody>
-          <a:bodyPr rtlCol="0" anchor="ctr"/>
-          <a:lstStyle/>
-          <a:p>
-            <a:pPr algn="ctr"/>
-            <a:r>
-              <a:rPr lang="en-US" sz="1800" dirty="0">
-                <a:solidFill>
-                  <a:schemeClr val="tx1"/>
-                </a:solidFill>
-              </a:rPr>
-              <a:t>Validation Set</a:t>
-            </a:r>
-          </a:p>
-        </p:txBody>
-      </p:sp>
-      <p:sp>
-        <p:nvSpPr>
-          <p:cNvPr id="25" name="Rectangle 24">
-            <a:extLst>
-              <a:ext uri="{FF2B5EF4-FFF2-40B4-BE49-F238E27FC236}">
-                <a16:creationId xmlns:a16="http://schemas.microsoft.com/office/drawing/2014/main" id="{1E98A609-018D-F4C1-36F6-811ED2D239CD}"/>
-              </a:ext>
-            </a:extLst>
-          </p:cNvPr>
-          <p:cNvSpPr/>
-          <p:nvPr/>
-        </p:nvSpPr>
-        <p:spPr>
-          <a:xfrm>
-            <a:off x="7609115" y="4473457"/>
-            <a:ext cx="2111828" cy="805543"/>
-          </a:xfrm>
-          <a:prstGeom prst="rect">
-            <a:avLst/>
-          </a:prstGeom>
-        </p:spPr>
-        <p:style>
-          <a:lnRef idx="2">
-            <a:schemeClr val="accent1">
-              <a:shade val="15000"/>
-            </a:schemeClr>
-          </a:lnRef>
-          <a:fillRef idx="1">
-            <a:schemeClr val="accent1"/>
-          </a:fillRef>
-          <a:effectRef idx="0">
-            <a:schemeClr val="accent1"/>
-          </a:effectRef>
-          <a:fontRef idx="minor">
-            <a:schemeClr val="lt1"/>
-          </a:fontRef>
-        </p:style>
-        <p:txBody>
-          <a:bodyPr rtlCol="0" anchor="ctr"/>
-          <a:lstStyle/>
-          <a:p>
-            <a:pPr algn="ctr"/>
-            <a:r>
-              <a:rPr lang="en-US" sz="1800" dirty="0">
-                <a:solidFill>
-                  <a:schemeClr val="tx1"/>
-                </a:solidFill>
-              </a:rPr>
-              <a:t>Training Set</a:t>
-            </a:r>
-          </a:p>
-        </p:txBody>
-      </p:sp>
-      <p:sp>
-        <p:nvSpPr>
-          <p:cNvPr id="26" name="Rectangle 25">
-            <a:extLst>
-              <a:ext uri="{FF2B5EF4-FFF2-40B4-BE49-F238E27FC236}">
-                <a16:creationId xmlns:a16="http://schemas.microsoft.com/office/drawing/2014/main" id="{BDEA9797-07EA-7ABC-5D52-14E8A10D0768}"/>
-              </a:ext>
-            </a:extLst>
-          </p:cNvPr>
-          <p:cNvSpPr/>
-          <p:nvPr/>
-        </p:nvSpPr>
-        <p:spPr>
-          <a:xfrm>
-            <a:off x="9982201" y="4473457"/>
-            <a:ext cx="1676400" cy="805543"/>
-          </a:xfrm>
-          <a:prstGeom prst="rect">
-            <a:avLst/>
-          </a:prstGeom>
-          <a:solidFill>
-            <a:schemeClr val="accent5">
-              <a:lumMod val="40000"/>
-              <a:lumOff val="60000"/>
-            </a:schemeClr>
-          </a:solidFill>
-        </p:spPr>
-        <p:style>
-          <a:lnRef idx="2">
-            <a:schemeClr val="accent1">
-              <a:shade val="15000"/>
-            </a:schemeClr>
-          </a:lnRef>
-          <a:fillRef idx="1">
-            <a:schemeClr val="accent1"/>
-          </a:fillRef>
-          <a:effectRef idx="0">
-            <a:schemeClr val="accent1"/>
-          </a:effectRef>
-          <a:fontRef idx="minor">
-            <a:schemeClr val="lt1"/>
-          </a:fontRef>
-        </p:style>
-        <p:txBody>
-          <a:bodyPr rtlCol="0" anchor="ctr"/>
-          <a:lstStyle/>
-          <a:p>
-            <a:pPr algn="ctr"/>
-            <a:r>
-              <a:rPr lang="en-US" sz="1800" dirty="0">
-                <a:solidFill>
-                  <a:schemeClr val="tx1"/>
-                </a:solidFill>
-              </a:rPr>
-              <a:t>Validation Set</a:t>
-            </a:r>
-          </a:p>
-        </p:txBody>
-      </p:sp>
-      <p:sp>
-        <p:nvSpPr>
-          <p:cNvPr id="27" name="Rectangle 26">
-            <a:extLst>
-              <a:ext uri="{FF2B5EF4-FFF2-40B4-BE49-F238E27FC236}">
-                <a16:creationId xmlns:a16="http://schemas.microsoft.com/office/drawing/2014/main" id="{EDF99B1A-DA21-D1A2-71A2-C7670949103A}"/>
-              </a:ext>
-            </a:extLst>
-          </p:cNvPr>
-          <p:cNvSpPr/>
-          <p:nvPr/>
-        </p:nvSpPr>
-        <p:spPr>
-          <a:xfrm>
-            <a:off x="7609115" y="5519663"/>
-            <a:ext cx="2111828" cy="805543"/>
-          </a:xfrm>
-          <a:prstGeom prst="rect">
-            <a:avLst/>
-          </a:prstGeom>
-        </p:spPr>
-        <p:style>
-          <a:lnRef idx="2">
-            <a:schemeClr val="accent1">
-              <a:shade val="15000"/>
-            </a:schemeClr>
-          </a:lnRef>
-          <a:fillRef idx="1">
-            <a:schemeClr val="accent1"/>
-          </a:fillRef>
-          <a:effectRef idx="0">
-            <a:schemeClr val="accent1"/>
-          </a:effectRef>
-          <a:fontRef idx="minor">
-            <a:schemeClr val="lt1"/>
-          </a:fontRef>
-        </p:style>
-        <p:txBody>
-          <a:bodyPr rtlCol="0" anchor="ctr"/>
-          <a:lstStyle/>
-          <a:p>
-            <a:pPr algn="ctr"/>
-            <a:r>
-              <a:rPr lang="en-US" sz="1800" dirty="0">
-                <a:solidFill>
-                  <a:schemeClr val="tx1"/>
-                </a:solidFill>
-              </a:rPr>
-              <a:t>Training Set</a:t>
-            </a:r>
-          </a:p>
-        </p:txBody>
-      </p:sp>
-      <p:sp>
-        <p:nvSpPr>
-          <p:cNvPr id="28" name="Rectangle 27">
-            <a:extLst>
-              <a:ext uri="{FF2B5EF4-FFF2-40B4-BE49-F238E27FC236}">
-                <a16:creationId xmlns:a16="http://schemas.microsoft.com/office/drawing/2014/main" id="{FAAE4AA4-87FF-2BE0-244D-F33E917680C5}"/>
-              </a:ext>
-            </a:extLst>
-          </p:cNvPr>
-          <p:cNvSpPr/>
-          <p:nvPr/>
-        </p:nvSpPr>
-        <p:spPr>
-          <a:xfrm>
-            <a:off x="9982201" y="5519663"/>
-            <a:ext cx="1676400" cy="805543"/>
-          </a:xfrm>
-          <a:prstGeom prst="rect">
-            <a:avLst/>
-          </a:prstGeom>
-          <a:solidFill>
-            <a:schemeClr val="accent5">
-              <a:lumMod val="40000"/>
-              <a:lumOff val="60000"/>
-            </a:schemeClr>
-          </a:solidFill>
-        </p:spPr>
-        <p:style>
-          <a:lnRef idx="2">
-            <a:schemeClr val="accent1">
-              <a:shade val="15000"/>
-            </a:schemeClr>
-          </a:lnRef>
-          <a:fillRef idx="1">
-            <a:schemeClr val="accent1"/>
-          </a:fillRef>
-          <a:effectRef idx="0">
-            <a:schemeClr val="accent1"/>
-          </a:effectRef>
-          <a:fontRef idx="minor">
-            <a:schemeClr val="lt1"/>
-          </a:fontRef>
-        </p:style>
-        <p:txBody>
-          <a:bodyPr rtlCol="0" anchor="ctr"/>
-          <a:lstStyle/>
-          <a:p>
-            <a:pPr algn="ctr"/>
-            <a:r>
-              <a:rPr lang="en-US" sz="1800" dirty="0">
-                <a:solidFill>
-                  <a:schemeClr val="tx1"/>
-                </a:solidFill>
-              </a:rPr>
-              <a:t>Validation Set</a:t>
-            </a:r>
           </a:p>
         </p:txBody>
       </p:sp>
@@ -21581,7 +21076,7 @@
         </p:nvSpPr>
         <p:spPr>
           <a:xfrm>
-            <a:off x="4019079" y="1860765"/>
+            <a:off x="4356536" y="1403564"/>
             <a:ext cx="1021007" cy="805543"/>
           </a:xfrm>
           <a:prstGeom prst="rect">
@@ -21637,7 +21132,7 @@
         </p:nvSpPr>
         <p:spPr>
           <a:xfrm>
-            <a:off x="5347697" y="1316479"/>
+            <a:off x="5685154" y="859278"/>
             <a:ext cx="1566420" cy="544286"/>
           </a:xfrm>
           <a:prstGeom prst="rect">
@@ -21693,7 +21188,7 @@
         </p:nvSpPr>
         <p:spPr>
           <a:xfrm>
-            <a:off x="5347697" y="1905674"/>
+            <a:off x="5685154" y="1448473"/>
             <a:ext cx="1566420" cy="544286"/>
           </a:xfrm>
           <a:prstGeom prst="rect">
@@ -21749,7 +21244,7 @@
         </p:nvSpPr>
         <p:spPr>
           <a:xfrm>
-            <a:off x="5337920" y="2506429"/>
+            <a:off x="5675377" y="2049228"/>
             <a:ext cx="1566420" cy="544286"/>
           </a:xfrm>
           <a:prstGeom prst="rect">
@@ -21811,7 +21306,7 @@
         </p:nvCxnSpPr>
         <p:spPr>
           <a:xfrm flipV="1">
-            <a:off x="5040086" y="1588622"/>
+            <a:off x="5377543" y="1131421"/>
             <a:ext cx="307611" cy="674915"/>
           </a:xfrm>
           <a:prstGeom prst="straightConnector1">
@@ -21854,7 +21349,7 @@
         </p:nvCxnSpPr>
         <p:spPr>
           <a:xfrm flipV="1">
-            <a:off x="5040086" y="2177817"/>
+            <a:off x="5377543" y="1720616"/>
             <a:ext cx="307611" cy="85720"/>
           </a:xfrm>
           <a:prstGeom prst="straightConnector1">
@@ -21897,7 +21392,7 @@
         </p:nvCxnSpPr>
         <p:spPr>
           <a:xfrm>
-            <a:off x="5040086" y="2263537"/>
+            <a:off x="5377543" y="1806336"/>
             <a:ext cx="297834" cy="515035"/>
           </a:xfrm>
           <a:prstGeom prst="straightConnector1">
@@ -21936,7 +21431,7 @@
         </p:nvSpPr>
         <p:spPr>
           <a:xfrm>
-            <a:off x="3984172" y="3755817"/>
+            <a:off x="4321629" y="3298616"/>
             <a:ext cx="1021007" cy="805543"/>
           </a:xfrm>
           <a:prstGeom prst="rect">
@@ -21992,7 +21487,7 @@
         </p:nvSpPr>
         <p:spPr>
           <a:xfrm>
-            <a:off x="5312790" y="3211531"/>
+            <a:off x="5650247" y="2754330"/>
             <a:ext cx="1566420" cy="544286"/>
           </a:xfrm>
           <a:prstGeom prst="rect">
@@ -22048,7 +21543,7 @@
         </p:nvSpPr>
         <p:spPr>
           <a:xfrm>
-            <a:off x="5312790" y="3800726"/>
+            <a:off x="5650247" y="3343525"/>
             <a:ext cx="1566420" cy="544286"/>
           </a:xfrm>
           <a:prstGeom prst="rect">
@@ -22104,7 +21599,7 @@
         </p:nvSpPr>
         <p:spPr>
           <a:xfrm>
-            <a:off x="5303013" y="4401481"/>
+            <a:off x="5640470" y="3944280"/>
             <a:ext cx="1566420" cy="544286"/>
           </a:xfrm>
           <a:prstGeom prst="rect">
@@ -22166,7 +21661,7 @@
         </p:nvCxnSpPr>
         <p:spPr>
           <a:xfrm flipV="1">
-            <a:off x="5005179" y="3483674"/>
+            <a:off x="5342636" y="3026473"/>
             <a:ext cx="307611" cy="674915"/>
           </a:xfrm>
           <a:prstGeom prst="straightConnector1">
@@ -22209,7 +21704,7 @@
         </p:nvCxnSpPr>
         <p:spPr>
           <a:xfrm flipV="1">
-            <a:off x="5005179" y="4072869"/>
+            <a:off x="5342636" y="3615668"/>
             <a:ext cx="307611" cy="85720"/>
           </a:xfrm>
           <a:prstGeom prst="straightConnector1">
@@ -22252,7 +21747,7 @@
         </p:nvCxnSpPr>
         <p:spPr>
           <a:xfrm>
-            <a:off x="5005179" y="4158589"/>
+            <a:off x="5342636" y="3701388"/>
             <a:ext cx="297834" cy="515035"/>
           </a:xfrm>
           <a:prstGeom prst="straightConnector1">
@@ -22291,7 +21786,7 @@
         </p:nvSpPr>
         <p:spPr>
           <a:xfrm>
-            <a:off x="3974395" y="5637603"/>
+            <a:off x="4311852" y="5180402"/>
             <a:ext cx="1021007" cy="805543"/>
           </a:xfrm>
           <a:prstGeom prst="rect">
@@ -22347,7 +21842,7 @@
         </p:nvSpPr>
         <p:spPr>
           <a:xfrm>
-            <a:off x="5303013" y="5093317"/>
+            <a:off x="5640470" y="4636116"/>
             <a:ext cx="1566420" cy="544286"/>
           </a:xfrm>
           <a:prstGeom prst="rect">
@@ -22403,7 +21898,7 @@
         </p:nvSpPr>
         <p:spPr>
           <a:xfrm>
-            <a:off x="5303013" y="5682512"/>
+            <a:off x="5640470" y="5225311"/>
             <a:ext cx="1566420" cy="544286"/>
           </a:xfrm>
           <a:prstGeom prst="rect">
@@ -22459,7 +21954,7 @@
         </p:nvSpPr>
         <p:spPr>
           <a:xfrm>
-            <a:off x="5293236" y="6283267"/>
+            <a:off x="5630693" y="5826066"/>
             <a:ext cx="1566420" cy="544286"/>
           </a:xfrm>
           <a:prstGeom prst="rect">
@@ -22521,7 +22016,7 @@
         </p:nvCxnSpPr>
         <p:spPr>
           <a:xfrm flipV="1">
-            <a:off x="4995402" y="5365460"/>
+            <a:off x="5332859" y="4908259"/>
             <a:ext cx="307611" cy="674915"/>
           </a:xfrm>
           <a:prstGeom prst="straightConnector1">
@@ -22564,7 +22059,7 @@
         </p:nvCxnSpPr>
         <p:spPr>
           <a:xfrm flipV="1">
-            <a:off x="4995402" y="5954655"/>
+            <a:off x="5332859" y="5497454"/>
             <a:ext cx="307611" cy="85720"/>
           </a:xfrm>
           <a:prstGeom prst="straightConnector1">
@@ -22607,7 +22102,7 @@
         </p:nvCxnSpPr>
         <p:spPr>
           <a:xfrm>
-            <a:off x="4995402" y="6040375"/>
+            <a:off x="5332859" y="5583174"/>
             <a:ext cx="297834" cy="515035"/>
           </a:xfrm>
           <a:prstGeom prst="straightConnector1">
@@ -22632,6 +22127,928 @@
           </a:fontRef>
         </p:style>
       </p:cxnSp>
+      <p:grpSp>
+        <p:nvGrpSpPr>
+          <p:cNvPr id="14" name="Group 13">
+            <a:extLst>
+              <a:ext uri="{FF2B5EF4-FFF2-40B4-BE49-F238E27FC236}">
+                <a16:creationId xmlns:a16="http://schemas.microsoft.com/office/drawing/2014/main" id="{9CCB475C-6B53-4361-AAC9-BC585FB2C6B6}"/>
+              </a:ext>
+            </a:extLst>
+          </p:cNvPr>
+          <p:cNvGrpSpPr/>
+          <p:nvPr/>
+        </p:nvGrpSpPr>
+        <p:grpSpPr>
+          <a:xfrm>
+            <a:off x="7946572" y="896606"/>
+            <a:ext cx="4049486" cy="4971399"/>
+            <a:chOff x="7946572" y="896606"/>
+            <a:chExt cx="4049486" cy="4971399"/>
+          </a:xfrm>
+        </p:grpSpPr>
+        <p:sp>
+          <p:nvSpPr>
+            <p:cNvPr id="5" name="Rectangle 4">
+              <a:extLst>
+                <a:ext uri="{FF2B5EF4-FFF2-40B4-BE49-F238E27FC236}">
+                  <a16:creationId xmlns:a16="http://schemas.microsoft.com/office/drawing/2014/main" id="{AFF2F74B-CF60-E84F-635F-BD5DE0A54B0C}"/>
+                </a:ext>
+              </a:extLst>
+            </p:cNvPr>
+            <p:cNvSpPr/>
+            <p:nvPr/>
+          </p:nvSpPr>
+          <p:spPr>
+            <a:xfrm>
+              <a:off x="7946572" y="896606"/>
+              <a:ext cx="2111828" cy="805543"/>
+            </a:xfrm>
+            <a:prstGeom prst="rect">
+              <a:avLst/>
+            </a:prstGeom>
+          </p:spPr>
+          <p:style>
+            <a:lnRef idx="2">
+              <a:schemeClr val="accent1">
+                <a:shade val="15000"/>
+              </a:schemeClr>
+            </a:lnRef>
+            <a:fillRef idx="1">
+              <a:schemeClr val="accent1"/>
+            </a:fillRef>
+            <a:effectRef idx="0">
+              <a:schemeClr val="accent1"/>
+            </a:effectRef>
+            <a:fontRef idx="minor">
+              <a:schemeClr val="lt1"/>
+            </a:fontRef>
+          </p:style>
+          <p:txBody>
+            <a:bodyPr rtlCol="0" anchor="ctr"/>
+            <a:lstStyle/>
+            <a:p>
+              <a:pPr algn="ctr"/>
+              <a:r>
+                <a:rPr lang="en-US" sz="1800" dirty="0">
+                  <a:solidFill>
+                    <a:schemeClr val="tx1"/>
+                  </a:solidFill>
+                </a:rPr>
+                <a:t>Training Set</a:t>
+              </a:r>
+            </a:p>
+          </p:txBody>
+        </p:sp>
+        <p:sp>
+          <p:nvSpPr>
+            <p:cNvPr id="6" name="Rectangle 5">
+              <a:extLst>
+                <a:ext uri="{FF2B5EF4-FFF2-40B4-BE49-F238E27FC236}">
+                  <a16:creationId xmlns:a16="http://schemas.microsoft.com/office/drawing/2014/main" id="{2A19A1EE-1186-0079-DB2D-C4B15FCFD26A}"/>
+                </a:ext>
+              </a:extLst>
+            </p:cNvPr>
+            <p:cNvSpPr/>
+            <p:nvPr/>
+          </p:nvSpPr>
+          <p:spPr>
+            <a:xfrm>
+              <a:off x="10319658" y="896606"/>
+              <a:ext cx="1676400" cy="805543"/>
+            </a:xfrm>
+            <a:prstGeom prst="rect">
+              <a:avLst/>
+            </a:prstGeom>
+            <a:solidFill>
+              <a:schemeClr val="accent5">
+                <a:lumMod val="40000"/>
+                <a:lumOff val="60000"/>
+              </a:schemeClr>
+            </a:solidFill>
+          </p:spPr>
+          <p:style>
+            <a:lnRef idx="2">
+              <a:schemeClr val="accent1">
+                <a:shade val="15000"/>
+              </a:schemeClr>
+            </a:lnRef>
+            <a:fillRef idx="1">
+              <a:schemeClr val="accent1"/>
+            </a:fillRef>
+            <a:effectRef idx="0">
+              <a:schemeClr val="accent1"/>
+            </a:effectRef>
+            <a:fontRef idx="minor">
+              <a:schemeClr val="lt1"/>
+            </a:fontRef>
+          </p:style>
+          <p:txBody>
+            <a:bodyPr rtlCol="0" anchor="ctr"/>
+            <a:lstStyle/>
+            <a:p>
+              <a:pPr algn="ctr"/>
+              <a:r>
+                <a:rPr lang="en-US" sz="1800" dirty="0">
+                  <a:solidFill>
+                    <a:schemeClr val="tx1"/>
+                  </a:solidFill>
+                </a:rPr>
+                <a:t>Validation Set</a:t>
+              </a:r>
+            </a:p>
+          </p:txBody>
+        </p:sp>
+        <p:sp>
+          <p:nvSpPr>
+            <p:cNvPr id="21" name="Rectangle 20">
+              <a:extLst>
+                <a:ext uri="{FF2B5EF4-FFF2-40B4-BE49-F238E27FC236}">
+                  <a16:creationId xmlns:a16="http://schemas.microsoft.com/office/drawing/2014/main" id="{9AAB26FD-A475-E8AA-10B0-0DBBA3101EDF}"/>
+                </a:ext>
+              </a:extLst>
+            </p:cNvPr>
+            <p:cNvSpPr/>
+            <p:nvPr/>
+          </p:nvSpPr>
+          <p:spPr>
+            <a:xfrm>
+              <a:off x="7946572" y="1858528"/>
+              <a:ext cx="2111828" cy="805543"/>
+            </a:xfrm>
+            <a:prstGeom prst="rect">
+              <a:avLst/>
+            </a:prstGeom>
+          </p:spPr>
+          <p:style>
+            <a:lnRef idx="2">
+              <a:schemeClr val="accent1">
+                <a:shade val="15000"/>
+              </a:schemeClr>
+            </a:lnRef>
+            <a:fillRef idx="1">
+              <a:schemeClr val="accent1"/>
+            </a:fillRef>
+            <a:effectRef idx="0">
+              <a:schemeClr val="accent1"/>
+            </a:effectRef>
+            <a:fontRef idx="minor">
+              <a:schemeClr val="lt1"/>
+            </a:fontRef>
+          </p:style>
+          <p:txBody>
+            <a:bodyPr rtlCol="0" anchor="ctr"/>
+            <a:lstStyle/>
+            <a:p>
+              <a:pPr algn="ctr"/>
+              <a:r>
+                <a:rPr lang="en-US" sz="1800" dirty="0">
+                  <a:solidFill>
+                    <a:schemeClr val="tx1"/>
+                  </a:solidFill>
+                </a:rPr>
+                <a:t>Training Set</a:t>
+              </a:r>
+            </a:p>
+          </p:txBody>
+        </p:sp>
+        <p:sp>
+          <p:nvSpPr>
+            <p:cNvPr id="22" name="Rectangle 21">
+              <a:extLst>
+                <a:ext uri="{FF2B5EF4-FFF2-40B4-BE49-F238E27FC236}">
+                  <a16:creationId xmlns:a16="http://schemas.microsoft.com/office/drawing/2014/main" id="{124B6BBC-4BA6-15DD-DD60-0CE5B9612663}"/>
+                </a:ext>
+              </a:extLst>
+            </p:cNvPr>
+            <p:cNvSpPr/>
+            <p:nvPr/>
+          </p:nvSpPr>
+          <p:spPr>
+            <a:xfrm>
+              <a:off x="10319658" y="1858528"/>
+              <a:ext cx="1676400" cy="805543"/>
+            </a:xfrm>
+            <a:prstGeom prst="rect">
+              <a:avLst/>
+            </a:prstGeom>
+            <a:solidFill>
+              <a:schemeClr val="accent5">
+                <a:lumMod val="40000"/>
+                <a:lumOff val="60000"/>
+              </a:schemeClr>
+            </a:solidFill>
+          </p:spPr>
+          <p:style>
+            <a:lnRef idx="2">
+              <a:schemeClr val="accent1">
+                <a:shade val="15000"/>
+              </a:schemeClr>
+            </a:lnRef>
+            <a:fillRef idx="1">
+              <a:schemeClr val="accent1"/>
+            </a:fillRef>
+            <a:effectRef idx="0">
+              <a:schemeClr val="accent1"/>
+            </a:effectRef>
+            <a:fontRef idx="minor">
+              <a:schemeClr val="lt1"/>
+            </a:fontRef>
+          </p:style>
+          <p:txBody>
+            <a:bodyPr rtlCol="0" anchor="ctr"/>
+            <a:lstStyle/>
+            <a:p>
+              <a:pPr algn="ctr"/>
+              <a:r>
+                <a:rPr lang="en-US" sz="1800" dirty="0">
+                  <a:solidFill>
+                    <a:schemeClr val="tx1"/>
+                  </a:solidFill>
+                </a:rPr>
+                <a:t>Validation Set</a:t>
+              </a:r>
+            </a:p>
+          </p:txBody>
+        </p:sp>
+        <p:sp>
+          <p:nvSpPr>
+            <p:cNvPr id="23" name="Rectangle 22">
+              <a:extLst>
+                <a:ext uri="{FF2B5EF4-FFF2-40B4-BE49-F238E27FC236}">
+                  <a16:creationId xmlns:a16="http://schemas.microsoft.com/office/drawing/2014/main" id="{CC34EE71-6AC0-874F-6325-272A983488CB}"/>
+                </a:ext>
+              </a:extLst>
+            </p:cNvPr>
+            <p:cNvSpPr/>
+            <p:nvPr/>
+          </p:nvSpPr>
+          <p:spPr>
+            <a:xfrm>
+              <a:off x="7946572" y="2937392"/>
+              <a:ext cx="2111828" cy="805543"/>
+            </a:xfrm>
+            <a:prstGeom prst="rect">
+              <a:avLst/>
+            </a:prstGeom>
+          </p:spPr>
+          <p:style>
+            <a:lnRef idx="2">
+              <a:schemeClr val="accent1">
+                <a:shade val="15000"/>
+              </a:schemeClr>
+            </a:lnRef>
+            <a:fillRef idx="1">
+              <a:schemeClr val="accent1"/>
+            </a:fillRef>
+            <a:effectRef idx="0">
+              <a:schemeClr val="accent1"/>
+            </a:effectRef>
+            <a:fontRef idx="minor">
+              <a:schemeClr val="lt1"/>
+            </a:fontRef>
+          </p:style>
+          <p:txBody>
+            <a:bodyPr rtlCol="0" anchor="ctr"/>
+            <a:lstStyle/>
+            <a:p>
+              <a:pPr algn="ctr"/>
+              <a:r>
+                <a:rPr lang="en-US" sz="1800" dirty="0">
+                  <a:solidFill>
+                    <a:schemeClr val="tx1"/>
+                  </a:solidFill>
+                </a:rPr>
+                <a:t>Training Set</a:t>
+              </a:r>
+            </a:p>
+          </p:txBody>
+        </p:sp>
+        <p:sp>
+          <p:nvSpPr>
+            <p:cNvPr id="24" name="Rectangle 23">
+              <a:extLst>
+                <a:ext uri="{FF2B5EF4-FFF2-40B4-BE49-F238E27FC236}">
+                  <a16:creationId xmlns:a16="http://schemas.microsoft.com/office/drawing/2014/main" id="{E123C0AB-44AD-1054-BCE7-255405B42537}"/>
+                </a:ext>
+              </a:extLst>
+            </p:cNvPr>
+            <p:cNvSpPr/>
+            <p:nvPr/>
+          </p:nvSpPr>
+          <p:spPr>
+            <a:xfrm>
+              <a:off x="10319658" y="2937392"/>
+              <a:ext cx="1676400" cy="805543"/>
+            </a:xfrm>
+            <a:prstGeom prst="rect">
+              <a:avLst/>
+            </a:prstGeom>
+            <a:solidFill>
+              <a:schemeClr val="accent5">
+                <a:lumMod val="40000"/>
+                <a:lumOff val="60000"/>
+              </a:schemeClr>
+            </a:solidFill>
+          </p:spPr>
+          <p:style>
+            <a:lnRef idx="2">
+              <a:schemeClr val="accent1">
+                <a:shade val="15000"/>
+              </a:schemeClr>
+            </a:lnRef>
+            <a:fillRef idx="1">
+              <a:schemeClr val="accent1"/>
+            </a:fillRef>
+            <a:effectRef idx="0">
+              <a:schemeClr val="accent1"/>
+            </a:effectRef>
+            <a:fontRef idx="minor">
+              <a:schemeClr val="lt1"/>
+            </a:fontRef>
+          </p:style>
+          <p:txBody>
+            <a:bodyPr rtlCol="0" anchor="ctr"/>
+            <a:lstStyle/>
+            <a:p>
+              <a:pPr algn="ctr"/>
+              <a:r>
+                <a:rPr lang="en-US" sz="1800" dirty="0">
+                  <a:solidFill>
+                    <a:schemeClr val="tx1"/>
+                  </a:solidFill>
+                </a:rPr>
+                <a:t>Validation Set</a:t>
+              </a:r>
+            </a:p>
+          </p:txBody>
+        </p:sp>
+        <p:sp>
+          <p:nvSpPr>
+            <p:cNvPr id="25" name="Rectangle 24">
+              <a:extLst>
+                <a:ext uri="{FF2B5EF4-FFF2-40B4-BE49-F238E27FC236}">
+                  <a16:creationId xmlns:a16="http://schemas.microsoft.com/office/drawing/2014/main" id="{1E98A609-018D-F4C1-36F6-811ED2D239CD}"/>
+                </a:ext>
+              </a:extLst>
+            </p:cNvPr>
+            <p:cNvSpPr/>
+            <p:nvPr/>
+          </p:nvSpPr>
+          <p:spPr>
+            <a:xfrm>
+              <a:off x="7946572" y="4016256"/>
+              <a:ext cx="2111828" cy="805543"/>
+            </a:xfrm>
+            <a:prstGeom prst="rect">
+              <a:avLst/>
+            </a:prstGeom>
+          </p:spPr>
+          <p:style>
+            <a:lnRef idx="2">
+              <a:schemeClr val="accent1">
+                <a:shade val="15000"/>
+              </a:schemeClr>
+            </a:lnRef>
+            <a:fillRef idx="1">
+              <a:schemeClr val="accent1"/>
+            </a:fillRef>
+            <a:effectRef idx="0">
+              <a:schemeClr val="accent1"/>
+            </a:effectRef>
+            <a:fontRef idx="minor">
+              <a:schemeClr val="lt1"/>
+            </a:fontRef>
+          </p:style>
+          <p:txBody>
+            <a:bodyPr rtlCol="0" anchor="ctr"/>
+            <a:lstStyle/>
+            <a:p>
+              <a:pPr algn="ctr"/>
+              <a:r>
+                <a:rPr lang="en-US" sz="1800" dirty="0">
+                  <a:solidFill>
+                    <a:schemeClr val="tx1"/>
+                  </a:solidFill>
+                </a:rPr>
+                <a:t>Training Set</a:t>
+              </a:r>
+            </a:p>
+          </p:txBody>
+        </p:sp>
+        <p:sp>
+          <p:nvSpPr>
+            <p:cNvPr id="26" name="Rectangle 25">
+              <a:extLst>
+                <a:ext uri="{FF2B5EF4-FFF2-40B4-BE49-F238E27FC236}">
+                  <a16:creationId xmlns:a16="http://schemas.microsoft.com/office/drawing/2014/main" id="{BDEA9797-07EA-7ABC-5D52-14E8A10D0768}"/>
+                </a:ext>
+              </a:extLst>
+            </p:cNvPr>
+            <p:cNvSpPr/>
+            <p:nvPr/>
+          </p:nvSpPr>
+          <p:spPr>
+            <a:xfrm>
+              <a:off x="10319658" y="4016256"/>
+              <a:ext cx="1676400" cy="805543"/>
+            </a:xfrm>
+            <a:prstGeom prst="rect">
+              <a:avLst/>
+            </a:prstGeom>
+            <a:solidFill>
+              <a:schemeClr val="accent5">
+                <a:lumMod val="40000"/>
+                <a:lumOff val="60000"/>
+              </a:schemeClr>
+            </a:solidFill>
+          </p:spPr>
+          <p:style>
+            <a:lnRef idx="2">
+              <a:schemeClr val="accent1">
+                <a:shade val="15000"/>
+              </a:schemeClr>
+            </a:lnRef>
+            <a:fillRef idx="1">
+              <a:schemeClr val="accent1"/>
+            </a:fillRef>
+            <a:effectRef idx="0">
+              <a:schemeClr val="accent1"/>
+            </a:effectRef>
+            <a:fontRef idx="minor">
+              <a:schemeClr val="lt1"/>
+            </a:fontRef>
+          </p:style>
+          <p:txBody>
+            <a:bodyPr rtlCol="0" anchor="ctr"/>
+            <a:lstStyle/>
+            <a:p>
+              <a:pPr algn="ctr"/>
+              <a:r>
+                <a:rPr lang="en-US" sz="1800" dirty="0">
+                  <a:solidFill>
+                    <a:schemeClr val="tx1"/>
+                  </a:solidFill>
+                </a:rPr>
+                <a:t>Validation Set</a:t>
+              </a:r>
+            </a:p>
+          </p:txBody>
+        </p:sp>
+        <p:sp>
+          <p:nvSpPr>
+            <p:cNvPr id="27" name="Rectangle 26">
+              <a:extLst>
+                <a:ext uri="{FF2B5EF4-FFF2-40B4-BE49-F238E27FC236}">
+                  <a16:creationId xmlns:a16="http://schemas.microsoft.com/office/drawing/2014/main" id="{EDF99B1A-DA21-D1A2-71A2-C7670949103A}"/>
+                </a:ext>
+              </a:extLst>
+            </p:cNvPr>
+            <p:cNvSpPr/>
+            <p:nvPr/>
+          </p:nvSpPr>
+          <p:spPr>
+            <a:xfrm>
+              <a:off x="7946572" y="5062462"/>
+              <a:ext cx="2111828" cy="805543"/>
+            </a:xfrm>
+            <a:prstGeom prst="rect">
+              <a:avLst/>
+            </a:prstGeom>
+          </p:spPr>
+          <p:style>
+            <a:lnRef idx="2">
+              <a:schemeClr val="accent1">
+                <a:shade val="15000"/>
+              </a:schemeClr>
+            </a:lnRef>
+            <a:fillRef idx="1">
+              <a:schemeClr val="accent1"/>
+            </a:fillRef>
+            <a:effectRef idx="0">
+              <a:schemeClr val="accent1"/>
+            </a:effectRef>
+            <a:fontRef idx="minor">
+              <a:schemeClr val="lt1"/>
+            </a:fontRef>
+          </p:style>
+          <p:txBody>
+            <a:bodyPr rtlCol="0" anchor="ctr"/>
+            <a:lstStyle/>
+            <a:p>
+              <a:pPr algn="ctr"/>
+              <a:r>
+                <a:rPr lang="en-US" sz="1800" dirty="0">
+                  <a:solidFill>
+                    <a:schemeClr val="tx1"/>
+                  </a:solidFill>
+                </a:rPr>
+                <a:t>Training Set</a:t>
+              </a:r>
+            </a:p>
+          </p:txBody>
+        </p:sp>
+        <p:sp>
+          <p:nvSpPr>
+            <p:cNvPr id="28" name="Rectangle 27">
+              <a:extLst>
+                <a:ext uri="{FF2B5EF4-FFF2-40B4-BE49-F238E27FC236}">
+                  <a16:creationId xmlns:a16="http://schemas.microsoft.com/office/drawing/2014/main" id="{FAAE4AA4-87FF-2BE0-244D-F33E917680C5}"/>
+                </a:ext>
+              </a:extLst>
+            </p:cNvPr>
+            <p:cNvSpPr/>
+            <p:nvPr/>
+          </p:nvSpPr>
+          <p:spPr>
+            <a:xfrm>
+              <a:off x="10319658" y="5062462"/>
+              <a:ext cx="1676400" cy="805543"/>
+            </a:xfrm>
+            <a:prstGeom prst="rect">
+              <a:avLst/>
+            </a:prstGeom>
+            <a:solidFill>
+              <a:schemeClr val="accent5">
+                <a:lumMod val="40000"/>
+                <a:lumOff val="60000"/>
+              </a:schemeClr>
+            </a:solidFill>
+          </p:spPr>
+          <p:style>
+            <a:lnRef idx="2">
+              <a:schemeClr val="accent1">
+                <a:shade val="15000"/>
+              </a:schemeClr>
+            </a:lnRef>
+            <a:fillRef idx="1">
+              <a:schemeClr val="accent1"/>
+            </a:fillRef>
+            <a:effectRef idx="0">
+              <a:schemeClr val="accent1"/>
+            </a:effectRef>
+            <a:fontRef idx="minor">
+              <a:schemeClr val="lt1"/>
+            </a:fontRef>
+          </p:style>
+          <p:txBody>
+            <a:bodyPr rtlCol="0" anchor="ctr"/>
+            <a:lstStyle/>
+            <a:p>
+              <a:pPr algn="ctr"/>
+              <a:r>
+                <a:rPr lang="en-US" sz="1800" dirty="0">
+                  <a:solidFill>
+                    <a:schemeClr val="tx1"/>
+                  </a:solidFill>
+                </a:rPr>
+                <a:t>Validation Set</a:t>
+              </a:r>
+            </a:p>
+          </p:txBody>
+        </p:sp>
+        <p:sp>
+          <p:nvSpPr>
+            <p:cNvPr id="9" name="TextBox 8">
+              <a:extLst>
+                <a:ext uri="{FF2B5EF4-FFF2-40B4-BE49-F238E27FC236}">
+                  <a16:creationId xmlns:a16="http://schemas.microsoft.com/office/drawing/2014/main" id="{6276EB92-70BB-9A0A-45AE-F9E0CF56EECC}"/>
+                </a:ext>
+              </a:extLst>
+            </p:cNvPr>
+            <p:cNvSpPr txBox="1"/>
+            <p:nvPr/>
+          </p:nvSpPr>
+          <p:spPr>
+            <a:xfrm>
+              <a:off x="10866752" y="896606"/>
+              <a:ext cx="582211" cy="307777"/>
+            </a:xfrm>
+            <a:prstGeom prst="rect">
+              <a:avLst/>
+            </a:prstGeom>
+            <a:noFill/>
+          </p:spPr>
+          <p:txBody>
+            <a:bodyPr wrap="none" rtlCol="0">
+              <a:spAutoFit/>
+            </a:bodyPr>
+            <a:lstStyle/>
+            <a:p>
+              <a:r>
+                <a:rPr lang="en-US" dirty="0"/>
+                <a:t>2020</a:t>
+              </a:r>
+            </a:p>
+          </p:txBody>
+        </p:sp>
+        <p:sp>
+          <p:nvSpPr>
+            <p:cNvPr id="10" name="TextBox 9">
+              <a:extLst>
+                <a:ext uri="{FF2B5EF4-FFF2-40B4-BE49-F238E27FC236}">
+                  <a16:creationId xmlns:a16="http://schemas.microsoft.com/office/drawing/2014/main" id="{819005B4-4984-5A71-4C3D-0F4AE6A5971B}"/>
+                </a:ext>
+              </a:extLst>
+            </p:cNvPr>
+            <p:cNvSpPr txBox="1"/>
+            <p:nvPr/>
+          </p:nvSpPr>
+          <p:spPr>
+            <a:xfrm>
+              <a:off x="10803909" y="1850878"/>
+              <a:ext cx="582211" cy="307777"/>
+            </a:xfrm>
+            <a:prstGeom prst="rect">
+              <a:avLst/>
+            </a:prstGeom>
+            <a:noFill/>
+          </p:spPr>
+          <p:txBody>
+            <a:bodyPr wrap="none" rtlCol="0">
+              <a:spAutoFit/>
+            </a:bodyPr>
+            <a:lstStyle/>
+            <a:p>
+              <a:r>
+                <a:rPr lang="en-US" dirty="0"/>
+                <a:t>2021</a:t>
+              </a:r>
+            </a:p>
+          </p:txBody>
+        </p:sp>
+        <p:sp>
+          <p:nvSpPr>
+            <p:cNvPr id="11" name="TextBox 10">
+              <a:extLst>
+                <a:ext uri="{FF2B5EF4-FFF2-40B4-BE49-F238E27FC236}">
+                  <a16:creationId xmlns:a16="http://schemas.microsoft.com/office/drawing/2014/main" id="{2B8C3DF5-5D7C-AE58-2F77-0776FAC4FF1E}"/>
+                </a:ext>
+              </a:extLst>
+            </p:cNvPr>
+            <p:cNvSpPr txBox="1"/>
+            <p:nvPr/>
+          </p:nvSpPr>
+          <p:spPr>
+            <a:xfrm>
+              <a:off x="10788305" y="2924447"/>
+              <a:ext cx="582211" cy="307777"/>
+            </a:xfrm>
+            <a:prstGeom prst="rect">
+              <a:avLst/>
+            </a:prstGeom>
+            <a:noFill/>
+          </p:spPr>
+          <p:txBody>
+            <a:bodyPr wrap="none" rtlCol="0">
+              <a:spAutoFit/>
+            </a:bodyPr>
+            <a:lstStyle/>
+            <a:p>
+              <a:r>
+                <a:rPr lang="en-US" dirty="0"/>
+                <a:t>2022</a:t>
+              </a:r>
+            </a:p>
+          </p:txBody>
+        </p:sp>
+        <p:sp>
+          <p:nvSpPr>
+            <p:cNvPr id="12" name="TextBox 11">
+              <a:extLst>
+                <a:ext uri="{FF2B5EF4-FFF2-40B4-BE49-F238E27FC236}">
+                  <a16:creationId xmlns:a16="http://schemas.microsoft.com/office/drawing/2014/main" id="{22708F55-E096-75FA-DE45-0F12C64F918E}"/>
+                </a:ext>
+              </a:extLst>
+            </p:cNvPr>
+            <p:cNvSpPr txBox="1"/>
+            <p:nvPr/>
+          </p:nvSpPr>
+          <p:spPr>
+            <a:xfrm>
+              <a:off x="10777082" y="3990869"/>
+              <a:ext cx="582211" cy="307777"/>
+            </a:xfrm>
+            <a:prstGeom prst="rect">
+              <a:avLst/>
+            </a:prstGeom>
+            <a:noFill/>
+          </p:spPr>
+          <p:txBody>
+            <a:bodyPr wrap="none" rtlCol="0">
+              <a:spAutoFit/>
+            </a:bodyPr>
+            <a:lstStyle/>
+            <a:p>
+              <a:r>
+                <a:rPr lang="en-US" dirty="0"/>
+                <a:t>2023</a:t>
+              </a:r>
+            </a:p>
+          </p:txBody>
+        </p:sp>
+        <p:sp>
+          <p:nvSpPr>
+            <p:cNvPr id="13" name="TextBox 12">
+              <a:extLst>
+                <a:ext uri="{FF2B5EF4-FFF2-40B4-BE49-F238E27FC236}">
+                  <a16:creationId xmlns:a16="http://schemas.microsoft.com/office/drawing/2014/main" id="{B4F34C63-924E-3150-F874-A05AD40484D7}"/>
+                </a:ext>
+              </a:extLst>
+            </p:cNvPr>
+            <p:cNvSpPr txBox="1"/>
+            <p:nvPr/>
+          </p:nvSpPr>
+          <p:spPr>
+            <a:xfrm>
+              <a:off x="10777081" y="5061264"/>
+              <a:ext cx="582211" cy="307777"/>
+            </a:xfrm>
+            <a:prstGeom prst="rect">
+              <a:avLst/>
+            </a:prstGeom>
+            <a:noFill/>
+          </p:spPr>
+          <p:txBody>
+            <a:bodyPr wrap="none" rtlCol="0">
+              <a:spAutoFit/>
+            </a:bodyPr>
+            <a:lstStyle/>
+            <a:p>
+              <a:r>
+                <a:rPr lang="en-US" dirty="0"/>
+                <a:t>2024</a:t>
+              </a:r>
+            </a:p>
+          </p:txBody>
+        </p:sp>
+      </p:grpSp>
+      <p:cxnSp>
+        <p:nvCxnSpPr>
+          <p:cNvPr id="36" name="Elbow Connector 35">
+            <a:extLst>
+              <a:ext uri="{FF2B5EF4-FFF2-40B4-BE49-F238E27FC236}">
+                <a16:creationId xmlns:a16="http://schemas.microsoft.com/office/drawing/2014/main" id="{F7C043DC-186F-4C44-55F8-AAE9D7EF4B01}"/>
+              </a:ext>
+            </a:extLst>
+          </p:cNvPr>
+          <p:cNvCxnSpPr>
+            <a:cxnSpLocks/>
+            <a:stCxn id="5" idx="0"/>
+            <a:endCxn id="30" idx="0"/>
+          </p:cNvCxnSpPr>
+          <p:nvPr/>
+        </p:nvCxnSpPr>
+        <p:spPr>
+          <a:xfrm rot="16200000" flipV="1">
+            <a:off x="7716761" y="-389119"/>
+            <a:ext cx="37328" cy="2534122"/>
+          </a:xfrm>
+          <a:prstGeom prst="curvedConnector3">
+            <a:avLst>
+              <a:gd name="adj1" fmla="val 1480203"/>
+            </a:avLst>
+          </a:prstGeom>
+          <a:ln w="76200">
+            <a:solidFill>
+              <a:schemeClr val="accent5"/>
+            </a:solidFill>
+            <a:tailEnd type="triangle"/>
+          </a:ln>
+        </p:spPr>
+        <p:style>
+          <a:lnRef idx="1">
+            <a:schemeClr val="accent1"/>
+          </a:lnRef>
+          <a:fillRef idx="0">
+            <a:schemeClr val="accent1"/>
+          </a:fillRef>
+          <a:effectRef idx="0">
+            <a:schemeClr val="accent1"/>
+          </a:effectRef>
+          <a:fontRef idx="minor">
+            <a:schemeClr val="tx1"/>
+          </a:fontRef>
+        </p:style>
+      </p:cxnSp>
+      <p:sp>
+        <p:nvSpPr>
+          <p:cNvPr id="43" name="TextBox 42">
+            <a:extLst>
+              <a:ext uri="{FF2B5EF4-FFF2-40B4-BE49-F238E27FC236}">
+                <a16:creationId xmlns:a16="http://schemas.microsoft.com/office/drawing/2014/main" id="{36EEFB98-23BF-8E7F-DF40-8BC2141F0F33}"/>
+              </a:ext>
+            </a:extLst>
+          </p:cNvPr>
+          <p:cNvSpPr txBox="1"/>
+          <p:nvPr/>
+        </p:nvSpPr>
+        <p:spPr>
+          <a:xfrm>
+            <a:off x="6901703" y="-32680"/>
+            <a:ext cx="1667444" cy="400110"/>
+          </a:xfrm>
+          <a:prstGeom prst="rect">
+            <a:avLst/>
+          </a:prstGeom>
+          <a:noFill/>
+        </p:spPr>
+        <p:txBody>
+          <a:bodyPr wrap="none" rtlCol="0">
+            <a:spAutoFit/>
+          </a:bodyPr>
+          <a:lstStyle/>
+          <a:p>
+            <a:r>
+              <a:rPr lang="en-US" sz="2000" dirty="0"/>
+              <a:t>Train models</a:t>
+            </a:r>
+          </a:p>
+        </p:txBody>
+      </p:sp>
+      <p:cxnSp>
+        <p:nvCxnSpPr>
+          <p:cNvPr id="51" name="Elbow Connector 35">
+            <a:extLst>
+              <a:ext uri="{FF2B5EF4-FFF2-40B4-BE49-F238E27FC236}">
+                <a16:creationId xmlns:a16="http://schemas.microsoft.com/office/drawing/2014/main" id="{05FEF792-CEFE-DE7B-8EA3-E1ADAF00BCD0}"/>
+              </a:ext>
+            </a:extLst>
+          </p:cNvPr>
+          <p:cNvCxnSpPr>
+            <a:cxnSpLocks/>
+            <a:stCxn id="65" idx="2"/>
+            <a:endCxn id="28" idx="2"/>
+          </p:cNvCxnSpPr>
+          <p:nvPr/>
+        </p:nvCxnSpPr>
+        <p:spPr>
+          <a:xfrm rot="5400000" flipH="1" flipV="1">
+            <a:off x="8534706" y="3747201"/>
+            <a:ext cx="502347" cy="4743955"/>
+          </a:xfrm>
+          <a:prstGeom prst="curvedConnector3">
+            <a:avLst>
+              <a:gd name="adj1" fmla="val -45506"/>
+            </a:avLst>
+          </a:prstGeom>
+          <a:ln w="76200">
+            <a:solidFill>
+              <a:schemeClr val="accent5"/>
+            </a:solidFill>
+            <a:tailEnd type="triangle"/>
+          </a:ln>
+        </p:spPr>
+        <p:style>
+          <a:lnRef idx="1">
+            <a:schemeClr val="accent1"/>
+          </a:lnRef>
+          <a:fillRef idx="0">
+            <a:schemeClr val="accent1"/>
+          </a:fillRef>
+          <a:effectRef idx="0">
+            <a:schemeClr val="accent1"/>
+          </a:effectRef>
+          <a:fontRef idx="minor">
+            <a:schemeClr val="tx1"/>
+          </a:fontRef>
+        </p:style>
+      </p:cxnSp>
+      <p:sp>
+        <p:nvSpPr>
+          <p:cNvPr id="53" name="TextBox 52">
+            <a:extLst>
+              <a:ext uri="{FF2B5EF4-FFF2-40B4-BE49-F238E27FC236}">
+                <a16:creationId xmlns:a16="http://schemas.microsoft.com/office/drawing/2014/main" id="{0EA69BF3-D2DF-50A7-2A6C-A7E53D9B2A5F}"/>
+              </a:ext>
+            </a:extLst>
+          </p:cNvPr>
+          <p:cNvSpPr txBox="1"/>
+          <p:nvPr/>
+        </p:nvSpPr>
+        <p:spPr>
+          <a:xfrm>
+            <a:off x="9794120" y="6531379"/>
+            <a:ext cx="982961" cy="400110"/>
+          </a:xfrm>
+          <a:prstGeom prst="rect">
+            <a:avLst/>
+          </a:prstGeom>
+          <a:noFill/>
+        </p:spPr>
+        <p:txBody>
+          <a:bodyPr wrap="none" rtlCol="0">
+            <a:spAutoFit/>
+          </a:bodyPr>
+          <a:lstStyle/>
+          <a:p>
+            <a:r>
+              <a:rPr lang="en-US" sz="2000" dirty="0"/>
+              <a:t>Predict</a:t>
+            </a:r>
+          </a:p>
+        </p:txBody>
+      </p:sp>
     </p:spTree>
     <p:extLst>
       <p:ext uri="{BB962C8B-B14F-4D97-AF65-F5344CB8AC3E}">
@@ -22642,10 +23059,1318 @@
   <p:clrMapOvr>
     <a:masterClrMapping/>
   </p:clrMapOvr>
+  <p:timing>
+    <p:tnLst>
+      <p:par>
+        <p:cTn id="1" dur="indefinite" restart="never" nodeType="tmRoot">
+          <p:childTnLst>
+            <p:seq concurrent="1" nextAc="seek">
+              <p:cTn id="2" dur="indefinite" nodeType="mainSeq">
+                <p:childTnLst>
+                  <p:par>
+                    <p:cTn id="3" fill="hold">
+                      <p:stCondLst>
+                        <p:cond delay="indefinite"/>
+                      </p:stCondLst>
+                      <p:childTnLst>
+                        <p:par>
+                          <p:cTn id="4" fill="hold">
+                            <p:stCondLst>
+                              <p:cond delay="0"/>
+                            </p:stCondLst>
+                            <p:childTnLst>
+                              <p:par>
+                                <p:cTn id="5" presetID="1" presetClass="entr" presetSubtype="0" fill="hold" grpId="0" nodeType="clickEffect">
+                                  <p:stCondLst>
+                                    <p:cond delay="0"/>
+                                  </p:stCondLst>
+                                  <p:childTnLst>
+                                    <p:set>
+                                      <p:cBhvr>
+                                        <p:cTn id="6" dur="1" fill="hold">
+                                          <p:stCondLst>
+                                            <p:cond delay="0"/>
+                                          </p:stCondLst>
+                                        </p:cTn>
+                                        <p:tgtEl>
+                                          <p:spTgt spid="4">
+                                            <p:txEl>
+                                              <p:pRg st="0" end="0"/>
+                                            </p:txEl>
+                                          </p:spTgt>
+                                        </p:tgtEl>
+                                        <p:attrNameLst>
+                                          <p:attrName>style.visibility</p:attrName>
+                                        </p:attrNameLst>
+                                      </p:cBhvr>
+                                      <p:to>
+                                        <p:strVal val="visible"/>
+                                      </p:to>
+                                    </p:set>
+                                  </p:childTnLst>
+                                </p:cTn>
+                              </p:par>
+                            </p:childTnLst>
+                          </p:cTn>
+                        </p:par>
+                      </p:childTnLst>
+                    </p:cTn>
+                  </p:par>
+                  <p:par>
+                    <p:cTn id="7" fill="hold">
+                      <p:stCondLst>
+                        <p:cond delay="indefinite"/>
+                      </p:stCondLst>
+                      <p:childTnLst>
+                        <p:par>
+                          <p:cTn id="8" fill="hold">
+                            <p:stCondLst>
+                              <p:cond delay="0"/>
+                            </p:stCondLst>
+                            <p:childTnLst>
+                              <p:par>
+                                <p:cTn id="9" presetID="1" presetClass="entr" presetSubtype="0" fill="hold" grpId="0" nodeType="clickEffect">
+                                  <p:stCondLst>
+                                    <p:cond delay="0"/>
+                                  </p:stCondLst>
+                                  <p:childTnLst>
+                                    <p:set>
+                                      <p:cBhvr>
+                                        <p:cTn id="10" dur="1" fill="hold">
+                                          <p:stCondLst>
+                                            <p:cond delay="0"/>
+                                          </p:stCondLst>
+                                        </p:cTn>
+                                        <p:tgtEl>
+                                          <p:spTgt spid="4">
+                                            <p:txEl>
+                                              <p:pRg st="1" end="1"/>
+                                            </p:txEl>
+                                          </p:spTgt>
+                                        </p:tgtEl>
+                                        <p:attrNameLst>
+                                          <p:attrName>style.visibility</p:attrName>
+                                        </p:attrNameLst>
+                                      </p:cBhvr>
+                                      <p:to>
+                                        <p:strVal val="visible"/>
+                                      </p:to>
+                                    </p:set>
+                                  </p:childTnLst>
+                                </p:cTn>
+                              </p:par>
+                            </p:childTnLst>
+                          </p:cTn>
+                        </p:par>
+                      </p:childTnLst>
+                    </p:cTn>
+                  </p:par>
+                  <p:par>
+                    <p:cTn id="11" fill="hold">
+                      <p:stCondLst>
+                        <p:cond delay="indefinite"/>
+                      </p:stCondLst>
+                      <p:childTnLst>
+                        <p:par>
+                          <p:cTn id="12" fill="hold">
+                            <p:stCondLst>
+                              <p:cond delay="0"/>
+                            </p:stCondLst>
+                            <p:childTnLst>
+                              <p:par>
+                                <p:cTn id="13" presetID="1" presetClass="entr" presetSubtype="0" fill="hold" grpId="0" nodeType="clickEffect">
+                                  <p:stCondLst>
+                                    <p:cond delay="0"/>
+                                  </p:stCondLst>
+                                  <p:childTnLst>
+                                    <p:set>
+                                      <p:cBhvr>
+                                        <p:cTn id="14" dur="1" fill="hold">
+                                          <p:stCondLst>
+                                            <p:cond delay="0"/>
+                                          </p:stCondLst>
+                                        </p:cTn>
+                                        <p:tgtEl>
+                                          <p:spTgt spid="4">
+                                            <p:txEl>
+                                              <p:pRg st="2" end="2"/>
+                                            </p:txEl>
+                                          </p:spTgt>
+                                        </p:tgtEl>
+                                        <p:attrNameLst>
+                                          <p:attrName>style.visibility</p:attrName>
+                                        </p:attrNameLst>
+                                      </p:cBhvr>
+                                      <p:to>
+                                        <p:strVal val="visible"/>
+                                      </p:to>
+                                    </p:set>
+                                  </p:childTnLst>
+                                </p:cTn>
+                              </p:par>
+                            </p:childTnLst>
+                          </p:cTn>
+                        </p:par>
+                      </p:childTnLst>
+                    </p:cTn>
+                  </p:par>
+                  <p:par>
+                    <p:cTn id="15" fill="hold">
+                      <p:stCondLst>
+                        <p:cond delay="indefinite"/>
+                      </p:stCondLst>
+                      <p:childTnLst>
+                        <p:par>
+                          <p:cTn id="16" fill="hold">
+                            <p:stCondLst>
+                              <p:cond delay="0"/>
+                            </p:stCondLst>
+                            <p:childTnLst>
+                              <p:par>
+                                <p:cTn id="17" presetID="1" presetClass="entr" presetSubtype="0" fill="hold" nodeType="clickEffect">
+                                  <p:stCondLst>
+                                    <p:cond delay="0"/>
+                                  </p:stCondLst>
+                                  <p:childTnLst>
+                                    <p:set>
+                                      <p:cBhvr>
+                                        <p:cTn id="18" dur="1" fill="hold">
+                                          <p:stCondLst>
+                                            <p:cond delay="0"/>
+                                          </p:stCondLst>
+                                        </p:cTn>
+                                        <p:tgtEl>
+                                          <p:spTgt spid="14"/>
+                                        </p:tgtEl>
+                                        <p:attrNameLst>
+                                          <p:attrName>style.visibility</p:attrName>
+                                        </p:attrNameLst>
+                                      </p:cBhvr>
+                                      <p:to>
+                                        <p:strVal val="visible"/>
+                                      </p:to>
+                                    </p:set>
+                                  </p:childTnLst>
+                                </p:cTn>
+                              </p:par>
+                            </p:childTnLst>
+                          </p:cTn>
+                        </p:par>
+                      </p:childTnLst>
+                    </p:cTn>
+                  </p:par>
+                  <p:par>
+                    <p:cTn id="19" fill="hold">
+                      <p:stCondLst>
+                        <p:cond delay="indefinite"/>
+                      </p:stCondLst>
+                      <p:childTnLst>
+                        <p:par>
+                          <p:cTn id="20" fill="hold">
+                            <p:stCondLst>
+                              <p:cond delay="0"/>
+                            </p:stCondLst>
+                            <p:childTnLst>
+                              <p:par>
+                                <p:cTn id="21" presetID="1" presetClass="entr" presetSubtype="0" fill="hold" grpId="0" nodeType="clickEffect">
+                                  <p:stCondLst>
+                                    <p:cond delay="0"/>
+                                  </p:stCondLst>
+                                  <p:childTnLst>
+                                    <p:set>
+                                      <p:cBhvr>
+                                        <p:cTn id="22" dur="1" fill="hold">
+                                          <p:stCondLst>
+                                            <p:cond delay="0"/>
+                                          </p:stCondLst>
+                                        </p:cTn>
+                                        <p:tgtEl>
+                                          <p:spTgt spid="29"/>
+                                        </p:tgtEl>
+                                        <p:attrNameLst>
+                                          <p:attrName>style.visibility</p:attrName>
+                                        </p:attrNameLst>
+                                      </p:cBhvr>
+                                      <p:to>
+                                        <p:strVal val="visible"/>
+                                      </p:to>
+                                    </p:set>
+                                  </p:childTnLst>
+                                </p:cTn>
+                              </p:par>
+                              <p:par>
+                                <p:cTn id="23" presetID="1" presetClass="entr" presetSubtype="0" fill="hold" grpId="0" nodeType="withEffect">
+                                  <p:stCondLst>
+                                    <p:cond delay="0"/>
+                                  </p:stCondLst>
+                                  <p:childTnLst>
+                                    <p:set>
+                                      <p:cBhvr>
+                                        <p:cTn id="24" dur="1" fill="hold">
+                                          <p:stCondLst>
+                                            <p:cond delay="0"/>
+                                          </p:stCondLst>
+                                        </p:cTn>
+                                        <p:tgtEl>
+                                          <p:spTgt spid="30"/>
+                                        </p:tgtEl>
+                                        <p:attrNameLst>
+                                          <p:attrName>style.visibility</p:attrName>
+                                        </p:attrNameLst>
+                                      </p:cBhvr>
+                                      <p:to>
+                                        <p:strVal val="visible"/>
+                                      </p:to>
+                                    </p:set>
+                                  </p:childTnLst>
+                                </p:cTn>
+                              </p:par>
+                              <p:par>
+                                <p:cTn id="25" presetID="1" presetClass="entr" presetSubtype="0" fill="hold" grpId="0" nodeType="withEffect">
+                                  <p:stCondLst>
+                                    <p:cond delay="0"/>
+                                  </p:stCondLst>
+                                  <p:childTnLst>
+                                    <p:set>
+                                      <p:cBhvr>
+                                        <p:cTn id="26" dur="1" fill="hold">
+                                          <p:stCondLst>
+                                            <p:cond delay="0"/>
+                                          </p:stCondLst>
+                                        </p:cTn>
+                                        <p:tgtEl>
+                                          <p:spTgt spid="45"/>
+                                        </p:tgtEl>
+                                        <p:attrNameLst>
+                                          <p:attrName>style.visibility</p:attrName>
+                                        </p:attrNameLst>
+                                      </p:cBhvr>
+                                      <p:to>
+                                        <p:strVal val="visible"/>
+                                      </p:to>
+                                    </p:set>
+                                  </p:childTnLst>
+                                </p:cTn>
+                              </p:par>
+                              <p:par>
+                                <p:cTn id="27" presetID="1" presetClass="entr" presetSubtype="0" fill="hold" grpId="0" nodeType="withEffect">
+                                  <p:stCondLst>
+                                    <p:cond delay="0"/>
+                                  </p:stCondLst>
+                                  <p:childTnLst>
+                                    <p:set>
+                                      <p:cBhvr>
+                                        <p:cTn id="28" dur="1" fill="hold">
+                                          <p:stCondLst>
+                                            <p:cond delay="0"/>
+                                          </p:stCondLst>
+                                        </p:cTn>
+                                        <p:tgtEl>
+                                          <p:spTgt spid="46"/>
+                                        </p:tgtEl>
+                                        <p:attrNameLst>
+                                          <p:attrName>style.visibility</p:attrName>
+                                        </p:attrNameLst>
+                                      </p:cBhvr>
+                                      <p:to>
+                                        <p:strVal val="visible"/>
+                                      </p:to>
+                                    </p:set>
+                                  </p:childTnLst>
+                                </p:cTn>
+                              </p:par>
+                              <p:par>
+                                <p:cTn id="29" presetID="1" presetClass="entr" presetSubtype="0" fill="hold" nodeType="withEffect">
+                                  <p:stCondLst>
+                                    <p:cond delay="0"/>
+                                  </p:stCondLst>
+                                  <p:childTnLst>
+                                    <p:set>
+                                      <p:cBhvr>
+                                        <p:cTn id="30" dur="1" fill="hold">
+                                          <p:stCondLst>
+                                            <p:cond delay="0"/>
+                                          </p:stCondLst>
+                                        </p:cTn>
+                                        <p:tgtEl>
+                                          <p:spTgt spid="48"/>
+                                        </p:tgtEl>
+                                        <p:attrNameLst>
+                                          <p:attrName>style.visibility</p:attrName>
+                                        </p:attrNameLst>
+                                      </p:cBhvr>
+                                      <p:to>
+                                        <p:strVal val="visible"/>
+                                      </p:to>
+                                    </p:set>
+                                  </p:childTnLst>
+                                </p:cTn>
+                              </p:par>
+                              <p:par>
+                                <p:cTn id="31" presetID="1" presetClass="entr" presetSubtype="0" fill="hold" nodeType="withEffect">
+                                  <p:stCondLst>
+                                    <p:cond delay="0"/>
+                                  </p:stCondLst>
+                                  <p:childTnLst>
+                                    <p:set>
+                                      <p:cBhvr>
+                                        <p:cTn id="32" dur="1" fill="hold">
+                                          <p:stCondLst>
+                                            <p:cond delay="0"/>
+                                          </p:stCondLst>
+                                        </p:cTn>
+                                        <p:tgtEl>
+                                          <p:spTgt spid="49"/>
+                                        </p:tgtEl>
+                                        <p:attrNameLst>
+                                          <p:attrName>style.visibility</p:attrName>
+                                        </p:attrNameLst>
+                                      </p:cBhvr>
+                                      <p:to>
+                                        <p:strVal val="visible"/>
+                                      </p:to>
+                                    </p:set>
+                                  </p:childTnLst>
+                                </p:cTn>
+                              </p:par>
+                              <p:par>
+                                <p:cTn id="33" presetID="1" presetClass="entr" presetSubtype="0" fill="hold" nodeType="withEffect">
+                                  <p:stCondLst>
+                                    <p:cond delay="0"/>
+                                  </p:stCondLst>
+                                  <p:childTnLst>
+                                    <p:set>
+                                      <p:cBhvr>
+                                        <p:cTn id="34" dur="1" fill="hold">
+                                          <p:stCondLst>
+                                            <p:cond delay="0"/>
+                                          </p:stCondLst>
+                                        </p:cTn>
+                                        <p:tgtEl>
+                                          <p:spTgt spid="52"/>
+                                        </p:tgtEl>
+                                        <p:attrNameLst>
+                                          <p:attrName>style.visibility</p:attrName>
+                                        </p:attrNameLst>
+                                      </p:cBhvr>
+                                      <p:to>
+                                        <p:strVal val="visible"/>
+                                      </p:to>
+                                    </p:set>
+                                  </p:childTnLst>
+                                </p:cTn>
+                              </p:par>
+                              <p:par>
+                                <p:cTn id="35" presetID="1" presetClass="entr" presetSubtype="0" fill="hold" grpId="0" nodeType="withEffect">
+                                  <p:stCondLst>
+                                    <p:cond delay="0"/>
+                                  </p:stCondLst>
+                                  <p:childTnLst>
+                                    <p:set>
+                                      <p:cBhvr>
+                                        <p:cTn id="36" dur="1" fill="hold">
+                                          <p:stCondLst>
+                                            <p:cond delay="0"/>
+                                          </p:stCondLst>
+                                        </p:cTn>
+                                        <p:tgtEl>
+                                          <p:spTgt spid="55"/>
+                                        </p:tgtEl>
+                                        <p:attrNameLst>
+                                          <p:attrName>style.visibility</p:attrName>
+                                        </p:attrNameLst>
+                                      </p:cBhvr>
+                                      <p:to>
+                                        <p:strVal val="visible"/>
+                                      </p:to>
+                                    </p:set>
+                                  </p:childTnLst>
+                                </p:cTn>
+                              </p:par>
+                              <p:par>
+                                <p:cTn id="37" presetID="1" presetClass="entr" presetSubtype="0" fill="hold" grpId="0" nodeType="withEffect">
+                                  <p:stCondLst>
+                                    <p:cond delay="0"/>
+                                  </p:stCondLst>
+                                  <p:childTnLst>
+                                    <p:set>
+                                      <p:cBhvr>
+                                        <p:cTn id="38" dur="1" fill="hold">
+                                          <p:stCondLst>
+                                            <p:cond delay="0"/>
+                                          </p:stCondLst>
+                                        </p:cTn>
+                                        <p:tgtEl>
+                                          <p:spTgt spid="56"/>
+                                        </p:tgtEl>
+                                        <p:attrNameLst>
+                                          <p:attrName>style.visibility</p:attrName>
+                                        </p:attrNameLst>
+                                      </p:cBhvr>
+                                      <p:to>
+                                        <p:strVal val="visible"/>
+                                      </p:to>
+                                    </p:set>
+                                  </p:childTnLst>
+                                </p:cTn>
+                              </p:par>
+                              <p:par>
+                                <p:cTn id="39" presetID="1" presetClass="entr" presetSubtype="0" fill="hold" grpId="0" nodeType="withEffect">
+                                  <p:stCondLst>
+                                    <p:cond delay="0"/>
+                                  </p:stCondLst>
+                                  <p:childTnLst>
+                                    <p:set>
+                                      <p:cBhvr>
+                                        <p:cTn id="40" dur="1" fill="hold">
+                                          <p:stCondLst>
+                                            <p:cond delay="0"/>
+                                          </p:stCondLst>
+                                        </p:cTn>
+                                        <p:tgtEl>
+                                          <p:spTgt spid="57"/>
+                                        </p:tgtEl>
+                                        <p:attrNameLst>
+                                          <p:attrName>style.visibility</p:attrName>
+                                        </p:attrNameLst>
+                                      </p:cBhvr>
+                                      <p:to>
+                                        <p:strVal val="visible"/>
+                                      </p:to>
+                                    </p:set>
+                                  </p:childTnLst>
+                                </p:cTn>
+                              </p:par>
+                              <p:par>
+                                <p:cTn id="41" presetID="1" presetClass="entr" presetSubtype="0" fill="hold" grpId="0" nodeType="withEffect">
+                                  <p:stCondLst>
+                                    <p:cond delay="0"/>
+                                  </p:stCondLst>
+                                  <p:childTnLst>
+                                    <p:set>
+                                      <p:cBhvr>
+                                        <p:cTn id="42" dur="1" fill="hold">
+                                          <p:stCondLst>
+                                            <p:cond delay="0"/>
+                                          </p:stCondLst>
+                                        </p:cTn>
+                                        <p:tgtEl>
+                                          <p:spTgt spid="58"/>
+                                        </p:tgtEl>
+                                        <p:attrNameLst>
+                                          <p:attrName>style.visibility</p:attrName>
+                                        </p:attrNameLst>
+                                      </p:cBhvr>
+                                      <p:to>
+                                        <p:strVal val="visible"/>
+                                      </p:to>
+                                    </p:set>
+                                  </p:childTnLst>
+                                </p:cTn>
+                              </p:par>
+                              <p:par>
+                                <p:cTn id="43" presetID="1" presetClass="entr" presetSubtype="0" fill="hold" nodeType="withEffect">
+                                  <p:stCondLst>
+                                    <p:cond delay="0"/>
+                                  </p:stCondLst>
+                                  <p:childTnLst>
+                                    <p:set>
+                                      <p:cBhvr>
+                                        <p:cTn id="44" dur="1" fill="hold">
+                                          <p:stCondLst>
+                                            <p:cond delay="0"/>
+                                          </p:stCondLst>
+                                        </p:cTn>
+                                        <p:tgtEl>
+                                          <p:spTgt spid="59"/>
+                                        </p:tgtEl>
+                                        <p:attrNameLst>
+                                          <p:attrName>style.visibility</p:attrName>
+                                        </p:attrNameLst>
+                                      </p:cBhvr>
+                                      <p:to>
+                                        <p:strVal val="visible"/>
+                                      </p:to>
+                                    </p:set>
+                                  </p:childTnLst>
+                                </p:cTn>
+                              </p:par>
+                              <p:par>
+                                <p:cTn id="45" presetID="1" presetClass="entr" presetSubtype="0" fill="hold" nodeType="withEffect">
+                                  <p:stCondLst>
+                                    <p:cond delay="0"/>
+                                  </p:stCondLst>
+                                  <p:childTnLst>
+                                    <p:set>
+                                      <p:cBhvr>
+                                        <p:cTn id="46" dur="1" fill="hold">
+                                          <p:stCondLst>
+                                            <p:cond delay="0"/>
+                                          </p:stCondLst>
+                                        </p:cTn>
+                                        <p:tgtEl>
+                                          <p:spTgt spid="60"/>
+                                        </p:tgtEl>
+                                        <p:attrNameLst>
+                                          <p:attrName>style.visibility</p:attrName>
+                                        </p:attrNameLst>
+                                      </p:cBhvr>
+                                      <p:to>
+                                        <p:strVal val="visible"/>
+                                      </p:to>
+                                    </p:set>
+                                  </p:childTnLst>
+                                </p:cTn>
+                              </p:par>
+                              <p:par>
+                                <p:cTn id="47" presetID="1" presetClass="entr" presetSubtype="0" fill="hold" nodeType="withEffect">
+                                  <p:stCondLst>
+                                    <p:cond delay="0"/>
+                                  </p:stCondLst>
+                                  <p:childTnLst>
+                                    <p:set>
+                                      <p:cBhvr>
+                                        <p:cTn id="48" dur="1" fill="hold">
+                                          <p:stCondLst>
+                                            <p:cond delay="0"/>
+                                          </p:stCondLst>
+                                        </p:cTn>
+                                        <p:tgtEl>
+                                          <p:spTgt spid="61"/>
+                                        </p:tgtEl>
+                                        <p:attrNameLst>
+                                          <p:attrName>style.visibility</p:attrName>
+                                        </p:attrNameLst>
+                                      </p:cBhvr>
+                                      <p:to>
+                                        <p:strVal val="visible"/>
+                                      </p:to>
+                                    </p:set>
+                                  </p:childTnLst>
+                                </p:cTn>
+                              </p:par>
+                              <p:par>
+                                <p:cTn id="49" presetID="1" presetClass="entr" presetSubtype="0" fill="hold" grpId="0" nodeType="withEffect">
+                                  <p:stCondLst>
+                                    <p:cond delay="0"/>
+                                  </p:stCondLst>
+                                  <p:childTnLst>
+                                    <p:set>
+                                      <p:cBhvr>
+                                        <p:cTn id="50" dur="1" fill="hold">
+                                          <p:stCondLst>
+                                            <p:cond delay="0"/>
+                                          </p:stCondLst>
+                                        </p:cTn>
+                                        <p:tgtEl>
+                                          <p:spTgt spid="62"/>
+                                        </p:tgtEl>
+                                        <p:attrNameLst>
+                                          <p:attrName>style.visibility</p:attrName>
+                                        </p:attrNameLst>
+                                      </p:cBhvr>
+                                      <p:to>
+                                        <p:strVal val="visible"/>
+                                      </p:to>
+                                    </p:set>
+                                  </p:childTnLst>
+                                </p:cTn>
+                              </p:par>
+                              <p:par>
+                                <p:cTn id="51" presetID="1" presetClass="entr" presetSubtype="0" fill="hold" grpId="0" nodeType="withEffect">
+                                  <p:stCondLst>
+                                    <p:cond delay="0"/>
+                                  </p:stCondLst>
+                                  <p:childTnLst>
+                                    <p:set>
+                                      <p:cBhvr>
+                                        <p:cTn id="52" dur="1" fill="hold">
+                                          <p:stCondLst>
+                                            <p:cond delay="0"/>
+                                          </p:stCondLst>
+                                        </p:cTn>
+                                        <p:tgtEl>
+                                          <p:spTgt spid="63"/>
+                                        </p:tgtEl>
+                                        <p:attrNameLst>
+                                          <p:attrName>style.visibility</p:attrName>
+                                        </p:attrNameLst>
+                                      </p:cBhvr>
+                                      <p:to>
+                                        <p:strVal val="visible"/>
+                                      </p:to>
+                                    </p:set>
+                                  </p:childTnLst>
+                                </p:cTn>
+                              </p:par>
+                              <p:par>
+                                <p:cTn id="53" presetID="1" presetClass="entr" presetSubtype="0" fill="hold" grpId="0" nodeType="withEffect">
+                                  <p:stCondLst>
+                                    <p:cond delay="0"/>
+                                  </p:stCondLst>
+                                  <p:childTnLst>
+                                    <p:set>
+                                      <p:cBhvr>
+                                        <p:cTn id="54" dur="1" fill="hold">
+                                          <p:stCondLst>
+                                            <p:cond delay="0"/>
+                                          </p:stCondLst>
+                                        </p:cTn>
+                                        <p:tgtEl>
+                                          <p:spTgt spid="64"/>
+                                        </p:tgtEl>
+                                        <p:attrNameLst>
+                                          <p:attrName>style.visibility</p:attrName>
+                                        </p:attrNameLst>
+                                      </p:cBhvr>
+                                      <p:to>
+                                        <p:strVal val="visible"/>
+                                      </p:to>
+                                    </p:set>
+                                  </p:childTnLst>
+                                </p:cTn>
+                              </p:par>
+                              <p:par>
+                                <p:cTn id="55" presetID="1" presetClass="entr" presetSubtype="0" fill="hold" grpId="0" nodeType="withEffect">
+                                  <p:stCondLst>
+                                    <p:cond delay="0"/>
+                                  </p:stCondLst>
+                                  <p:childTnLst>
+                                    <p:set>
+                                      <p:cBhvr>
+                                        <p:cTn id="56" dur="1" fill="hold">
+                                          <p:stCondLst>
+                                            <p:cond delay="0"/>
+                                          </p:stCondLst>
+                                        </p:cTn>
+                                        <p:tgtEl>
+                                          <p:spTgt spid="65"/>
+                                        </p:tgtEl>
+                                        <p:attrNameLst>
+                                          <p:attrName>style.visibility</p:attrName>
+                                        </p:attrNameLst>
+                                      </p:cBhvr>
+                                      <p:to>
+                                        <p:strVal val="visible"/>
+                                      </p:to>
+                                    </p:set>
+                                  </p:childTnLst>
+                                </p:cTn>
+                              </p:par>
+                              <p:par>
+                                <p:cTn id="57" presetID="1" presetClass="entr" presetSubtype="0" fill="hold" nodeType="withEffect">
+                                  <p:stCondLst>
+                                    <p:cond delay="0"/>
+                                  </p:stCondLst>
+                                  <p:childTnLst>
+                                    <p:set>
+                                      <p:cBhvr>
+                                        <p:cTn id="58" dur="1" fill="hold">
+                                          <p:stCondLst>
+                                            <p:cond delay="0"/>
+                                          </p:stCondLst>
+                                        </p:cTn>
+                                        <p:tgtEl>
+                                          <p:spTgt spid="66"/>
+                                        </p:tgtEl>
+                                        <p:attrNameLst>
+                                          <p:attrName>style.visibility</p:attrName>
+                                        </p:attrNameLst>
+                                      </p:cBhvr>
+                                      <p:to>
+                                        <p:strVal val="visible"/>
+                                      </p:to>
+                                    </p:set>
+                                  </p:childTnLst>
+                                </p:cTn>
+                              </p:par>
+                              <p:par>
+                                <p:cTn id="59" presetID="1" presetClass="entr" presetSubtype="0" fill="hold" nodeType="withEffect">
+                                  <p:stCondLst>
+                                    <p:cond delay="0"/>
+                                  </p:stCondLst>
+                                  <p:childTnLst>
+                                    <p:set>
+                                      <p:cBhvr>
+                                        <p:cTn id="60" dur="1" fill="hold">
+                                          <p:stCondLst>
+                                            <p:cond delay="0"/>
+                                          </p:stCondLst>
+                                        </p:cTn>
+                                        <p:tgtEl>
+                                          <p:spTgt spid="67"/>
+                                        </p:tgtEl>
+                                        <p:attrNameLst>
+                                          <p:attrName>style.visibility</p:attrName>
+                                        </p:attrNameLst>
+                                      </p:cBhvr>
+                                      <p:to>
+                                        <p:strVal val="visible"/>
+                                      </p:to>
+                                    </p:set>
+                                  </p:childTnLst>
+                                </p:cTn>
+                              </p:par>
+                              <p:par>
+                                <p:cTn id="61" presetID="1" presetClass="entr" presetSubtype="0" fill="hold" nodeType="withEffect">
+                                  <p:stCondLst>
+                                    <p:cond delay="0"/>
+                                  </p:stCondLst>
+                                  <p:childTnLst>
+                                    <p:set>
+                                      <p:cBhvr>
+                                        <p:cTn id="62" dur="1" fill="hold">
+                                          <p:stCondLst>
+                                            <p:cond delay="0"/>
+                                          </p:stCondLst>
+                                        </p:cTn>
+                                        <p:tgtEl>
+                                          <p:spTgt spid="68"/>
+                                        </p:tgtEl>
+                                        <p:attrNameLst>
+                                          <p:attrName>style.visibility</p:attrName>
+                                        </p:attrNameLst>
+                                      </p:cBhvr>
+                                      <p:to>
+                                        <p:strVal val="visible"/>
+                                      </p:to>
+                                    </p:set>
+                                  </p:childTnLst>
+                                </p:cTn>
+                              </p:par>
+                            </p:childTnLst>
+                          </p:cTn>
+                        </p:par>
+                      </p:childTnLst>
+                    </p:cTn>
+                  </p:par>
+                  <p:par>
+                    <p:cTn id="63" fill="hold">
+                      <p:stCondLst>
+                        <p:cond delay="indefinite"/>
+                      </p:stCondLst>
+                      <p:childTnLst>
+                        <p:par>
+                          <p:cTn id="64" fill="hold">
+                            <p:stCondLst>
+                              <p:cond delay="0"/>
+                            </p:stCondLst>
+                            <p:childTnLst>
+                              <p:par>
+                                <p:cTn id="65" presetID="1" presetClass="entr" presetSubtype="0" fill="hold" grpId="0" nodeType="clickEffect">
+                                  <p:stCondLst>
+                                    <p:cond delay="0"/>
+                                  </p:stCondLst>
+                                  <p:childTnLst>
+                                    <p:set>
+                                      <p:cBhvr>
+                                        <p:cTn id="66" dur="1" fill="hold">
+                                          <p:stCondLst>
+                                            <p:cond delay="0"/>
+                                          </p:stCondLst>
+                                        </p:cTn>
+                                        <p:tgtEl>
+                                          <p:spTgt spid="43"/>
+                                        </p:tgtEl>
+                                        <p:attrNameLst>
+                                          <p:attrName>style.visibility</p:attrName>
+                                        </p:attrNameLst>
+                                      </p:cBhvr>
+                                      <p:to>
+                                        <p:strVal val="visible"/>
+                                      </p:to>
+                                    </p:set>
+                                  </p:childTnLst>
+                                </p:cTn>
+                              </p:par>
+                              <p:par>
+                                <p:cTn id="67" presetID="1" presetClass="entr" presetSubtype="0" fill="hold" nodeType="withEffect">
+                                  <p:stCondLst>
+                                    <p:cond delay="0"/>
+                                  </p:stCondLst>
+                                  <p:childTnLst>
+                                    <p:set>
+                                      <p:cBhvr>
+                                        <p:cTn id="68" dur="1" fill="hold">
+                                          <p:stCondLst>
+                                            <p:cond delay="0"/>
+                                          </p:stCondLst>
+                                        </p:cTn>
+                                        <p:tgtEl>
+                                          <p:spTgt spid="36"/>
+                                        </p:tgtEl>
+                                        <p:attrNameLst>
+                                          <p:attrName>style.visibility</p:attrName>
+                                        </p:attrNameLst>
+                                      </p:cBhvr>
+                                      <p:to>
+                                        <p:strVal val="visible"/>
+                                      </p:to>
+                                    </p:set>
+                                  </p:childTnLst>
+                                </p:cTn>
+                              </p:par>
+                            </p:childTnLst>
+                          </p:cTn>
+                        </p:par>
+                      </p:childTnLst>
+                    </p:cTn>
+                  </p:par>
+                  <p:par>
+                    <p:cTn id="69" fill="hold">
+                      <p:stCondLst>
+                        <p:cond delay="indefinite"/>
+                      </p:stCondLst>
+                      <p:childTnLst>
+                        <p:par>
+                          <p:cTn id="70" fill="hold">
+                            <p:stCondLst>
+                              <p:cond delay="0"/>
+                            </p:stCondLst>
+                            <p:childTnLst>
+                              <p:par>
+                                <p:cTn id="71" presetID="1" presetClass="entr" presetSubtype="0" fill="hold" grpId="0" nodeType="clickEffect">
+                                  <p:stCondLst>
+                                    <p:cond delay="0"/>
+                                  </p:stCondLst>
+                                  <p:childTnLst>
+                                    <p:set>
+                                      <p:cBhvr>
+                                        <p:cTn id="72" dur="1" fill="hold">
+                                          <p:stCondLst>
+                                            <p:cond delay="0"/>
+                                          </p:stCondLst>
+                                        </p:cTn>
+                                        <p:tgtEl>
+                                          <p:spTgt spid="53"/>
+                                        </p:tgtEl>
+                                        <p:attrNameLst>
+                                          <p:attrName>style.visibility</p:attrName>
+                                        </p:attrNameLst>
+                                      </p:cBhvr>
+                                      <p:to>
+                                        <p:strVal val="visible"/>
+                                      </p:to>
+                                    </p:set>
+                                  </p:childTnLst>
+                                </p:cTn>
+                              </p:par>
+                              <p:par>
+                                <p:cTn id="73" presetID="1" presetClass="entr" presetSubtype="0" fill="hold" nodeType="withEffect">
+                                  <p:stCondLst>
+                                    <p:cond delay="0"/>
+                                  </p:stCondLst>
+                                  <p:childTnLst>
+                                    <p:set>
+                                      <p:cBhvr>
+                                        <p:cTn id="74" dur="1" fill="hold">
+                                          <p:stCondLst>
+                                            <p:cond delay="0"/>
+                                          </p:stCondLst>
+                                        </p:cTn>
+                                        <p:tgtEl>
+                                          <p:spTgt spid="51"/>
+                                        </p:tgtEl>
+                                        <p:attrNameLst>
+                                          <p:attrName>style.visibility</p:attrName>
+                                        </p:attrNameLst>
+                                      </p:cBhvr>
+                                      <p:to>
+                                        <p:strVal val="visible"/>
+                                      </p:to>
+                                    </p:set>
+                                  </p:childTnLst>
+                                </p:cTn>
+                              </p:par>
+                            </p:childTnLst>
+                          </p:cTn>
+                        </p:par>
+                      </p:childTnLst>
+                    </p:cTn>
+                  </p:par>
+                </p:childTnLst>
+              </p:cTn>
+              <p:prevCondLst>
+                <p:cond evt="onPrev" delay="0">
+                  <p:tgtEl>
+                    <p:sldTgt/>
+                  </p:tgtEl>
+                </p:cond>
+              </p:prevCondLst>
+              <p:nextCondLst>
+                <p:cond evt="onNext" delay="0">
+                  <p:tgtEl>
+                    <p:sldTgt/>
+                  </p:tgtEl>
+                </p:cond>
+              </p:nextCondLst>
+            </p:seq>
+          </p:childTnLst>
+        </p:cTn>
+      </p:par>
+    </p:tnLst>
+    <p:bldLst>
+      <p:bldP spid="4" grpId="0" uiExpand="1" build="p"/>
+      <p:bldP spid="29" grpId="0" animBg="1"/>
+      <p:bldP spid="30" grpId="0" animBg="1"/>
+      <p:bldP spid="45" grpId="0" animBg="1"/>
+      <p:bldP spid="46" grpId="0" animBg="1"/>
+      <p:bldP spid="55" grpId="0" animBg="1"/>
+      <p:bldP spid="56" grpId="0" animBg="1"/>
+      <p:bldP spid="57" grpId="0" animBg="1"/>
+      <p:bldP spid="58" grpId="0" animBg="1"/>
+      <p:bldP spid="62" grpId="0" animBg="1"/>
+      <p:bldP spid="63" grpId="0" animBg="1"/>
+      <p:bldP spid="64" grpId="0" animBg="1"/>
+      <p:bldP spid="65" grpId="0" animBg="1"/>
+      <p:bldP spid="43" grpId="0"/>
+      <p:bldP spid="53" grpId="0"/>
+    </p:bldLst>
+  </p:timing>
 </p:sld>
 </file>
 
 <file path=ppt/slides/slide6.xml><?xml version="1.0" encoding="utf-8"?>
+<p:sld xmlns:a="http://schemas.openxmlformats.org/drawingml/2006/main" xmlns:r="http://schemas.openxmlformats.org/officeDocument/2006/relationships" xmlns:p="http://schemas.openxmlformats.org/presentationml/2006/main">
+  <p:cSld>
+    <p:spTree>
+      <p:nvGrpSpPr>
+        <p:cNvPr id="1" name=""/>
+        <p:cNvGrpSpPr/>
+        <p:nvPr/>
+      </p:nvGrpSpPr>
+      <p:grpSpPr>
+        <a:xfrm>
+          <a:off x="0" y="0"/>
+          <a:ext cx="0" cy="0"/>
+          <a:chOff x="0" y="0"/>
+          <a:chExt cx="0" cy="0"/>
+        </a:xfrm>
+      </p:grpSpPr>
+      <p:pic>
+        <p:nvPicPr>
+          <p:cNvPr id="3074" name="Picture 2">
+            <a:extLst>
+              <a:ext uri="{FF2B5EF4-FFF2-40B4-BE49-F238E27FC236}">
+                <a16:creationId xmlns:a16="http://schemas.microsoft.com/office/drawing/2014/main" id="{107DA188-A6BC-2811-F17A-2D2C6BB61B90}"/>
+              </a:ext>
+            </a:extLst>
+          </p:cNvPr>
+          <p:cNvPicPr>
+            <a:picLocks noChangeAspect="1" noChangeArrowheads="1"/>
+          </p:cNvPicPr>
+          <p:nvPr/>
+        </p:nvPicPr>
+        <p:blipFill>
+          <a:blip r:embed="rId2">
+            <a:extLst>
+              <a:ext uri="{28A0092B-C50C-407E-A947-70E740481C1C}">
+                <a14:useLocalDpi xmlns:a14="http://schemas.microsoft.com/office/drawing/2010/main" val="0"/>
+              </a:ext>
+            </a:extLst>
+          </a:blip>
+          <a:srcRect/>
+          <a:stretch>
+            <a:fillRect/>
+          </a:stretch>
+        </p:blipFill>
+        <p:spPr bwMode="auto">
+          <a:xfrm>
+            <a:off x="0" y="260350"/>
+            <a:ext cx="12192000" cy="6597650"/>
+          </a:xfrm>
+          <a:prstGeom prst="rect">
+            <a:avLst/>
+          </a:prstGeom>
+          <a:solidFill>
+            <a:srgbClr val="0070C0"/>
+          </a:solidFill>
+        </p:spPr>
+      </p:pic>
+      <p:sp>
+        <p:nvSpPr>
+          <p:cNvPr id="3" name="Rectangle 2">
+            <a:extLst>
+              <a:ext uri="{FF2B5EF4-FFF2-40B4-BE49-F238E27FC236}">
+                <a16:creationId xmlns:a16="http://schemas.microsoft.com/office/drawing/2014/main" id="{C2CA8329-D00F-A9D0-931D-3E54B662E66E}"/>
+              </a:ext>
+            </a:extLst>
+          </p:cNvPr>
+          <p:cNvSpPr/>
+          <p:nvPr/>
+        </p:nvSpPr>
+        <p:spPr>
+          <a:xfrm>
+            <a:off x="8957805" y="985239"/>
+            <a:ext cx="2399731" cy="341194"/>
+          </a:xfrm>
+          <a:prstGeom prst="rect">
+            <a:avLst/>
+          </a:prstGeom>
+          <a:solidFill>
+            <a:schemeClr val="accent2">
+              <a:lumMod val="10000"/>
+              <a:lumOff val="90000"/>
+            </a:schemeClr>
+          </a:solidFill>
+          <a:ln>
+            <a:noFill/>
+          </a:ln>
+        </p:spPr>
+        <p:style>
+          <a:lnRef idx="2">
+            <a:schemeClr val="accent1">
+              <a:shade val="15000"/>
+            </a:schemeClr>
+          </a:lnRef>
+          <a:fillRef idx="1">
+            <a:schemeClr val="accent1"/>
+          </a:fillRef>
+          <a:effectRef idx="0">
+            <a:schemeClr val="accent1"/>
+          </a:effectRef>
+          <a:fontRef idx="minor">
+            <a:schemeClr val="lt1"/>
+          </a:fontRef>
+        </p:style>
+        <p:txBody>
+          <a:bodyPr rtlCol="0" anchor="ctr"/>
+          <a:lstStyle/>
+          <a:p>
+            <a:pPr algn="ctr"/>
+            <a:r>
+              <a:rPr lang="en-US" sz="1600" dirty="0">
+                <a:solidFill>
+                  <a:schemeClr val="tx1"/>
+                </a:solidFill>
+              </a:rPr>
+              <a:t>Baseline – rank by X</a:t>
+            </a:r>
+            <a:endParaRPr lang="en-US" sz="1200" dirty="0">
+              <a:solidFill>
+                <a:schemeClr val="tx1"/>
+              </a:solidFill>
+            </a:endParaRPr>
+          </a:p>
+        </p:txBody>
+      </p:sp>
+      <p:sp>
+        <p:nvSpPr>
+          <p:cNvPr id="5" name="Rectangle 4">
+            <a:extLst>
+              <a:ext uri="{FF2B5EF4-FFF2-40B4-BE49-F238E27FC236}">
+                <a16:creationId xmlns:a16="http://schemas.microsoft.com/office/drawing/2014/main" id="{24AF7643-7CD0-81C1-A517-BBB464D75F20}"/>
+              </a:ext>
+            </a:extLst>
+          </p:cNvPr>
+          <p:cNvSpPr/>
+          <p:nvPr/>
+        </p:nvSpPr>
+        <p:spPr>
+          <a:xfrm>
+            <a:off x="8944321" y="1327733"/>
+            <a:ext cx="2866679" cy="341194"/>
+          </a:xfrm>
+          <a:prstGeom prst="rect">
+            <a:avLst/>
+          </a:prstGeom>
+          <a:solidFill>
+            <a:schemeClr val="accent2">
+              <a:lumMod val="10000"/>
+              <a:lumOff val="90000"/>
+            </a:schemeClr>
+          </a:solidFill>
+          <a:ln>
+            <a:noFill/>
+          </a:ln>
+        </p:spPr>
+        <p:style>
+          <a:lnRef idx="2">
+            <a:schemeClr val="accent1">
+              <a:shade val="15000"/>
+            </a:schemeClr>
+          </a:lnRef>
+          <a:fillRef idx="1">
+            <a:schemeClr val="accent1"/>
+          </a:fillRef>
+          <a:effectRef idx="0">
+            <a:schemeClr val="accent1"/>
+          </a:effectRef>
+          <a:fontRef idx="minor">
+            <a:schemeClr val="lt1"/>
+          </a:fontRef>
+        </p:style>
+        <p:txBody>
+          <a:bodyPr rtlCol="0" anchor="ctr"/>
+          <a:lstStyle/>
+          <a:p>
+            <a:r>
+              <a:rPr lang="en-US" sz="1600" dirty="0">
+                <a:solidFill>
+                  <a:schemeClr val="tx1"/>
+                </a:solidFill>
+              </a:rPr>
+              <a:t>Logistic Regression C=.01 L2</a:t>
+            </a:r>
+            <a:endParaRPr lang="en-US" sz="1200" dirty="0">
+              <a:solidFill>
+                <a:schemeClr val="tx1"/>
+              </a:solidFill>
+            </a:endParaRPr>
+          </a:p>
+        </p:txBody>
+      </p:sp>
+      <p:sp>
+        <p:nvSpPr>
+          <p:cNvPr id="6" name="Rectangle 5">
+            <a:extLst>
+              <a:ext uri="{FF2B5EF4-FFF2-40B4-BE49-F238E27FC236}">
+                <a16:creationId xmlns:a16="http://schemas.microsoft.com/office/drawing/2014/main" id="{0934B90C-22FC-AF75-AEFE-DF19993439E0}"/>
+              </a:ext>
+            </a:extLst>
+          </p:cNvPr>
+          <p:cNvSpPr/>
+          <p:nvPr/>
+        </p:nvSpPr>
+        <p:spPr>
+          <a:xfrm>
+            <a:off x="9069101" y="1763778"/>
+            <a:ext cx="2654813" cy="393706"/>
+          </a:xfrm>
+          <a:prstGeom prst="rect">
+            <a:avLst/>
+          </a:prstGeom>
+          <a:solidFill>
+            <a:schemeClr val="accent2">
+              <a:lumMod val="10000"/>
+              <a:lumOff val="90000"/>
+            </a:schemeClr>
+          </a:solidFill>
+          <a:ln>
+            <a:noFill/>
+          </a:ln>
+        </p:spPr>
+        <p:style>
+          <a:lnRef idx="2">
+            <a:schemeClr val="accent1">
+              <a:shade val="15000"/>
+            </a:schemeClr>
+          </a:lnRef>
+          <a:fillRef idx="1">
+            <a:schemeClr val="accent1"/>
+          </a:fillRef>
+          <a:effectRef idx="0">
+            <a:schemeClr val="accent1"/>
+          </a:effectRef>
+          <a:fontRef idx="minor">
+            <a:schemeClr val="lt1"/>
+          </a:fontRef>
+        </p:style>
+        <p:txBody>
+          <a:bodyPr rtlCol="0" anchor="ctr"/>
+          <a:lstStyle/>
+          <a:p>
+            <a:r>
+              <a:rPr lang="en-US" sz="1600" dirty="0">
+                <a:solidFill>
+                  <a:schemeClr val="tx1"/>
+                </a:solidFill>
+              </a:rPr>
+              <a:t>RF </a:t>
+            </a:r>
+            <a:r>
+              <a:rPr lang="en-US" sz="1600" dirty="0" err="1">
+                <a:solidFill>
+                  <a:schemeClr val="tx1"/>
+                </a:solidFill>
+              </a:rPr>
+              <a:t>n_trees</a:t>
+            </a:r>
+            <a:r>
+              <a:rPr lang="en-US" sz="1600" dirty="0">
+                <a:solidFill>
+                  <a:schemeClr val="tx1"/>
+                </a:solidFill>
+              </a:rPr>
+              <a:t>=10000 max depth=50</a:t>
+            </a:r>
+            <a:endParaRPr lang="en-US" sz="1200" dirty="0">
+              <a:solidFill>
+                <a:schemeClr val="tx1"/>
+              </a:solidFill>
+            </a:endParaRPr>
+          </a:p>
+        </p:txBody>
+      </p:sp>
+      <p:sp>
+        <p:nvSpPr>
+          <p:cNvPr id="7" name="Rectangle 6">
+            <a:extLst>
+              <a:ext uri="{FF2B5EF4-FFF2-40B4-BE49-F238E27FC236}">
+                <a16:creationId xmlns:a16="http://schemas.microsoft.com/office/drawing/2014/main" id="{1B42C90D-A51B-EAD6-AE37-AE03D65184C8}"/>
+              </a:ext>
+            </a:extLst>
+          </p:cNvPr>
+          <p:cNvSpPr/>
+          <p:nvPr/>
+        </p:nvSpPr>
+        <p:spPr>
+          <a:xfrm>
+            <a:off x="8656663" y="697694"/>
+            <a:ext cx="2522561" cy="341194"/>
+          </a:xfrm>
+          <a:prstGeom prst="rect">
+            <a:avLst/>
+          </a:prstGeom>
+          <a:solidFill>
+            <a:schemeClr val="accent2">
+              <a:lumMod val="10000"/>
+              <a:lumOff val="90000"/>
+            </a:schemeClr>
+          </a:solidFill>
+          <a:ln>
+            <a:noFill/>
+          </a:ln>
+        </p:spPr>
+        <p:style>
+          <a:lnRef idx="2">
+            <a:schemeClr val="accent1">
+              <a:shade val="15000"/>
+            </a:schemeClr>
+          </a:lnRef>
+          <a:fillRef idx="1">
+            <a:schemeClr val="accent1"/>
+          </a:fillRef>
+          <a:effectRef idx="0">
+            <a:schemeClr val="accent1"/>
+          </a:effectRef>
+          <a:fontRef idx="minor">
+            <a:schemeClr val="lt1"/>
+          </a:fontRef>
+        </p:style>
+        <p:txBody>
+          <a:bodyPr rtlCol="0" anchor="ctr"/>
+          <a:lstStyle/>
+          <a:p>
+            <a:pPr algn="ctr"/>
+            <a:endParaRPr lang="en-US"/>
+          </a:p>
+        </p:txBody>
+      </p:sp>
+    </p:spTree>
+    <p:extLst>
+      <p:ext uri="{BB962C8B-B14F-4D97-AF65-F5344CB8AC3E}">
+        <p14:creationId xmlns:p14="http://schemas.microsoft.com/office/powerpoint/2010/main" val="1193017592"/>
+      </p:ext>
+    </p:extLst>
+  </p:cSld>
+  <p:clrMapOvr>
+    <a:masterClrMapping/>
+  </p:clrMapOvr>
+</p:sld>
+</file>
+
+<file path=ppt/slides/slide7.xml><?xml version="1.0" encoding="utf-8"?>
 <p:sld xmlns:a="http://schemas.openxmlformats.org/drawingml/2006/main" xmlns:r="http://schemas.openxmlformats.org/officeDocument/2006/relationships" xmlns:p="http://schemas.openxmlformats.org/presentationml/2006/main">
   <p:cSld>
     <p:spTree>
@@ -22745,7 +24470,7 @@
 </p:sld>
 </file>
 
-<file path=ppt/slides/slide7.xml><?xml version="1.0" encoding="utf-8"?>
+<file path=ppt/slides/slide8.xml><?xml version="1.0" encoding="utf-8"?>
 <p:sld xmlns:a="http://schemas.openxmlformats.org/drawingml/2006/main" xmlns:r="http://schemas.openxmlformats.org/officeDocument/2006/relationships" xmlns:p="http://schemas.openxmlformats.org/presentationml/2006/main">
   <p:cSld>
     <p:spTree>
@@ -22800,572 +24525,6 @@
 </p:sld>
 </file>
 
-<file path=ppt/slides/slide8.xml><?xml version="1.0" encoding="utf-8"?>
-<p:sld xmlns:a="http://schemas.openxmlformats.org/drawingml/2006/main" xmlns:r="http://schemas.openxmlformats.org/officeDocument/2006/relationships" xmlns:p="http://schemas.openxmlformats.org/presentationml/2006/main">
-  <p:cSld>
-    <p:spTree>
-      <p:nvGrpSpPr>
-        <p:cNvPr id="1" name=""/>
-        <p:cNvGrpSpPr/>
-        <p:nvPr/>
-      </p:nvGrpSpPr>
-      <p:grpSpPr>
-        <a:xfrm>
-          <a:off x="0" y="0"/>
-          <a:ext cx="0" cy="0"/>
-          <a:chOff x="0" y="0"/>
-          <a:chExt cx="0" cy="0"/>
-        </a:xfrm>
-      </p:grpSpPr>
-      <p:sp>
-        <p:nvSpPr>
-          <p:cNvPr id="3" name="Title 2"/>
-          <p:cNvSpPr>
-            <a:spLocks noGrp="1"/>
-          </p:cNvSpPr>
-          <p:nvPr>
-            <p:ph type="title"/>
-          </p:nvPr>
-        </p:nvSpPr>
-        <p:spPr/>
-        <p:txBody>
-          <a:bodyPr/>
-          <a:lstStyle/>
-          <a:p>
-            <a:r>
-              <a:rPr lang="en-US" dirty="0"/>
-              <a:t>Reminder: The PR-k graph</a:t>
-            </a:r>
-          </a:p>
-        </p:txBody>
-      </p:sp>
-      <p:grpSp>
-        <p:nvGrpSpPr>
-          <p:cNvPr id="5" name="Group 4"/>
-          <p:cNvGrpSpPr/>
-          <p:nvPr/>
-        </p:nvGrpSpPr>
-        <p:grpSpPr>
-          <a:xfrm>
-            <a:off x="2435740" y="1562635"/>
-            <a:ext cx="7320520" cy="4944871"/>
-            <a:chOff x="616981" y="1325057"/>
-            <a:chExt cx="7320520" cy="4944871"/>
-          </a:xfrm>
-        </p:grpSpPr>
-        <p:pic>
-          <p:nvPicPr>
-            <p:cNvPr id="4" name="Picture 3"/>
-            <p:cNvPicPr>
-              <a:picLocks noChangeAspect="1"/>
-            </p:cNvPicPr>
-            <p:nvPr/>
-          </p:nvPicPr>
-          <p:blipFill>
-            <a:blip r:embed="rId2"/>
-            <a:stretch>
-              <a:fillRect/>
-            </a:stretch>
-          </p:blipFill>
-          <p:spPr>
-            <a:xfrm>
-              <a:off x="616981" y="1325057"/>
-              <a:ext cx="7320520" cy="4944871"/>
-            </a:xfrm>
-            <a:prstGeom prst="rect">
-              <a:avLst/>
-            </a:prstGeom>
-          </p:spPr>
-        </p:pic>
-        <p:sp>
-          <p:nvSpPr>
-            <p:cNvPr id="2" name="Rectangle 1"/>
-            <p:cNvSpPr/>
-            <p:nvPr/>
-          </p:nvSpPr>
-          <p:spPr>
-            <a:xfrm>
-              <a:off x="4064000" y="1409700"/>
-              <a:ext cx="342900" cy="279400"/>
-            </a:xfrm>
-            <a:prstGeom prst="rect">
-              <a:avLst/>
-            </a:prstGeom>
-            <a:ln>
-              <a:noFill/>
-            </a:ln>
-          </p:spPr>
-          <p:style>
-            <a:lnRef idx="2">
-              <a:schemeClr val="dk1"/>
-            </a:lnRef>
-            <a:fillRef idx="1">
-              <a:schemeClr val="lt1"/>
-            </a:fillRef>
-            <a:effectRef idx="0">
-              <a:schemeClr val="dk1"/>
-            </a:effectRef>
-            <a:fontRef idx="minor">
-              <a:schemeClr val="dk1"/>
-            </a:fontRef>
-          </p:style>
-          <p:txBody>
-            <a:bodyPr rtlCol="0" anchor="ctr"/>
-            <a:lstStyle/>
-            <a:p>
-              <a:pPr algn="ctr" defTabSz="457200">
-                <a:buClrTx/>
-              </a:pPr>
-              <a:endParaRPr lang="en-US" sz="1800" kern="1200">
-                <a:solidFill>
-                  <a:prstClr val="black"/>
-                </a:solidFill>
-                <a:latin typeface="Calibri"/>
-              </a:endParaRPr>
-            </a:p>
-          </p:txBody>
-        </p:sp>
-      </p:grpSp>
-      <p:grpSp>
-        <p:nvGrpSpPr>
-          <p:cNvPr id="9" name="Group 8">
-            <a:extLst>
-              <a:ext uri="{FF2B5EF4-FFF2-40B4-BE49-F238E27FC236}">
-                <a16:creationId xmlns:a16="http://schemas.microsoft.com/office/drawing/2014/main" id="{100148AF-CA57-0541-9177-560EC8D36156}"/>
-              </a:ext>
-            </a:extLst>
-          </p:cNvPr>
-          <p:cNvGrpSpPr/>
-          <p:nvPr/>
-        </p:nvGrpSpPr>
-        <p:grpSpPr>
-          <a:xfrm>
-            <a:off x="3018798" y="1150982"/>
-            <a:ext cx="6607802" cy="882961"/>
-            <a:chOff x="1494798" y="1150981"/>
-            <a:chExt cx="6607802" cy="882961"/>
-          </a:xfrm>
-        </p:grpSpPr>
-        <p:sp>
-          <p:nvSpPr>
-            <p:cNvPr id="6" name="TextBox 5"/>
-            <p:cNvSpPr txBox="1"/>
-            <p:nvPr/>
-          </p:nvSpPr>
-          <p:spPr>
-            <a:xfrm>
-              <a:off x="1494798" y="1387611"/>
-              <a:ext cx="6607802" cy="646331"/>
-            </a:xfrm>
-            <a:prstGeom prst="rect">
-              <a:avLst/>
-            </a:prstGeom>
-            <a:noFill/>
-          </p:spPr>
-          <p:txBody>
-            <a:bodyPr wrap="square" rtlCol="0">
-              <a:spAutoFit/>
-            </a:bodyPr>
-            <a:lstStyle/>
-            <a:p>
-              <a:pPr defTabSz="457200">
-                <a:buClrTx/>
-              </a:pPr>
-              <a:r>
-                <a:rPr lang="en-US" sz="1800" b="1" kern="1200" dirty="0">
-                  <a:solidFill>
-                    <a:srgbClr val="C0504D">
-                      <a:lumMod val="75000"/>
-                    </a:srgbClr>
-                  </a:solidFill>
-                  <a:latin typeface="Calibri"/>
-                  <a:ea typeface="+mn-ea"/>
-                  <a:cs typeface="+mn-cs"/>
-                </a:rPr>
-                <a:t>1         .9     .8                .7        .6            .5    .4  .3.                  .2     .1 </a:t>
-              </a:r>
-            </a:p>
-            <a:p>
-              <a:pPr defTabSz="457200">
-                <a:buClrTx/>
-              </a:pPr>
-              <a:r>
-                <a:rPr lang="en-US" sz="1050" b="1" kern="1200" dirty="0">
-                  <a:solidFill>
-                    <a:srgbClr val="C0504D">
-                      <a:lumMod val="75000"/>
-                    </a:srgbClr>
-                  </a:solidFill>
-                  <a:latin typeface="Calibri"/>
-                  <a:ea typeface="+mn-ea"/>
-                  <a:cs typeface="+mn-cs"/>
-                </a:rPr>
-                <a:t> |                  |             |                               |                  |                        |           |        |                                    |            |</a:t>
-              </a:r>
-              <a:r>
-                <a:rPr lang="en-US" sz="1800" b="1" kern="1200" dirty="0">
-                  <a:solidFill>
-                    <a:srgbClr val="C0504D">
-                      <a:lumMod val="75000"/>
-                    </a:srgbClr>
-                  </a:solidFill>
-                  <a:latin typeface="Calibri"/>
-                  <a:ea typeface="+mn-ea"/>
-                  <a:cs typeface="+mn-cs"/>
-                </a:rPr>
-                <a:t>   </a:t>
-              </a:r>
-              <a:r>
-                <a:rPr lang="en-US" sz="1800" kern="1200" dirty="0">
-                  <a:solidFill>
-                    <a:srgbClr val="EEECE1">
-                      <a:lumMod val="25000"/>
-                    </a:srgbClr>
-                  </a:solidFill>
-                  <a:latin typeface="Calibri"/>
-                  <a:ea typeface="+mn-ea"/>
-                  <a:cs typeface="+mn-cs"/>
-                </a:rPr>
-                <a:t>      </a:t>
-              </a:r>
-            </a:p>
-          </p:txBody>
-        </p:sp>
-        <p:sp>
-          <p:nvSpPr>
-            <p:cNvPr id="8" name="TextBox 7">
-              <a:extLst>
-                <a:ext uri="{FF2B5EF4-FFF2-40B4-BE49-F238E27FC236}">
-                  <a16:creationId xmlns:a16="http://schemas.microsoft.com/office/drawing/2014/main" id="{EFA4ED1E-FBFF-4545-BB64-FFD28CAC8A4B}"/>
-                </a:ext>
-              </a:extLst>
-            </p:cNvPr>
-            <p:cNvSpPr txBox="1"/>
-            <p:nvPr/>
-          </p:nvSpPr>
-          <p:spPr>
-            <a:xfrm>
-              <a:off x="4097994" y="1150981"/>
-              <a:ext cx="700705" cy="369332"/>
-            </a:xfrm>
-            <a:prstGeom prst="rect">
-              <a:avLst/>
-            </a:prstGeom>
-            <a:noFill/>
-          </p:spPr>
-          <p:txBody>
-            <a:bodyPr wrap="none" rtlCol="0">
-              <a:spAutoFit/>
-            </a:bodyPr>
-            <a:lstStyle/>
-            <a:p>
-              <a:pPr defTabSz="457200">
-                <a:buClrTx/>
-              </a:pPr>
-              <a:r>
-                <a:rPr lang="en-US" sz="1800" b="1" kern="1200" dirty="0">
-                  <a:solidFill>
-                    <a:srgbClr val="C00000"/>
-                  </a:solidFill>
-                  <a:latin typeface="Calibri"/>
-                  <a:ea typeface="+mn-ea"/>
-                  <a:cs typeface="+mn-cs"/>
-                </a:rPr>
-                <a:t>Score</a:t>
-              </a:r>
-            </a:p>
-          </p:txBody>
-        </p:sp>
-      </p:grpSp>
-      <p:grpSp>
-        <p:nvGrpSpPr>
-          <p:cNvPr id="15" name="Group 14">
-            <a:extLst>
-              <a:ext uri="{FF2B5EF4-FFF2-40B4-BE49-F238E27FC236}">
-                <a16:creationId xmlns:a16="http://schemas.microsoft.com/office/drawing/2014/main" id="{F79BF13E-AE77-6A46-B2C2-E1985346BF6A}"/>
-              </a:ext>
-            </a:extLst>
-          </p:cNvPr>
-          <p:cNvGrpSpPr/>
-          <p:nvPr/>
-        </p:nvGrpSpPr>
-        <p:grpSpPr>
-          <a:xfrm>
-            <a:off x="1836283" y="5550212"/>
-            <a:ext cx="7221578" cy="369332"/>
-            <a:chOff x="312283" y="5550212"/>
-            <a:chExt cx="7221578" cy="369332"/>
-          </a:xfrm>
-        </p:grpSpPr>
-        <p:cxnSp>
-          <p:nvCxnSpPr>
-            <p:cNvPr id="11" name="Straight Connector 10">
-              <a:extLst>
-                <a:ext uri="{FF2B5EF4-FFF2-40B4-BE49-F238E27FC236}">
-                  <a16:creationId xmlns:a16="http://schemas.microsoft.com/office/drawing/2014/main" id="{91561906-EEC1-6046-905E-0E55B1D4B60D}"/>
-                </a:ext>
-              </a:extLst>
-            </p:cNvPr>
-            <p:cNvCxnSpPr/>
-            <p:nvPr/>
-          </p:nvCxnSpPr>
-          <p:spPr>
-            <a:xfrm flipH="1">
-              <a:off x="1649896" y="5734878"/>
-              <a:ext cx="5883965" cy="0"/>
-            </a:xfrm>
-            <a:prstGeom prst="line">
-              <a:avLst/>
-            </a:prstGeom>
-            <a:ln w="28575">
-              <a:solidFill>
-                <a:srgbClr val="00B0F0"/>
-              </a:solidFill>
-            </a:ln>
-          </p:spPr>
-          <p:style>
-            <a:lnRef idx="2">
-              <a:schemeClr val="accent1"/>
-            </a:lnRef>
-            <a:fillRef idx="0">
-              <a:schemeClr val="accent1"/>
-            </a:fillRef>
-            <a:effectRef idx="1">
-              <a:schemeClr val="accent1"/>
-            </a:effectRef>
-            <a:fontRef idx="minor">
-              <a:schemeClr val="tx1"/>
-            </a:fontRef>
-          </p:style>
-        </p:cxnSp>
-        <p:sp>
-          <p:nvSpPr>
-            <p:cNvPr id="12" name="TextBox 11">
-              <a:extLst>
-                <a:ext uri="{FF2B5EF4-FFF2-40B4-BE49-F238E27FC236}">
-                  <a16:creationId xmlns:a16="http://schemas.microsoft.com/office/drawing/2014/main" id="{79F59512-F15A-1445-8C8B-BFD99D51B252}"/>
-                </a:ext>
-              </a:extLst>
-            </p:cNvPr>
-            <p:cNvSpPr txBox="1"/>
-            <p:nvPr/>
-          </p:nvSpPr>
-          <p:spPr>
-            <a:xfrm>
-              <a:off x="312283" y="5550212"/>
-              <a:ext cx="986167" cy="369332"/>
-            </a:xfrm>
-            <a:prstGeom prst="rect">
-              <a:avLst/>
-            </a:prstGeom>
-            <a:noFill/>
-          </p:spPr>
-          <p:txBody>
-            <a:bodyPr wrap="none" rtlCol="0">
-              <a:spAutoFit/>
-            </a:bodyPr>
-            <a:lstStyle/>
-            <a:p>
-              <a:pPr defTabSz="457200">
-                <a:buClrTx/>
-              </a:pPr>
-              <a:r>
-                <a:rPr lang="en-US" sz="1800" b="1" kern="1200" dirty="0">
-                  <a:solidFill>
-                    <a:srgbClr val="C00000"/>
-                  </a:solidFill>
-                  <a:latin typeface="Calibri"/>
-                  <a:ea typeface="+mn-ea"/>
-                  <a:cs typeface="+mn-cs"/>
-                </a:rPr>
-                <a:t>Baseline</a:t>
-              </a:r>
-            </a:p>
-          </p:txBody>
-        </p:sp>
-        <p:cxnSp>
-          <p:nvCxnSpPr>
-            <p:cNvPr id="14" name="Straight Arrow Connector 13">
-              <a:extLst>
-                <a:ext uri="{FF2B5EF4-FFF2-40B4-BE49-F238E27FC236}">
-                  <a16:creationId xmlns:a16="http://schemas.microsoft.com/office/drawing/2014/main" id="{E9A4A58B-B356-1E41-A6F4-EEF6E44A9AD1}"/>
-                </a:ext>
-              </a:extLst>
-            </p:cNvPr>
-            <p:cNvCxnSpPr>
-              <a:stCxn id="12" idx="3"/>
-            </p:cNvCxnSpPr>
-            <p:nvPr/>
-          </p:nvCxnSpPr>
-          <p:spPr>
-            <a:xfrm>
-              <a:off x="1298450" y="5734878"/>
-              <a:ext cx="281872" cy="0"/>
-            </a:xfrm>
-            <a:prstGeom prst="straightConnector1">
-              <a:avLst/>
-            </a:prstGeom>
-            <a:ln>
-              <a:tailEnd type="triangle"/>
-            </a:ln>
-          </p:spPr>
-          <p:style>
-            <a:lnRef idx="2">
-              <a:schemeClr val="accent1"/>
-            </a:lnRef>
-            <a:fillRef idx="0">
-              <a:schemeClr val="accent1"/>
-            </a:fillRef>
-            <a:effectRef idx="1">
-              <a:schemeClr val="accent1"/>
-            </a:effectRef>
-            <a:fontRef idx="minor">
-              <a:schemeClr val="tx1"/>
-            </a:fontRef>
-          </p:style>
-        </p:cxnSp>
-      </p:grpSp>
-    </p:spTree>
-    <p:extLst>
-      <p:ext uri="{BB962C8B-B14F-4D97-AF65-F5344CB8AC3E}">
-        <p14:creationId xmlns:p14="http://schemas.microsoft.com/office/powerpoint/2010/main" val="3566697360"/>
-      </p:ext>
-    </p:extLst>
-  </p:cSld>
-  <p:clrMapOvr>
-    <a:masterClrMapping/>
-  </p:clrMapOvr>
-  <p:timing>
-    <p:tnLst>
-      <p:par>
-        <p:cTn id="1" dur="indefinite" restart="never" nodeType="tmRoot">
-          <p:childTnLst>
-            <p:seq concurrent="1" nextAc="seek">
-              <p:cTn id="2" dur="indefinite" nodeType="mainSeq">
-                <p:childTnLst>
-                  <p:par>
-                    <p:cTn id="3" fill="hold">
-                      <p:stCondLst>
-                        <p:cond delay="indefinite"/>
-                      </p:stCondLst>
-                      <p:childTnLst>
-                        <p:par>
-                          <p:cTn id="4" fill="hold">
-                            <p:stCondLst>
-                              <p:cond delay="0"/>
-                            </p:stCondLst>
-                            <p:childTnLst>
-                              <p:par>
-                                <p:cTn id="5" presetID="22" presetClass="entr" presetSubtype="4" fill="hold" nodeType="clickEffect">
-                                  <p:stCondLst>
-                                    <p:cond delay="0"/>
-                                  </p:stCondLst>
-                                  <p:childTnLst>
-                                    <p:set>
-                                      <p:cBhvr>
-                                        <p:cTn id="6" dur="1" fill="hold">
-                                          <p:stCondLst>
-                                            <p:cond delay="0"/>
-                                          </p:stCondLst>
-                                        </p:cTn>
-                                        <p:tgtEl>
-                                          <p:spTgt spid="9"/>
-                                        </p:tgtEl>
-                                        <p:attrNameLst>
-                                          <p:attrName>style.visibility</p:attrName>
-                                        </p:attrNameLst>
-                                      </p:cBhvr>
-                                      <p:to>
-                                        <p:strVal val="visible"/>
-                                      </p:to>
-                                    </p:set>
-                                    <p:animEffect transition="in" filter="wipe(down)">
-                                      <p:cBhvr>
-                                        <p:cTn id="7" dur="500"/>
-                                        <p:tgtEl>
-                                          <p:spTgt spid="9"/>
-                                        </p:tgtEl>
-                                      </p:cBhvr>
-                                    </p:animEffect>
-                                  </p:childTnLst>
-                                </p:cTn>
-                              </p:par>
-                            </p:childTnLst>
-                          </p:cTn>
-                        </p:par>
-                      </p:childTnLst>
-                    </p:cTn>
-                  </p:par>
-                  <p:par>
-                    <p:cTn id="8" fill="hold">
-                      <p:stCondLst>
-                        <p:cond delay="indefinite"/>
-                      </p:stCondLst>
-                      <p:childTnLst>
-                        <p:par>
-                          <p:cTn id="9" fill="hold">
-                            <p:stCondLst>
-                              <p:cond delay="0"/>
-                            </p:stCondLst>
-                            <p:childTnLst>
-                              <p:par>
-                                <p:cTn id="10" presetID="1" presetClass="entr" presetSubtype="0" fill="hold" nodeType="clickEffect">
-                                  <p:stCondLst>
-                                    <p:cond delay="0"/>
-                                  </p:stCondLst>
-                                  <p:childTnLst>
-                                    <p:set>
-                                      <p:cBhvr>
-                                        <p:cTn id="11" dur="1" fill="hold">
-                                          <p:stCondLst>
-                                            <p:cond delay="0"/>
-                                          </p:stCondLst>
-                                        </p:cTn>
-                                        <p:tgtEl>
-                                          <p:spTgt spid="15"/>
-                                        </p:tgtEl>
-                                        <p:attrNameLst>
-                                          <p:attrName>style.visibility</p:attrName>
-                                        </p:attrNameLst>
-                                      </p:cBhvr>
-                                      <p:to>
-                                        <p:strVal val="visible"/>
-                                      </p:to>
-                                    </p:set>
-                                  </p:childTnLst>
-                                </p:cTn>
-                              </p:par>
-                            </p:childTnLst>
-                          </p:cTn>
-                        </p:par>
-                      </p:childTnLst>
-                    </p:cTn>
-                  </p:par>
-                </p:childTnLst>
-              </p:cTn>
-              <p:prevCondLst>
-                <p:cond evt="onPrev" delay="0">
-                  <p:tgtEl>
-                    <p:sldTgt/>
-                  </p:tgtEl>
-                </p:cond>
-              </p:prevCondLst>
-              <p:nextCondLst>
-                <p:cond evt="onNext" delay="0">
-                  <p:tgtEl>
-                    <p:sldTgt/>
-                  </p:tgtEl>
-                </p:cond>
-              </p:nextCondLst>
-            </p:seq>
-          </p:childTnLst>
-        </p:cTn>
-      </p:par>
-    </p:tnLst>
-  </p:timing>
-</p:sld>
-</file>
-
 <file path=ppt/slides/slide9.xml><?xml version="1.0" encoding="utf-8"?>
 <p:sld xmlns:a="http://schemas.openxmlformats.org/drawingml/2006/main" xmlns:r="http://schemas.openxmlformats.org/officeDocument/2006/relationships" xmlns:p="http://schemas.openxmlformats.org/presentationml/2006/main">
   <p:cSld>
@@ -23400,62 +24559,89 @@
           <a:p>
             <a:r>
               <a:rPr lang="en-US" dirty="0"/>
-              <a:t>Reminder: Temporal Validation</a:t>
+              <a:t>The wonderful for loop</a:t>
             </a:r>
           </a:p>
         </p:txBody>
       </p:sp>
-      <p:pic>
-        <p:nvPicPr>
-          <p:cNvPr id="1026" name="Picture 2" descr="Time splitting config">
-            <a:extLst>
-              <a:ext uri="{FF2B5EF4-FFF2-40B4-BE49-F238E27FC236}">
-                <a16:creationId xmlns:a16="http://schemas.microsoft.com/office/drawing/2014/main" id="{5AA5C783-A9B7-0249-A143-6AED2AAF279C}"/>
-              </a:ext>
-            </a:extLst>
-          </p:cNvPr>
-          <p:cNvPicPr>
-            <a:picLocks noChangeAspect="1" noChangeArrowheads="1"/>
-          </p:cNvPicPr>
-          <p:nvPr/>
-        </p:nvPicPr>
-        <p:blipFill>
-          <a:blip r:embed="rId2">
-            <a:extLst>
-              <a:ext uri="{28A0092B-C50C-407E-A947-70E740481C1C}">
-                <a14:useLocalDpi xmlns:a14="http://schemas.microsoft.com/office/drawing/2010/main" val="0"/>
-              </a:ext>
-            </a:extLst>
-          </a:blip>
-          <a:srcRect/>
-          <a:stretch>
-            <a:fillRect/>
-          </a:stretch>
-        </p:blipFill>
-        <p:spPr bwMode="auto">
-          <a:xfrm>
-            <a:off x="0" y="2025650"/>
-            <a:ext cx="12192000" cy="2805113"/>
-          </a:xfrm>
-          <a:prstGeom prst="rect">
-            <a:avLst/>
-          </a:prstGeom>
-          <a:noFill/>
-          <a:extLst>
-            <a:ext uri="{909E8E84-426E-40DD-AFC4-6F175D3DCCD1}">
-              <a14:hiddenFill xmlns:a14="http://schemas.microsoft.com/office/drawing/2010/main">
-                <a:solidFill>
-                  <a:srgbClr val="FFFFFF"/>
-                </a:solidFill>
-              </a14:hiddenFill>
-            </a:ext>
-          </a:extLst>
-        </p:spPr>
-      </p:pic>
+      <p:sp>
+        <p:nvSpPr>
+          <p:cNvPr id="2" name="Content Placeholder 1"/>
+          <p:cNvSpPr>
+            <a:spLocks noGrp="1"/>
+          </p:cNvSpPr>
+          <p:nvPr>
+            <p:ph type="body" idx="1"/>
+          </p:nvPr>
+        </p:nvSpPr>
+        <p:spPr/>
+        <p:txBody>
+          <a:bodyPr>
+            <a:normAutofit fontScale="92500" lnSpcReduction="20000"/>
+          </a:bodyPr>
+          <a:lstStyle/>
+          <a:p>
+            <a:r>
+              <a:rPr lang="en-US" sz="2800" dirty="0"/>
+              <a:t>For train-test splits (CV or temporal)</a:t>
+            </a:r>
+          </a:p>
+          <a:p>
+            <a:pPr lvl="1"/>
+            <a:r>
+              <a:rPr lang="en-US" dirty="0"/>
+              <a:t>For subsets of Feature Sets (Demographic only, Behavior only, Temporal only, etc.)</a:t>
+            </a:r>
+          </a:p>
+          <a:p>
+            <a:pPr lvl="2"/>
+            <a:r>
+              <a:rPr lang="en-US" sz="2800" dirty="0"/>
+              <a:t>For Classifiers (RFC, SVM, DT, NN, </a:t>
+            </a:r>
+            <a:r>
+              <a:rPr lang="en-US" sz="2800" dirty="0" err="1"/>
+              <a:t>Logit</a:t>
+            </a:r>
+            <a:r>
+              <a:rPr lang="en-US" sz="2800" dirty="0"/>
+              <a:t>, GB, Boosting)</a:t>
+            </a:r>
+          </a:p>
+          <a:p>
+            <a:pPr lvl="3"/>
+            <a:r>
+              <a:rPr lang="en-US" sz="2800" dirty="0"/>
+              <a:t>For parameters (cross products of different parameters)</a:t>
+            </a:r>
+          </a:p>
+          <a:p>
+            <a:pPr lvl="4"/>
+            <a:r>
+              <a:rPr lang="en-US" sz="2800" dirty="0"/>
+              <a:t>Fit</a:t>
+            </a:r>
+          </a:p>
+          <a:p>
+            <a:pPr lvl="4"/>
+            <a:r>
+              <a:rPr lang="en-US" sz="2800" dirty="0"/>
+              <a:t>Predict</a:t>
+            </a:r>
+          </a:p>
+          <a:p>
+            <a:pPr lvl="4"/>
+            <a:r>
+              <a:rPr lang="en-US" sz="2800" dirty="0"/>
+              <a:t>Evaluate</a:t>
+            </a:r>
+          </a:p>
+        </p:txBody>
+      </p:sp>
     </p:spTree>
     <p:extLst>
       <p:ext uri="{BB962C8B-B14F-4D97-AF65-F5344CB8AC3E}">
-        <p14:creationId xmlns:p14="http://schemas.microsoft.com/office/powerpoint/2010/main" val="473448969"/>
+        <p14:creationId xmlns:p14="http://schemas.microsoft.com/office/powerpoint/2010/main" val="531683564"/>
       </p:ext>
     </p:extLst>
   </p:cSld>
